--- a/docs/SX3K-코팅섹션-분석결과.pptx
+++ b/docs/SX3K-코팅섹션-분석결과.pptx
@@ -3315,7 +3315,7 @@
         <p:spPr>
           <a:xfrm>
             <a:off x="384048" y="914400"/>
-            <a:ext cx="9107424" cy="292608"/>
+            <a:ext cx="5212080" cy="292608"/>
           </a:xfrm>
           <a:prstGeom prst="rect">
             <a:avLst/>
@@ -3354,8 +3354,8 @@
           <p:nvPr/>
         </p:nvGraphicFramePr>
         <p:xfrm>
-          <a:off x="457200" y="1234440"/>
-          <a:ext cx="9125712" cy="1920240"/>
+          <a:off x="384048" y="1234440"/>
+          <a:ext cx="5212080" cy="1920240"/>
         </p:xfrm>
         <a:graphic>
           <a:graphicData uri="http://schemas.openxmlformats.org/drawingml/2006/table">
@@ -3364,11 +3364,11 @@
                 <a:tableStyleId>{5C22544A-7EE6-4342-B048-85BDC9FD1C3A}</a:tableStyleId>
               </a:tblPr>
               <a:tblGrid>
-                <a:gridCol w="1371600"/>
-                <a:gridCol w="1938528"/>
-                <a:gridCol w="1938528"/>
-                <a:gridCol w="1938528"/>
-                <a:gridCol w="1938528"/>
+                <a:gridCol w="640080"/>
+                <a:gridCol w="1143000"/>
+                <a:gridCol w="1143000"/>
+                <a:gridCol w="1143000"/>
+                <a:gridCol w="1143000"/>
               </a:tblGrid>
               <a:tr h="320040">
                 <a:tc>
@@ -3378,7 +3378,7 @@
                     <a:p>
                       <a:pPr algn="ctr"/>
                       <a:r>
-                        <a:rPr sz="950" b="1">
+                        <a:rPr sz="850" b="1">
                           <a:solidFill>
                             <a:srgbClr val="FFFFFF"/>
                           </a:solidFill>
@@ -3388,7 +3388,7 @@
                       </a:r>
                     </a:p>
                   </a:txBody>
-                  <a:tcPr anchor="ctr" marL="36576" marR="36576" marT="18288" marB="18288">
+                  <a:tcPr anchor="ctr" marL="27432" marR="27432" marT="18288" marB="18288">
                     <a:lnL w="12700" cap="flat">
                       <a:solidFill>
                         <a:srgbClr val="000000"/>
@@ -3421,7 +3421,7 @@
                     <a:p>
                       <a:pPr algn="ctr"/>
                       <a:r>
-                        <a:rPr sz="950" b="1">
+                        <a:rPr sz="850" b="1">
                           <a:solidFill>
                             <a:srgbClr val="FFFFFF"/>
                           </a:solidFill>
@@ -3431,7 +3431,7 @@
                       </a:r>
                     </a:p>
                   </a:txBody>
-                  <a:tcPr anchor="ctr" marL="36576" marR="36576" marT="18288" marB="18288">
+                  <a:tcPr anchor="ctr" marL="27432" marR="27432" marT="18288" marB="18288">
                     <a:lnL w="12700" cap="flat">
                       <a:solidFill>
                         <a:srgbClr val="000000"/>
@@ -3464,7 +3464,7 @@
                     <a:p>
                       <a:pPr algn="ctr"/>
                       <a:r>
-                        <a:rPr sz="950" b="1">
+                        <a:rPr sz="850" b="1">
                           <a:solidFill>
                             <a:srgbClr val="FFFFFF"/>
                           </a:solidFill>
@@ -3474,7 +3474,7 @@
                       </a:r>
                     </a:p>
                   </a:txBody>
-                  <a:tcPr anchor="ctr" marL="36576" marR="36576" marT="18288" marB="18288">
+                  <a:tcPr anchor="ctr" marL="27432" marR="27432" marT="18288" marB="18288">
                     <a:lnL w="12700" cap="flat">
                       <a:solidFill>
                         <a:srgbClr val="000000"/>
@@ -3507,7 +3507,7 @@
                     <a:p>
                       <a:pPr algn="ctr"/>
                       <a:r>
-                        <a:rPr sz="950" b="1">
+                        <a:rPr sz="850" b="1">
                           <a:solidFill>
                             <a:srgbClr val="FFFFFF"/>
                           </a:solidFill>
@@ -3517,7 +3517,7 @@
                       </a:r>
                     </a:p>
                   </a:txBody>
-                  <a:tcPr anchor="ctr" marL="36576" marR="36576" marT="18288" marB="18288">
+                  <a:tcPr anchor="ctr" marL="27432" marR="27432" marT="18288" marB="18288">
                     <a:lnL w="12700" cap="flat">
                       <a:solidFill>
                         <a:srgbClr val="000000"/>
@@ -3550,7 +3550,7 @@
                     <a:p>
                       <a:pPr algn="ctr"/>
                       <a:r>
-                        <a:rPr sz="950" b="1">
+                        <a:rPr sz="850" b="1">
                           <a:solidFill>
                             <a:srgbClr val="FFFFFF"/>
                           </a:solidFill>
@@ -3560,7 +3560,7 @@
                       </a:r>
                     </a:p>
                   </a:txBody>
-                  <a:tcPr anchor="ctr" marL="36576" marR="36576" marT="18288" marB="18288">
+                  <a:tcPr anchor="ctr" marL="27432" marR="27432" marT="18288" marB="18288">
                     <a:lnL w="12700" cap="flat">
                       <a:solidFill>
                         <a:srgbClr val="000000"/>
@@ -3595,7 +3595,7 @@
                     <a:p>
                       <a:pPr algn="ctr"/>
                       <a:r>
-                        <a:rPr sz="900" b="1">
+                        <a:rPr sz="800" b="1">
                           <a:solidFill>
                             <a:srgbClr val="000000"/>
                           </a:solidFill>
@@ -3605,7 +3605,7 @@
                       </a:r>
                     </a:p>
                   </a:txBody>
-                  <a:tcPr anchor="ctr" marL="36576" marR="36576" marT="18288" marB="18288">
+                  <a:tcPr anchor="ctr" marL="27432" marR="27432" marT="18288" marB="18288">
                     <a:lnL w="12700" cap="flat">
                       <a:solidFill>
                         <a:srgbClr val="000000"/>
@@ -3638,7 +3638,7 @@
                     <a:p>
                       <a:pPr algn="ctr"/>
                       <a:r>
-                        <a:rPr sz="900" b="0">
+                        <a:rPr sz="800" b="0">
                           <a:solidFill>
                             <a:srgbClr val="000000"/>
                           </a:solidFill>
@@ -3648,7 +3648,7 @@
                       </a:r>
                     </a:p>
                   </a:txBody>
-                  <a:tcPr anchor="ctr" marL="36576" marR="36576" marT="18288" marB="18288">
+                  <a:tcPr anchor="ctr" marL="27432" marR="27432" marT="18288" marB="18288">
                     <a:lnL w="12700" cap="flat">
                       <a:solidFill>
                         <a:srgbClr val="000000"/>
@@ -3681,7 +3681,7 @@
                     <a:p>
                       <a:pPr algn="ctr"/>
                       <a:r>
-                        <a:rPr sz="900" b="0">
+                        <a:rPr sz="800" b="0">
                           <a:solidFill>
                             <a:srgbClr val="000000"/>
                           </a:solidFill>
@@ -3691,7 +3691,7 @@
                       </a:r>
                     </a:p>
                   </a:txBody>
-                  <a:tcPr anchor="ctr" marL="36576" marR="36576" marT="18288" marB="18288">
+                  <a:tcPr anchor="ctr" marL="27432" marR="27432" marT="18288" marB="18288">
                     <a:lnL w="12700" cap="flat">
                       <a:solidFill>
                         <a:srgbClr val="000000"/>
@@ -3724,7 +3724,7 @@
                     <a:p>
                       <a:pPr algn="ctr"/>
                       <a:r>
-                        <a:rPr sz="900" b="0">
+                        <a:rPr sz="800" b="0">
                           <a:solidFill>
                             <a:srgbClr val="000000"/>
                           </a:solidFill>
@@ -3734,7 +3734,7 @@
                       </a:r>
                     </a:p>
                   </a:txBody>
-                  <a:tcPr anchor="ctr" marL="36576" marR="36576" marT="18288" marB="18288">
+                  <a:tcPr anchor="ctr" marL="27432" marR="27432" marT="18288" marB="18288">
                     <a:lnL w="12700" cap="flat">
                       <a:solidFill>
                         <a:srgbClr val="000000"/>
@@ -3767,7 +3767,7 @@
                     <a:p>
                       <a:pPr algn="ctr"/>
                       <a:r>
-                        <a:rPr sz="900" b="0">
+                        <a:rPr sz="800" b="0">
                           <a:solidFill>
                             <a:srgbClr val="000000"/>
                           </a:solidFill>
@@ -3777,7 +3777,7 @@
                       </a:r>
                     </a:p>
                   </a:txBody>
-                  <a:tcPr anchor="ctr" marL="36576" marR="36576" marT="18288" marB="18288">
+                  <a:tcPr anchor="ctr" marL="27432" marR="27432" marT="18288" marB="18288">
                     <a:lnL w="12700" cap="flat">
                       <a:solidFill>
                         <a:srgbClr val="000000"/>
@@ -3812,7 +3812,7 @@
                     <a:p>
                       <a:pPr algn="ctr"/>
                       <a:r>
-                        <a:rPr sz="900" b="1">
+                        <a:rPr sz="800" b="1">
                           <a:solidFill>
                             <a:srgbClr val="000000"/>
                           </a:solidFill>
@@ -3822,7 +3822,7 @@
                       </a:r>
                     </a:p>
                   </a:txBody>
-                  <a:tcPr anchor="ctr" marL="36576" marR="36576" marT="18288" marB="18288">
+                  <a:tcPr anchor="ctr" marL="27432" marR="27432" marT="18288" marB="18288">
                     <a:lnL w="12700" cap="flat">
                       <a:solidFill>
                         <a:srgbClr val="000000"/>
@@ -3855,7 +3855,7 @@
                     <a:p>
                       <a:pPr algn="ctr"/>
                       <a:r>
-                        <a:rPr sz="900" b="0">
+                        <a:rPr sz="800" b="0">
                           <a:solidFill>
                             <a:srgbClr val="000000"/>
                           </a:solidFill>
@@ -3865,7 +3865,7 @@
                       </a:r>
                     </a:p>
                   </a:txBody>
-                  <a:tcPr anchor="ctr" marL="36576" marR="36576" marT="18288" marB="18288">
+                  <a:tcPr anchor="ctr" marL="27432" marR="27432" marT="18288" marB="18288">
                     <a:lnL w="12700" cap="flat">
                       <a:solidFill>
                         <a:srgbClr val="000000"/>
@@ -3898,7 +3898,7 @@
                     <a:p>
                       <a:pPr algn="ctr"/>
                       <a:r>
-                        <a:rPr sz="900" b="0">
+                        <a:rPr sz="800" b="0">
                           <a:solidFill>
                             <a:srgbClr val="000000"/>
                           </a:solidFill>
@@ -3908,7 +3908,7 @@
                       </a:r>
                     </a:p>
                   </a:txBody>
-                  <a:tcPr anchor="ctr" marL="36576" marR="36576" marT="18288" marB="18288">
+                  <a:tcPr anchor="ctr" marL="27432" marR="27432" marT="18288" marB="18288">
                     <a:lnL w="12700" cap="flat">
                       <a:solidFill>
                         <a:srgbClr val="000000"/>
@@ -3941,7 +3941,7 @@
                     <a:p>
                       <a:pPr algn="ctr"/>
                       <a:r>
-                        <a:rPr sz="900" b="0">
+                        <a:rPr sz="800" b="0">
                           <a:solidFill>
                             <a:srgbClr val="000000"/>
                           </a:solidFill>
@@ -3951,7 +3951,7 @@
                       </a:r>
                     </a:p>
                   </a:txBody>
-                  <a:tcPr anchor="ctr" marL="36576" marR="36576" marT="18288" marB="18288">
+                  <a:tcPr anchor="ctr" marL="27432" marR="27432" marT="18288" marB="18288">
                     <a:lnL w="12700" cap="flat">
                       <a:solidFill>
                         <a:srgbClr val="000000"/>
@@ -3984,7 +3984,7 @@
                     <a:p>
                       <a:pPr algn="ctr"/>
                       <a:r>
-                        <a:rPr sz="900" b="0">
+                        <a:rPr sz="800" b="0">
                           <a:solidFill>
                             <a:srgbClr val="000000"/>
                           </a:solidFill>
@@ -3994,7 +3994,7 @@
                       </a:r>
                     </a:p>
                   </a:txBody>
-                  <a:tcPr anchor="ctr" marL="36576" marR="36576" marT="18288" marB="18288">
+                  <a:tcPr anchor="ctr" marL="27432" marR="27432" marT="18288" marB="18288">
                     <a:lnL w="12700" cap="flat">
                       <a:solidFill>
                         <a:srgbClr val="000000"/>
@@ -4029,7 +4029,7 @@
                     <a:p>
                       <a:pPr algn="ctr"/>
                       <a:r>
-                        <a:rPr sz="900" b="1">
+                        <a:rPr sz="800" b="1">
                           <a:solidFill>
                             <a:srgbClr val="000000"/>
                           </a:solidFill>
@@ -4039,7 +4039,7 @@
                       </a:r>
                     </a:p>
                   </a:txBody>
-                  <a:tcPr anchor="ctr" marL="36576" marR="36576" marT="18288" marB="18288">
+                  <a:tcPr anchor="ctr" marL="27432" marR="27432" marT="18288" marB="18288">
                     <a:lnL w="12700" cap="flat">
                       <a:solidFill>
                         <a:srgbClr val="000000"/>
@@ -4072,7 +4072,7 @@
                     <a:p>
                       <a:pPr algn="ctr"/>
                       <a:r>
-                        <a:rPr sz="900" b="0">
+                        <a:rPr sz="800" b="0">
                           <a:solidFill>
                             <a:srgbClr val="000000"/>
                           </a:solidFill>
@@ -4082,7 +4082,7 @@
                       </a:r>
                     </a:p>
                   </a:txBody>
-                  <a:tcPr anchor="ctr" marL="36576" marR="36576" marT="18288" marB="18288">
+                  <a:tcPr anchor="ctr" marL="27432" marR="27432" marT="18288" marB="18288">
                     <a:lnL w="12700" cap="flat">
                       <a:solidFill>
                         <a:srgbClr val="000000"/>
@@ -4115,7 +4115,7 @@
                     <a:p>
                       <a:pPr algn="ctr"/>
                       <a:r>
-                        <a:rPr sz="900" b="0">
+                        <a:rPr sz="800" b="0">
                           <a:solidFill>
                             <a:srgbClr val="000000"/>
                           </a:solidFill>
@@ -4125,7 +4125,7 @@
                       </a:r>
                     </a:p>
                   </a:txBody>
-                  <a:tcPr anchor="ctr" marL="36576" marR="36576" marT="18288" marB="18288">
+                  <a:tcPr anchor="ctr" marL="27432" marR="27432" marT="18288" marB="18288">
                     <a:lnL w="12700" cap="flat">
                       <a:solidFill>
                         <a:srgbClr val="000000"/>
@@ -4158,7 +4158,7 @@
                     <a:p>
                       <a:pPr algn="ctr"/>
                       <a:r>
-                        <a:rPr sz="900" b="0">
+                        <a:rPr sz="800" b="0">
                           <a:solidFill>
                             <a:srgbClr val="000000"/>
                           </a:solidFill>
@@ -4168,7 +4168,7 @@
                       </a:r>
                     </a:p>
                   </a:txBody>
-                  <a:tcPr anchor="ctr" marL="36576" marR="36576" marT="18288" marB="18288">
+                  <a:tcPr anchor="ctr" marL="27432" marR="27432" marT="18288" marB="18288">
                     <a:lnL w="12700" cap="flat">
                       <a:solidFill>
                         <a:srgbClr val="000000"/>
@@ -4201,7 +4201,7 @@
                     <a:p>
                       <a:pPr algn="ctr"/>
                       <a:r>
-                        <a:rPr sz="900" b="0">
+                        <a:rPr sz="800" b="0">
                           <a:solidFill>
                             <a:srgbClr val="000000"/>
                           </a:solidFill>
@@ -4211,7 +4211,7 @@
                       </a:r>
                     </a:p>
                   </a:txBody>
-                  <a:tcPr anchor="ctr" marL="36576" marR="36576" marT="18288" marB="18288">
+                  <a:tcPr anchor="ctr" marL="27432" marR="27432" marT="18288" marB="18288">
                     <a:lnL w="12700" cap="flat">
                       <a:solidFill>
                         <a:srgbClr val="000000"/>
@@ -4246,7 +4246,7 @@
                     <a:p>
                       <a:pPr algn="ctr"/>
                       <a:r>
-                        <a:rPr sz="900" b="1">
+                        <a:rPr sz="800" b="1">
                           <a:solidFill>
                             <a:srgbClr val="000000"/>
                           </a:solidFill>
@@ -4256,7 +4256,7 @@
                       </a:r>
                     </a:p>
                   </a:txBody>
-                  <a:tcPr anchor="ctr" marL="36576" marR="36576" marT="18288" marB="18288">
+                  <a:tcPr anchor="ctr" marL="27432" marR="27432" marT="18288" marB="18288">
                     <a:lnL w="12700" cap="flat">
                       <a:solidFill>
                         <a:srgbClr val="000000"/>
@@ -4289,7 +4289,7 @@
                     <a:p>
                       <a:pPr algn="ctr"/>
                       <a:r>
-                        <a:rPr sz="900" b="0">
+                        <a:rPr sz="800" b="0">
                           <a:solidFill>
                             <a:srgbClr val="000000"/>
                           </a:solidFill>
@@ -4299,7 +4299,7 @@
                       </a:r>
                     </a:p>
                   </a:txBody>
-                  <a:tcPr anchor="ctr" marL="36576" marR="36576" marT="18288" marB="18288">
+                  <a:tcPr anchor="ctr" marL="27432" marR="27432" marT="18288" marB="18288">
                     <a:lnL w="12700" cap="flat">
                       <a:solidFill>
                         <a:srgbClr val="000000"/>
@@ -4332,7 +4332,7 @@
                     <a:p>
                       <a:pPr algn="ctr"/>
                       <a:r>
-                        <a:rPr sz="900" b="0">
+                        <a:rPr sz="800" b="0">
                           <a:solidFill>
                             <a:srgbClr val="000000"/>
                           </a:solidFill>
@@ -4342,7 +4342,7 @@
                       </a:r>
                     </a:p>
                   </a:txBody>
-                  <a:tcPr anchor="ctr" marL="36576" marR="36576" marT="18288" marB="18288">
+                  <a:tcPr anchor="ctr" marL="27432" marR="27432" marT="18288" marB="18288">
                     <a:lnL w="12700" cap="flat">
                       <a:solidFill>
                         <a:srgbClr val="000000"/>
@@ -4375,7 +4375,7 @@
                     <a:p>
                       <a:pPr algn="ctr"/>
                       <a:r>
-                        <a:rPr sz="900" b="0">
+                        <a:rPr sz="800" b="0">
                           <a:solidFill>
                             <a:srgbClr val="000000"/>
                           </a:solidFill>
@@ -4385,7 +4385,7 @@
                       </a:r>
                     </a:p>
                   </a:txBody>
-                  <a:tcPr anchor="ctr" marL="36576" marR="36576" marT="18288" marB="18288">
+                  <a:tcPr anchor="ctr" marL="27432" marR="27432" marT="18288" marB="18288">
                     <a:lnL w="12700" cap="flat">
                       <a:solidFill>
                         <a:srgbClr val="000000"/>
@@ -4418,7 +4418,7 @@
                     <a:p>
                       <a:pPr algn="ctr"/>
                       <a:r>
-                        <a:rPr sz="900" b="0">
+                        <a:rPr sz="800" b="0">
                           <a:solidFill>
                             <a:srgbClr val="000000"/>
                           </a:solidFill>
@@ -4428,7 +4428,7 @@
                       </a:r>
                     </a:p>
                   </a:txBody>
-                  <a:tcPr anchor="ctr" marL="36576" marR="36576" marT="18288" marB="18288">
+                  <a:tcPr anchor="ctr" marL="27432" marR="27432" marT="18288" marB="18288">
                     <a:lnL w="12700" cap="flat">
                       <a:solidFill>
                         <a:srgbClr val="000000"/>
@@ -4463,7 +4463,7 @@
                     <a:p>
                       <a:pPr algn="ctr"/>
                       <a:r>
-                        <a:rPr sz="900" b="1">
+                        <a:rPr sz="800" b="1">
                           <a:solidFill>
                             <a:srgbClr val="000000"/>
                           </a:solidFill>
@@ -4473,7 +4473,7 @@
                       </a:r>
                     </a:p>
                   </a:txBody>
-                  <a:tcPr anchor="ctr" marL="36576" marR="36576" marT="18288" marB="18288">
+                  <a:tcPr anchor="ctr" marL="27432" marR="27432" marT="18288" marB="18288">
                     <a:lnL w="12700" cap="flat">
                       <a:solidFill>
                         <a:srgbClr val="000000"/>
@@ -4506,7 +4506,7 @@
                     <a:p>
                       <a:pPr algn="ctr"/>
                       <a:r>
-                        <a:rPr sz="900" b="0">
+                        <a:rPr sz="800" b="0">
                           <a:solidFill>
                             <a:srgbClr val="000000"/>
                           </a:solidFill>
@@ -4516,7 +4516,7 @@
                       </a:r>
                     </a:p>
                   </a:txBody>
-                  <a:tcPr anchor="ctr" marL="36576" marR="36576" marT="18288" marB="18288">
+                  <a:tcPr anchor="ctr" marL="27432" marR="27432" marT="18288" marB="18288">
                     <a:lnL w="12700" cap="flat">
                       <a:solidFill>
                         <a:srgbClr val="000000"/>
@@ -4549,7 +4549,7 @@
                     <a:p>
                       <a:pPr algn="ctr"/>
                       <a:r>
-                        <a:rPr sz="900" b="0">
+                        <a:rPr sz="800" b="0">
                           <a:solidFill>
                             <a:srgbClr val="000000"/>
                           </a:solidFill>
@@ -4559,7 +4559,7 @@
                       </a:r>
                     </a:p>
                   </a:txBody>
-                  <a:tcPr anchor="ctr" marL="36576" marR="36576" marT="18288" marB="18288">
+                  <a:tcPr anchor="ctr" marL="27432" marR="27432" marT="18288" marB="18288">
                     <a:lnL w="12700" cap="flat">
                       <a:solidFill>
                         <a:srgbClr val="000000"/>
@@ -4592,7 +4592,7 @@
                     <a:p>
                       <a:pPr algn="ctr"/>
                       <a:r>
-                        <a:rPr sz="900" b="0">
+                        <a:rPr sz="800" b="0">
                           <a:solidFill>
                             <a:srgbClr val="000000"/>
                           </a:solidFill>
@@ -4602,7 +4602,7 @@
                       </a:r>
                     </a:p>
                   </a:txBody>
-                  <a:tcPr anchor="ctr" marL="36576" marR="36576" marT="18288" marB="18288">
+                  <a:tcPr anchor="ctr" marL="27432" marR="27432" marT="18288" marB="18288">
                     <a:lnL w="12700" cap="flat">
                       <a:solidFill>
                         <a:srgbClr val="000000"/>
@@ -4635,7 +4635,7 @@
                     <a:p>
                       <a:pPr algn="ctr"/>
                       <a:r>
-                        <a:rPr sz="900" b="0">
+                        <a:rPr sz="800" b="0">
                           <a:solidFill>
                             <a:srgbClr val="000000"/>
                           </a:solidFill>
@@ -4645,7 +4645,7 @@
                       </a:r>
                     </a:p>
                   </a:txBody>
-                  <a:tcPr anchor="ctr" marL="36576" marR="36576" marT="18288" marB="18288">
+                  <a:tcPr anchor="ctr" marL="27432" marR="27432" marT="18288" marB="18288">
                     <a:lnL w="12700" cap="flat">
                       <a:solidFill>
                         <a:srgbClr val="000000"/>
@@ -4684,8 +4684,8 @@
         </p:nvSpPr>
         <p:spPr>
           <a:xfrm>
-            <a:off x="457200" y="3246120"/>
-            <a:ext cx="8961120" cy="274320"/>
+            <a:off x="384048" y="3246120"/>
+            <a:ext cx="5212080" cy="274320"/>
           </a:xfrm>
           <a:prstGeom prst="rect">
             <a:avLst/>
@@ -4699,13 +4699,13 @@
           <a:lstStyle/>
           <a:p>
             <a:r>
-              <a:rPr sz="950">
+              <a:rPr sz="900">
                 <a:solidFill>
                   <a:srgbClr val="000000"/>
                 </a:solidFill>
                 <a:latin typeface="맑은 고딕"/>
               </a:rPr>
-              <a:t>■ Connector 전체 20개 측정 포인트: Min 536um / Max 1321um / AVG 1051.2um</a:t>
+              <a:t>■ 전체 20개 포인트: Min 536 / Max 1321 / AVG 1051.2um</a:t>
             </a:r>
           </a:p>
         </p:txBody>
@@ -4719,7 +4719,7 @@
         <p:spPr>
           <a:xfrm>
             <a:off x="384048" y="3566160"/>
-            <a:ext cx="9107424" cy="292608"/>
+            <a:ext cx="5212080" cy="292608"/>
           </a:xfrm>
           <a:prstGeom prst="rect">
             <a:avLst/>
@@ -4744,7 +4744,7 @@
                 </a:solidFill>
                 <a:latin typeface="맑은 고딕"/>
               </a:rPr>
-              <a:t>▣ UV Dose 구간별 경화율(%) — Connector 지그 ①②번 포인트</a:t>
+              <a:t>▣ UV Dose 구간별 경화율(%)</a:t>
             </a:r>
           </a:p>
         </p:txBody>
@@ -4758,8 +4758,8 @@
           <p:nvPr/>
         </p:nvGraphicFramePr>
         <p:xfrm>
-          <a:off x="457200" y="3886200"/>
-          <a:ext cx="9107424" cy="1755648"/>
+          <a:off x="384048" y="3886200"/>
+          <a:ext cx="5212079" cy="1755648"/>
         </p:xfrm>
         <a:graphic>
           <a:graphicData uri="http://schemas.openxmlformats.org/drawingml/2006/table">
@@ -4768,10 +4768,10 @@
                 <a:tableStyleId>{5C22544A-7EE6-4342-B048-85BDC9FD1C3A}</a:tableStyleId>
               </a:tblPr>
               <a:tblGrid>
-                <a:gridCol w="2276856"/>
-                <a:gridCol w="2276856"/>
-                <a:gridCol w="2276856"/>
-                <a:gridCol w="2276856"/>
+                <a:gridCol w="1554480"/>
+                <a:gridCol w="1218895"/>
+                <a:gridCol w="1218895"/>
+                <a:gridCol w="1219809"/>
               </a:tblGrid>
               <a:tr h="292608">
                 <a:tc>
@@ -4781,7 +4781,7 @@
                     <a:p>
                       <a:pPr algn="ctr"/>
                       <a:r>
-                        <a:rPr sz="950" b="1">
+                        <a:rPr sz="850" b="1">
                           <a:solidFill>
                             <a:srgbClr val="FFFFFF"/>
                           </a:solidFill>
@@ -4791,7 +4791,7 @@
                       </a:r>
                     </a:p>
                   </a:txBody>
-                  <a:tcPr anchor="ctr" marL="36576" marR="36576" marT="18288" marB="18288">
+                  <a:tcPr anchor="ctr" marL="27432" marR="27432" marT="18288" marB="18288">
                     <a:lnL w="12700" cap="flat">
                       <a:solidFill>
                         <a:srgbClr val="000000"/>
@@ -4824,7 +4824,7 @@
                     <a:p>
                       <a:pPr algn="ctr"/>
                       <a:r>
-                        <a:rPr sz="950" b="1">
+                        <a:rPr sz="850" b="1">
                           <a:solidFill>
                             <a:srgbClr val="FFFFFF"/>
                           </a:solidFill>
@@ -4834,7 +4834,7 @@
                       </a:r>
                     </a:p>
                   </a:txBody>
-                  <a:tcPr anchor="ctr" marL="36576" marR="36576" marT="18288" marB="18288">
+                  <a:tcPr anchor="ctr" marL="27432" marR="27432" marT="18288" marB="18288">
                     <a:lnL w="12700" cap="flat">
                       <a:solidFill>
                         <a:srgbClr val="000000"/>
@@ -4867,7 +4867,7 @@
                     <a:p>
                       <a:pPr algn="ctr"/>
                       <a:r>
-                        <a:rPr sz="950" b="1">
+                        <a:rPr sz="850" b="1">
                           <a:solidFill>
                             <a:srgbClr val="FFFFFF"/>
                           </a:solidFill>
@@ -4877,7 +4877,7 @@
                       </a:r>
                     </a:p>
                   </a:txBody>
-                  <a:tcPr anchor="ctr" marL="36576" marR="36576" marT="18288" marB="18288">
+                  <a:tcPr anchor="ctr" marL="27432" marR="27432" marT="18288" marB="18288">
                     <a:lnL w="12700" cap="flat">
                       <a:solidFill>
                         <a:srgbClr val="000000"/>
@@ -4910,7 +4910,7 @@
                     <a:p>
                       <a:pPr algn="ctr"/>
                       <a:r>
-                        <a:rPr sz="950" b="1">
+                        <a:rPr sz="850" b="1">
                           <a:solidFill>
                             <a:srgbClr val="FFFFFF"/>
                           </a:solidFill>
@@ -4920,7 +4920,7 @@
                       </a:r>
                     </a:p>
                   </a:txBody>
-                  <a:tcPr anchor="ctr" marL="36576" marR="36576" marT="18288" marB="18288">
+                  <a:tcPr anchor="ctr" marL="27432" marR="27432" marT="18288" marB="18288">
                     <a:lnL w="12700" cap="flat">
                       <a:solidFill>
                         <a:srgbClr val="000000"/>
@@ -4955,7 +4955,7 @@
                     <a:p>
                       <a:pPr algn="ctr"/>
                       <a:r>
-                        <a:rPr sz="950" b="1">
+                        <a:rPr sz="850" b="1">
                           <a:solidFill>
                             <a:srgbClr val="000000"/>
                           </a:solidFill>
@@ -4965,7 +4965,7 @@
                       </a:r>
                     </a:p>
                   </a:txBody>
-                  <a:tcPr anchor="ctr" marL="36576" marR="36576" marT="18288" marB="18288">
+                  <a:tcPr anchor="ctr" marL="27432" marR="27432" marT="18288" marB="18288">
                     <a:lnL w="12700" cap="flat">
                       <a:solidFill>
                         <a:srgbClr val="000000"/>
@@ -4998,7 +4998,7 @@
                     <a:p>
                       <a:pPr algn="ctr"/>
                       <a:r>
-                        <a:rPr sz="950" b="0">
+                        <a:rPr sz="850" b="0">
                           <a:solidFill>
                             <a:srgbClr val="000000"/>
                           </a:solidFill>
@@ -5008,7 +5008,7 @@
                       </a:r>
                     </a:p>
                   </a:txBody>
-                  <a:tcPr anchor="ctr" marL="36576" marR="36576" marT="18288" marB="18288">
+                  <a:tcPr anchor="ctr" marL="27432" marR="27432" marT="18288" marB="18288">
                     <a:lnL w="12700" cap="flat">
                       <a:solidFill>
                         <a:srgbClr val="000000"/>
@@ -5041,7 +5041,7 @@
                     <a:p>
                       <a:pPr algn="ctr"/>
                       <a:r>
-                        <a:rPr sz="950" b="0">
+                        <a:rPr sz="850" b="0">
                           <a:solidFill>
                             <a:srgbClr val="000000"/>
                           </a:solidFill>
@@ -5051,7 +5051,7 @@
                       </a:r>
                     </a:p>
                   </a:txBody>
-                  <a:tcPr anchor="ctr" marL="36576" marR="36576" marT="18288" marB="18288">
+                  <a:tcPr anchor="ctr" marL="27432" marR="27432" marT="18288" marB="18288">
                     <a:lnL w="12700" cap="flat">
                       <a:solidFill>
                         <a:srgbClr val="000000"/>
@@ -5084,7 +5084,7 @@
                     <a:p>
                       <a:pPr algn="ctr"/>
                       <a:r>
-                        <a:rPr sz="950" b="0">
+                        <a:rPr sz="850" b="0">
                           <a:solidFill>
                             <a:srgbClr val="000000"/>
                           </a:solidFill>
@@ -5094,7 +5094,7 @@
                       </a:r>
                     </a:p>
                   </a:txBody>
-                  <a:tcPr anchor="ctr" marL="36576" marR="36576" marT="18288" marB="18288">
+                  <a:tcPr anchor="ctr" marL="27432" marR="27432" marT="18288" marB="18288">
                     <a:lnL w="12700" cap="flat">
                       <a:solidFill>
                         <a:srgbClr val="000000"/>
@@ -5129,7 +5129,7 @@
                     <a:p>
                       <a:pPr algn="ctr"/>
                       <a:r>
-                        <a:rPr sz="950" b="1">
+                        <a:rPr sz="850" b="1">
                           <a:solidFill>
                             <a:srgbClr val="000000"/>
                           </a:solidFill>
@@ -5139,7 +5139,7 @@
                       </a:r>
                     </a:p>
                   </a:txBody>
-                  <a:tcPr anchor="ctr" marL="36576" marR="36576" marT="18288" marB="18288">
+                  <a:tcPr anchor="ctr" marL="27432" marR="27432" marT="18288" marB="18288">
                     <a:lnL w="12700" cap="flat">
                       <a:solidFill>
                         <a:srgbClr val="000000"/>
@@ -5172,7 +5172,7 @@
                     <a:p>
                       <a:pPr algn="ctr"/>
                       <a:r>
-                        <a:rPr sz="950" b="0">
+                        <a:rPr sz="850" b="0">
                           <a:solidFill>
                             <a:srgbClr val="000000"/>
                           </a:solidFill>
@@ -5182,7 +5182,7 @@
                       </a:r>
                     </a:p>
                   </a:txBody>
-                  <a:tcPr anchor="ctr" marL="36576" marR="36576" marT="18288" marB="18288">
+                  <a:tcPr anchor="ctr" marL="27432" marR="27432" marT="18288" marB="18288">
                     <a:lnL w="12700" cap="flat">
                       <a:solidFill>
                         <a:srgbClr val="000000"/>
@@ -5215,7 +5215,7 @@
                     <a:p>
                       <a:pPr algn="ctr"/>
                       <a:r>
-                        <a:rPr sz="950" b="0">
+                        <a:rPr sz="850" b="0">
                           <a:solidFill>
                             <a:srgbClr val="000000"/>
                           </a:solidFill>
@@ -5225,7 +5225,7 @@
                       </a:r>
                     </a:p>
                   </a:txBody>
-                  <a:tcPr anchor="ctr" marL="36576" marR="36576" marT="18288" marB="18288">
+                  <a:tcPr anchor="ctr" marL="27432" marR="27432" marT="18288" marB="18288">
                     <a:lnL w="12700" cap="flat">
                       <a:solidFill>
                         <a:srgbClr val="000000"/>
@@ -5258,7 +5258,7 @@
                     <a:p>
                       <a:pPr algn="ctr"/>
                       <a:r>
-                        <a:rPr sz="950" b="0">
+                        <a:rPr sz="850" b="0">
                           <a:solidFill>
                             <a:srgbClr val="000000"/>
                           </a:solidFill>
@@ -5268,7 +5268,7 @@
                       </a:r>
                     </a:p>
                   </a:txBody>
-                  <a:tcPr anchor="ctr" marL="36576" marR="36576" marT="18288" marB="18288">
+                  <a:tcPr anchor="ctr" marL="27432" marR="27432" marT="18288" marB="18288">
                     <a:lnL w="12700" cap="flat">
                       <a:solidFill>
                         <a:srgbClr val="000000"/>
@@ -5303,7 +5303,7 @@
                     <a:p>
                       <a:pPr algn="ctr"/>
                       <a:r>
-                        <a:rPr sz="950" b="1">
+                        <a:rPr sz="850" b="1">
                           <a:solidFill>
                             <a:srgbClr val="000000"/>
                           </a:solidFill>
@@ -5313,7 +5313,7 @@
                       </a:r>
                     </a:p>
                   </a:txBody>
-                  <a:tcPr anchor="ctr" marL="36576" marR="36576" marT="18288" marB="18288">
+                  <a:tcPr anchor="ctr" marL="27432" marR="27432" marT="18288" marB="18288">
                     <a:lnL w="12700" cap="flat">
                       <a:solidFill>
                         <a:srgbClr val="000000"/>
@@ -5346,7 +5346,7 @@
                     <a:p>
                       <a:pPr algn="ctr"/>
                       <a:r>
-                        <a:rPr sz="950" b="0">
+                        <a:rPr sz="850" b="0">
                           <a:solidFill>
                             <a:srgbClr val="000000"/>
                           </a:solidFill>
@@ -5356,7 +5356,7 @@
                       </a:r>
                     </a:p>
                   </a:txBody>
-                  <a:tcPr anchor="ctr" marL="36576" marR="36576" marT="18288" marB="18288">
+                  <a:tcPr anchor="ctr" marL="27432" marR="27432" marT="18288" marB="18288">
                     <a:lnL w="12700" cap="flat">
                       <a:solidFill>
                         <a:srgbClr val="000000"/>
@@ -5389,7 +5389,7 @@
                     <a:p>
                       <a:pPr algn="ctr"/>
                       <a:r>
-                        <a:rPr sz="950" b="0">
+                        <a:rPr sz="850" b="0">
                           <a:solidFill>
                             <a:srgbClr val="000000"/>
                           </a:solidFill>
@@ -5399,7 +5399,7 @@
                       </a:r>
                     </a:p>
                   </a:txBody>
-                  <a:tcPr anchor="ctr" marL="36576" marR="36576" marT="18288" marB="18288">
+                  <a:tcPr anchor="ctr" marL="27432" marR="27432" marT="18288" marB="18288">
                     <a:lnL w="12700" cap="flat">
                       <a:solidFill>
                         <a:srgbClr val="000000"/>
@@ -5432,7 +5432,7 @@
                     <a:p>
                       <a:pPr algn="ctr"/>
                       <a:r>
-                        <a:rPr sz="950" b="0">
+                        <a:rPr sz="850" b="0">
                           <a:solidFill>
                             <a:srgbClr val="000000"/>
                           </a:solidFill>
@@ -5442,7 +5442,7 @@
                       </a:r>
                     </a:p>
                   </a:txBody>
-                  <a:tcPr anchor="ctr" marL="36576" marR="36576" marT="18288" marB="18288">
+                  <a:tcPr anchor="ctr" marL="27432" marR="27432" marT="18288" marB="18288">
                     <a:lnL w="12700" cap="flat">
                       <a:solidFill>
                         <a:srgbClr val="000000"/>
@@ -5477,7 +5477,7 @@
                     <a:p>
                       <a:pPr algn="ctr"/>
                       <a:r>
-                        <a:rPr sz="950" b="1">
+                        <a:rPr sz="850" b="1">
                           <a:solidFill>
                             <a:srgbClr val="000000"/>
                           </a:solidFill>
@@ -5487,7 +5487,7 @@
                       </a:r>
                     </a:p>
                   </a:txBody>
-                  <a:tcPr anchor="ctr" marL="36576" marR="36576" marT="18288" marB="18288">
+                  <a:tcPr anchor="ctr" marL="27432" marR="27432" marT="18288" marB="18288">
                     <a:lnL w="12700" cap="flat">
                       <a:solidFill>
                         <a:srgbClr val="000000"/>
@@ -5520,7 +5520,7 @@
                     <a:p>
                       <a:pPr algn="ctr"/>
                       <a:r>
-                        <a:rPr sz="950" b="0">
+                        <a:rPr sz="850" b="0">
                           <a:solidFill>
                             <a:srgbClr val="000000"/>
                           </a:solidFill>
@@ -5530,7 +5530,7 @@
                       </a:r>
                     </a:p>
                   </a:txBody>
-                  <a:tcPr anchor="ctr" marL="36576" marR="36576" marT="18288" marB="18288">
+                  <a:tcPr anchor="ctr" marL="27432" marR="27432" marT="18288" marB="18288">
                     <a:lnL w="12700" cap="flat">
                       <a:solidFill>
                         <a:srgbClr val="000000"/>
@@ -5563,7 +5563,7 @@
                     <a:p>
                       <a:pPr algn="ctr"/>
                       <a:r>
-                        <a:rPr sz="950" b="0">
+                        <a:rPr sz="850" b="0">
                           <a:solidFill>
                             <a:srgbClr val="000000"/>
                           </a:solidFill>
@@ -5573,7 +5573,7 @@
                       </a:r>
                     </a:p>
                   </a:txBody>
-                  <a:tcPr anchor="ctr" marL="36576" marR="36576" marT="18288" marB="18288">
+                  <a:tcPr anchor="ctr" marL="27432" marR="27432" marT="18288" marB="18288">
                     <a:lnL w="12700" cap="flat">
                       <a:solidFill>
                         <a:srgbClr val="000000"/>
@@ -5606,7 +5606,7 @@
                     <a:p>
                       <a:pPr algn="ctr"/>
                       <a:r>
-                        <a:rPr sz="950" b="0">
+                        <a:rPr sz="850" b="0">
                           <a:solidFill>
                             <a:srgbClr val="000000"/>
                           </a:solidFill>
@@ -5616,7 +5616,7 @@
                       </a:r>
                     </a:p>
                   </a:txBody>
-                  <a:tcPr anchor="ctr" marL="36576" marR="36576" marT="18288" marB="18288">
+                  <a:tcPr anchor="ctr" marL="27432" marR="27432" marT="18288" marB="18288">
                     <a:lnL w="12700" cap="flat">
                       <a:solidFill>
                         <a:srgbClr val="000000"/>
@@ -5651,7 +5651,7 @@
                     <a:p>
                       <a:pPr algn="ctr"/>
                       <a:r>
-                        <a:rPr sz="950" b="1">
+                        <a:rPr sz="850" b="1">
                           <a:solidFill>
                             <a:srgbClr val="000000"/>
                           </a:solidFill>
@@ -5661,7 +5661,7 @@
                       </a:r>
                     </a:p>
                   </a:txBody>
-                  <a:tcPr anchor="ctr" marL="36576" marR="36576" marT="18288" marB="18288">
+                  <a:tcPr anchor="ctr" marL="27432" marR="27432" marT="18288" marB="18288">
                     <a:lnL w="12700" cap="flat">
                       <a:solidFill>
                         <a:srgbClr val="000000"/>
@@ -5694,7 +5694,7 @@
                     <a:p>
                       <a:pPr algn="ctr"/>
                       <a:r>
-                        <a:rPr sz="950" b="0">
+                        <a:rPr sz="850" b="0">
                           <a:solidFill>
                             <a:srgbClr val="000000"/>
                           </a:solidFill>
@@ -5704,7 +5704,7 @@
                       </a:r>
                     </a:p>
                   </a:txBody>
-                  <a:tcPr anchor="ctr" marL="36576" marR="36576" marT="18288" marB="18288">
+                  <a:tcPr anchor="ctr" marL="27432" marR="27432" marT="18288" marB="18288">
                     <a:lnL w="12700" cap="flat">
                       <a:solidFill>
                         <a:srgbClr val="000000"/>
@@ -5737,7 +5737,7 @@
                     <a:p>
                       <a:pPr algn="ctr"/>
                       <a:r>
-                        <a:rPr sz="950" b="0">
+                        <a:rPr sz="850" b="0">
                           <a:solidFill>
                             <a:srgbClr val="000000"/>
                           </a:solidFill>
@@ -5747,7 +5747,7 @@
                       </a:r>
                     </a:p>
                   </a:txBody>
-                  <a:tcPr anchor="ctr" marL="36576" marR="36576" marT="18288" marB="18288">
+                  <a:tcPr anchor="ctr" marL="27432" marR="27432" marT="18288" marB="18288">
                     <a:lnL w="12700" cap="flat">
                       <a:solidFill>
                         <a:srgbClr val="000000"/>
@@ -5780,7 +5780,7 @@
                     <a:p>
                       <a:pPr algn="ctr"/>
                       <a:r>
-                        <a:rPr sz="950" b="0">
+                        <a:rPr sz="850" b="0">
                           <a:solidFill>
                             <a:srgbClr val="000000"/>
                           </a:solidFill>
@@ -5790,7 +5790,7 @@
                       </a:r>
                     </a:p>
                   </a:txBody>
-                  <a:tcPr anchor="ctr" marL="36576" marR="36576" marT="18288" marB="18288">
+                  <a:tcPr anchor="ctr" marL="27432" marR="27432" marT="18288" marB="18288">
                     <a:lnL w="12700" cap="flat">
                       <a:solidFill>
                         <a:srgbClr val="000000"/>
@@ -5829,8 +5829,8 @@
         </p:nvSpPr>
         <p:spPr>
           <a:xfrm>
-            <a:off x="457200" y="5852160"/>
-            <a:ext cx="8961120" cy="365760"/>
+            <a:off x="384048" y="5852160"/>
+            <a:ext cx="5212080" cy="365760"/>
           </a:xfrm>
           <a:prstGeom prst="rect">
             <a:avLst/>
@@ -5844,13 +5844,138 @@
           <a:lstStyle/>
           <a:p>
             <a:r>
-              <a:rPr sz="950">
+              <a:rPr sz="900">
                 <a:solidFill>
                   <a:srgbClr val="909090"/>
                 </a:solidFill>
                 <a:latin typeface="맑은 고딕"/>
               </a:rPr>
-              <a:t>■ UV Dose 증가에 따라 경화율이 76.3%(4000-5000) → 95.85%(8000-9000)로 상승하는 경향 확인</a:t>
+              <a:t>■ UV Dose 증가에 따라 경화율이 76.3%→95.85%로 상승하는 경향 확인</a:t>
+            </a:r>
+          </a:p>
+        </p:txBody>
+      </p:sp>
+      <p:sp>
+        <p:nvSpPr>
+          <p:cNvPr id="11" name="Rectangle 10"/>
+          <p:cNvSpPr/>
+          <p:nvPr/>
+        </p:nvSpPr>
+        <p:spPr>
+          <a:xfrm>
+            <a:off x="5733288" y="914400"/>
+            <a:ext cx="3776472" cy="292608"/>
+          </a:xfrm>
+          <a:prstGeom prst="rect">
+            <a:avLst/>
+          </a:prstGeom>
+          <a:solidFill>
+            <a:srgbClr val="17365D"/>
+          </a:solidFill>
+          <a:ln>
+            <a:noFill/>
+          </a:ln>
+          <a:effectLst/>
+        </p:spPr>
+        <p:txBody>
+          <a:bodyPr rtlCol="0" anchor="ctr" wrap="square" lIns="73152" tIns="0" bIns="0"/>
+          <a:lstStyle/>
+          <a:p>
+            <a:pPr algn="l"/>
+            <a:r>
+              <a:rPr sz="1100" b="1">
+                <a:solidFill>
+                  <a:srgbClr val="FFFFFF"/>
+                </a:solidFill>
+                <a:latin typeface="맑은 고딕"/>
+              </a:rPr>
+              <a:t>▣ 대표 시료 사진</a:t>
+            </a:r>
+          </a:p>
+        </p:txBody>
+      </p:sp>
+      <p:sp>
+        <p:nvSpPr>
+          <p:cNvPr id="12" name="Rectangle 11"/>
+          <p:cNvSpPr/>
+          <p:nvPr/>
+        </p:nvSpPr>
+        <p:spPr>
+          <a:xfrm>
+            <a:off x="5733288" y="1344168"/>
+            <a:ext cx="3776472" cy="2048255"/>
+          </a:xfrm>
+          <a:prstGeom prst="rect">
+            <a:avLst/>
+          </a:prstGeom>
+          <a:solidFill>
+            <a:srgbClr val="F2F2F2"/>
+          </a:solidFill>
+          <a:ln w="12700">
+            <a:solidFill>
+              <a:srgbClr val="B0B0B0"/>
+            </a:solidFill>
+            <a:prstDash val="sysDot"/>
+          </a:ln>
+          <a:effectLst/>
+        </p:spPr>
+        <p:txBody>
+          <a:bodyPr rtlCol="0" anchor="ctr" wrap="square"/>
+          <a:lstStyle/>
+          <a:p>
+            <a:pPr algn="ctr"/>
+            <a:r>
+              <a:rPr sz="1000" b="0">
+                <a:solidFill>
+                  <a:srgbClr val="808080"/>
+                </a:solidFill>
+                <a:latin typeface="맑은 고딕"/>
+              </a:rPr>
+              <a:t>Connector 외관 사진
+(자리 예약)</a:t>
+            </a:r>
+          </a:p>
+        </p:txBody>
+      </p:sp>
+      <p:sp>
+        <p:nvSpPr>
+          <p:cNvPr id="13" name="Rectangle 12"/>
+          <p:cNvSpPr/>
+          <p:nvPr/>
+        </p:nvSpPr>
+        <p:spPr>
+          <a:xfrm>
+            <a:off x="5733288" y="3529584"/>
+            <a:ext cx="3776472" cy="2048255"/>
+          </a:xfrm>
+          <a:prstGeom prst="rect">
+            <a:avLst/>
+          </a:prstGeom>
+          <a:solidFill>
+            <a:srgbClr val="F2F2F2"/>
+          </a:solidFill>
+          <a:ln w="12700">
+            <a:solidFill>
+              <a:srgbClr val="B0B0B0"/>
+            </a:solidFill>
+            <a:prstDash val="sysDot"/>
+          </a:ln>
+          <a:effectLst/>
+        </p:spPr>
+        <p:txBody>
+          <a:bodyPr rtlCol="0" anchor="ctr" wrap="square"/>
+          <a:lstStyle/>
+          <a:p>
+            <a:pPr algn="ctr"/>
+            <a:r>
+              <a:rPr sz="1000" b="0">
+                <a:solidFill>
+                  <a:srgbClr val="808080"/>
+                </a:solidFill>
+                <a:latin typeface="맑은 고딕"/>
+              </a:rPr>
+              <a:t>Connector 단면 사진
+(자리 예약)</a:t>
             </a:r>
           </a:p>
         </p:txBody>
@@ -5994,7 +6119,7 @@
         <p:spPr>
           <a:xfrm>
             <a:off x="384048" y="914400"/>
-            <a:ext cx="9107424" cy="292608"/>
+            <a:ext cx="5212080" cy="292608"/>
           </a:xfrm>
           <a:prstGeom prst="rect">
             <a:avLst/>
@@ -6033,8 +6158,8 @@
           <p:nvPr/>
         </p:nvGraphicFramePr>
         <p:xfrm>
-          <a:off x="457200" y="1234440"/>
-          <a:ext cx="9107424" cy="960120"/>
+          <a:off x="384048" y="1234440"/>
+          <a:ext cx="5212078" cy="960120"/>
         </p:xfrm>
         <a:graphic>
           <a:graphicData uri="http://schemas.openxmlformats.org/drawingml/2006/table">
@@ -6043,10 +6168,10 @@
                 <a:tableStyleId>{5C22544A-7EE6-4342-B048-85BDC9FD1C3A}</a:tableStyleId>
               </a:tblPr>
               <a:tblGrid>
-                <a:gridCol w="1371600"/>
-                <a:gridCol w="2578608"/>
-                <a:gridCol w="2578608"/>
-                <a:gridCol w="2578608"/>
+                <a:gridCol w="640080"/>
+                <a:gridCol w="1524304"/>
+                <a:gridCol w="1524304"/>
+                <a:gridCol w="1523390"/>
               </a:tblGrid>
               <a:tr h="320040">
                 <a:tc>
@@ -6056,7 +6181,7 @@
                     <a:p>
                       <a:pPr algn="ctr"/>
                       <a:r>
-                        <a:rPr sz="950" b="1">
+                        <a:rPr sz="850" b="1">
                           <a:solidFill>
                             <a:srgbClr val="FFFFFF"/>
                           </a:solidFill>
@@ -6066,7 +6191,7 @@
                       </a:r>
                     </a:p>
                   </a:txBody>
-                  <a:tcPr anchor="ctr" marL="36576" marR="36576" marT="18288" marB="18288">
+                  <a:tcPr anchor="ctr" marL="27432" marR="27432" marT="18288" marB="18288">
                     <a:lnL w="12700" cap="flat">
                       <a:solidFill>
                         <a:srgbClr val="000000"/>
@@ -6099,7 +6224,7 @@
                     <a:p>
                       <a:pPr algn="ctr"/>
                       <a:r>
-                        <a:rPr sz="950" b="1">
+                        <a:rPr sz="850" b="1">
                           <a:solidFill>
                             <a:srgbClr val="FFFFFF"/>
                           </a:solidFill>
@@ -6109,7 +6234,7 @@
                       </a:r>
                     </a:p>
                   </a:txBody>
-                  <a:tcPr anchor="ctr" marL="36576" marR="36576" marT="18288" marB="18288">
+                  <a:tcPr anchor="ctr" marL="27432" marR="27432" marT="18288" marB="18288">
                     <a:lnL w="12700" cap="flat">
                       <a:solidFill>
                         <a:srgbClr val="000000"/>
@@ -6142,7 +6267,7 @@
                     <a:p>
                       <a:pPr algn="ctr"/>
                       <a:r>
-                        <a:rPr sz="950" b="1">
+                        <a:rPr sz="850" b="1">
                           <a:solidFill>
                             <a:srgbClr val="FFFFFF"/>
                           </a:solidFill>
@@ -6152,7 +6277,7 @@
                       </a:r>
                     </a:p>
                   </a:txBody>
-                  <a:tcPr anchor="ctr" marL="36576" marR="36576" marT="18288" marB="18288">
+                  <a:tcPr anchor="ctr" marL="27432" marR="27432" marT="18288" marB="18288">
                     <a:lnL w="12700" cap="flat">
                       <a:solidFill>
                         <a:srgbClr val="000000"/>
@@ -6185,7 +6310,7 @@
                     <a:p>
                       <a:pPr algn="ctr"/>
                       <a:r>
-                        <a:rPr sz="950" b="1">
+                        <a:rPr sz="850" b="1">
                           <a:solidFill>
                             <a:srgbClr val="FFFFFF"/>
                           </a:solidFill>
@@ -6195,7 +6320,7 @@
                       </a:r>
                     </a:p>
                   </a:txBody>
-                  <a:tcPr anchor="ctr" marL="36576" marR="36576" marT="18288" marB="18288">
+                  <a:tcPr anchor="ctr" marL="27432" marR="27432" marT="18288" marB="18288">
                     <a:lnL w="12700" cap="flat">
                       <a:solidFill>
                         <a:srgbClr val="000000"/>
@@ -6230,7 +6355,7 @@
                     <a:p>
                       <a:pPr algn="ctr"/>
                       <a:r>
-                        <a:rPr sz="900" b="1">
+                        <a:rPr sz="800" b="1">
                           <a:solidFill>
                             <a:srgbClr val="000000"/>
                           </a:solidFill>
@@ -6240,7 +6365,7 @@
                       </a:r>
                     </a:p>
                   </a:txBody>
-                  <a:tcPr anchor="ctr" marL="36576" marR="36576" marT="18288" marB="18288">
+                  <a:tcPr anchor="ctr" marL="27432" marR="27432" marT="18288" marB="18288">
                     <a:lnL w="12700" cap="flat">
                       <a:solidFill>
                         <a:srgbClr val="000000"/>
@@ -6273,7 +6398,7 @@
                     <a:p>
                       <a:pPr algn="ctr"/>
                       <a:r>
-                        <a:rPr sz="900" b="0">
+                        <a:rPr sz="800" b="0">
                           <a:solidFill>
                             <a:srgbClr val="000000"/>
                           </a:solidFill>
@@ -6283,7 +6408,7 @@
                       </a:r>
                     </a:p>
                   </a:txBody>
-                  <a:tcPr anchor="ctr" marL="36576" marR="36576" marT="18288" marB="18288">
+                  <a:tcPr anchor="ctr" marL="27432" marR="27432" marT="18288" marB="18288">
                     <a:lnL w="12700" cap="flat">
                       <a:solidFill>
                         <a:srgbClr val="000000"/>
@@ -6316,7 +6441,7 @@
                     <a:p>
                       <a:pPr algn="ctr"/>
                       <a:r>
-                        <a:rPr sz="900" b="0">
+                        <a:rPr sz="800" b="0">
                           <a:solidFill>
                             <a:srgbClr val="000000"/>
                           </a:solidFill>
@@ -6326,7 +6451,7 @@
                       </a:r>
                     </a:p>
                   </a:txBody>
-                  <a:tcPr anchor="ctr" marL="36576" marR="36576" marT="18288" marB="18288">
+                  <a:tcPr anchor="ctr" marL="27432" marR="27432" marT="18288" marB="18288">
                     <a:lnL w="12700" cap="flat">
                       <a:solidFill>
                         <a:srgbClr val="000000"/>
@@ -6359,7 +6484,7 @@
                     <a:p>
                       <a:pPr algn="ctr"/>
                       <a:r>
-                        <a:rPr sz="900" b="0">
+                        <a:rPr sz="800" b="0">
                           <a:solidFill>
                             <a:srgbClr val="000000"/>
                           </a:solidFill>
@@ -6369,7 +6494,7 @@
                       </a:r>
                     </a:p>
                   </a:txBody>
-                  <a:tcPr anchor="ctr" marL="36576" marR="36576" marT="18288" marB="18288">
+                  <a:tcPr anchor="ctr" marL="27432" marR="27432" marT="18288" marB="18288">
                     <a:lnL w="12700" cap="flat">
                       <a:solidFill>
                         <a:srgbClr val="000000"/>
@@ -6404,7 +6529,7 @@
                     <a:p>
                       <a:pPr algn="ctr"/>
                       <a:r>
-                        <a:rPr sz="900" b="1">
+                        <a:rPr sz="800" b="1">
                           <a:solidFill>
                             <a:srgbClr val="000000"/>
                           </a:solidFill>
@@ -6414,7 +6539,7 @@
                       </a:r>
                     </a:p>
                   </a:txBody>
-                  <a:tcPr anchor="ctr" marL="36576" marR="36576" marT="18288" marB="18288">
+                  <a:tcPr anchor="ctr" marL="27432" marR="27432" marT="18288" marB="18288">
                     <a:lnL w="12700" cap="flat">
                       <a:solidFill>
                         <a:srgbClr val="000000"/>
@@ -6447,7 +6572,7 @@
                     <a:p>
                       <a:pPr algn="ctr"/>
                       <a:r>
-                        <a:rPr sz="900" b="0">
+                        <a:rPr sz="800" b="0">
                           <a:solidFill>
                             <a:srgbClr val="000000"/>
                           </a:solidFill>
@@ -6457,7 +6582,7 @@
                       </a:r>
                     </a:p>
                   </a:txBody>
-                  <a:tcPr anchor="ctr" marL="36576" marR="36576" marT="18288" marB="18288">
+                  <a:tcPr anchor="ctr" marL="27432" marR="27432" marT="18288" marB="18288">
                     <a:lnL w="12700" cap="flat">
                       <a:solidFill>
                         <a:srgbClr val="000000"/>
@@ -6490,7 +6615,7 @@
                     <a:p>
                       <a:pPr algn="ctr"/>
                       <a:r>
-                        <a:rPr sz="900" b="0">
+                        <a:rPr sz="800" b="0">
                           <a:solidFill>
                             <a:srgbClr val="000000"/>
                           </a:solidFill>
@@ -6500,7 +6625,7 @@
                       </a:r>
                     </a:p>
                   </a:txBody>
-                  <a:tcPr anchor="ctr" marL="36576" marR="36576" marT="18288" marB="18288">
+                  <a:tcPr anchor="ctr" marL="27432" marR="27432" marT="18288" marB="18288">
                     <a:lnL w="12700" cap="flat">
                       <a:solidFill>
                         <a:srgbClr val="000000"/>
@@ -6533,7 +6658,7 @@
                     <a:p>
                       <a:pPr algn="ctr"/>
                       <a:r>
-                        <a:rPr sz="900" b="0">
+                        <a:rPr sz="800" b="0">
                           <a:solidFill>
                             <a:srgbClr val="000000"/>
                           </a:solidFill>
@@ -6543,7 +6668,7 @@
                       </a:r>
                     </a:p>
                   </a:txBody>
-                  <a:tcPr anchor="ctr" marL="36576" marR="36576" marT="18288" marB="18288">
+                  <a:tcPr anchor="ctr" marL="27432" marR="27432" marT="18288" marB="18288">
                     <a:lnL w="12700" cap="flat">
                       <a:solidFill>
                         <a:srgbClr val="000000"/>
@@ -6582,8 +6707,8 @@
         </p:nvSpPr>
         <p:spPr>
           <a:xfrm>
-            <a:off x="457200" y="2331720"/>
-            <a:ext cx="8961120" cy="914400"/>
+            <a:off x="384048" y="2331720"/>
+            <a:ext cx="5212080" cy="1188720"/>
           </a:xfrm>
           <a:prstGeom prst="rect">
             <a:avLst/>
@@ -6597,69 +6722,160 @@
           <a:lstStyle/>
           <a:p>
             <a:r>
-              <a:rPr sz="950">
+              <a:rPr sz="900">
                 <a:solidFill>
                   <a:srgbClr val="000000"/>
                 </a:solidFill>
                 <a:latin typeface="맑은 고딕"/>
               </a:rPr>
-              <a:t>■ NTC 전체 6개 측정 포인트: Min 77um / Max 203um / AVG 126.8um</a:t>
+              <a:t>■ NTC 전체 6개 포인트: Min 77 / Max 203 / AVG 126.8um</a:t>
             </a:r>
           </a:p>
           <a:p>
             <a:r>
-              <a:rPr sz="950">
+              <a:rPr sz="900">
                 <a:solidFill>
                   <a:srgbClr val="000000"/>
                 </a:solidFill>
                 <a:latin typeface="맑은 고딕"/>
               </a:rPr>
-              <a:t>■ NTC는 타 부위(Sensing Tab·Fuse·Connector) 대비 코팅 대상 면적이 작아 절대 두께값이</a:t>
+              <a:t>■ NTC는 타 부위 대비 코팅 대상 면적이 작아 절대 두께값이 낮게 형성되는 경향</a:t>
             </a:r>
           </a:p>
           <a:p>
             <a:r>
-              <a:rPr sz="950">
+              <a:rPr sz="900">
                 <a:solidFill>
                   <a:srgbClr val="000000"/>
                 </a:solidFill>
                 <a:latin typeface="맑은 고딕"/>
               </a:rPr>
-              <a:t>   낮게 형성되는 경향이며, 샘플 간 편차(#1 154~203um, #2 77~86um)는 별도 확인 필요</a:t>
+              <a:t>■ 샘플 간 편차(#1 154~203um, #2 77~86um)는 별도 확인 필요</a:t>
             </a:r>
           </a:p>
         </p:txBody>
       </p:sp>
       <p:sp>
         <p:nvSpPr>
-          <p:cNvPr id="8" name="TextBox 7"/>
-          <p:cNvSpPr txBox="1"/>
+          <p:cNvPr id="8" name="Rectangle 7"/>
+          <p:cNvSpPr/>
           <p:nvPr/>
         </p:nvSpPr>
         <p:spPr>
           <a:xfrm>
-            <a:off x="457200" y="3383280"/>
-            <a:ext cx="8961120" cy="274320"/>
+            <a:off x="5733288" y="914400"/>
+            <a:ext cx="3776472" cy="292608"/>
           </a:xfrm>
           <a:prstGeom prst="rect">
             <a:avLst/>
           </a:prstGeom>
-          <a:noFill/>
+          <a:solidFill>
+            <a:srgbClr val="17365D"/>
+          </a:solidFill>
+          <a:ln>
+            <a:noFill/>
+          </a:ln>
+          <a:effectLst/>
         </p:spPr>
         <p:txBody>
-          <a:bodyPr wrap="square">
-            <a:spAutoFit/>
-          </a:bodyPr>
+          <a:bodyPr rtlCol="0" anchor="ctr" wrap="square" lIns="73152" tIns="0" bIns="0"/>
           <a:lstStyle/>
           <a:p>
+            <a:pPr algn="l"/>
             <a:r>
-              <a:rPr sz="950">
+              <a:rPr sz="1100" b="1">
                 <a:solidFill>
-                  <a:srgbClr val="909090"/>
+                  <a:srgbClr val="FFFFFF"/>
                 </a:solidFill>
                 <a:latin typeface="맑은 고딕"/>
               </a:rPr>
-              <a:t>■ 사진자료(외관/단면 이미지)는 별첨 예정</a:t>
+              <a:t>▣ 대표 시료 사진</a:t>
+            </a:r>
+          </a:p>
+        </p:txBody>
+      </p:sp>
+      <p:sp>
+        <p:nvSpPr>
+          <p:cNvPr id="9" name="Rectangle 8"/>
+          <p:cNvSpPr/>
+          <p:nvPr/>
+        </p:nvSpPr>
+        <p:spPr>
+          <a:xfrm>
+            <a:off x="5733288" y="1344168"/>
+            <a:ext cx="3776472" cy="2048255"/>
+          </a:xfrm>
+          <a:prstGeom prst="rect">
+            <a:avLst/>
+          </a:prstGeom>
+          <a:solidFill>
+            <a:srgbClr val="F2F2F2"/>
+          </a:solidFill>
+          <a:ln w="12700">
+            <a:solidFill>
+              <a:srgbClr val="B0B0B0"/>
+            </a:solidFill>
+            <a:prstDash val="sysDot"/>
+          </a:ln>
+          <a:effectLst/>
+        </p:spPr>
+        <p:txBody>
+          <a:bodyPr rtlCol="0" anchor="ctr" wrap="square"/>
+          <a:lstStyle/>
+          <a:p>
+            <a:pPr algn="ctr"/>
+            <a:r>
+              <a:rPr sz="1000" b="0">
+                <a:solidFill>
+                  <a:srgbClr val="808080"/>
+                </a:solidFill>
+                <a:latin typeface="맑은 고딕"/>
+              </a:rPr>
+              <a:t>NTC 외관 사진
+(자리 예약)</a:t>
+            </a:r>
+          </a:p>
+        </p:txBody>
+      </p:sp>
+      <p:sp>
+        <p:nvSpPr>
+          <p:cNvPr id="10" name="Rectangle 9"/>
+          <p:cNvSpPr/>
+          <p:nvPr/>
+        </p:nvSpPr>
+        <p:spPr>
+          <a:xfrm>
+            <a:off x="5733288" y="3529584"/>
+            <a:ext cx="3776472" cy="2048255"/>
+          </a:xfrm>
+          <a:prstGeom prst="rect">
+            <a:avLst/>
+          </a:prstGeom>
+          <a:solidFill>
+            <a:srgbClr val="F2F2F2"/>
+          </a:solidFill>
+          <a:ln w="12700">
+            <a:solidFill>
+              <a:srgbClr val="B0B0B0"/>
+            </a:solidFill>
+            <a:prstDash val="sysDot"/>
+          </a:ln>
+          <a:effectLst/>
+        </p:spPr>
+        <p:txBody>
+          <a:bodyPr rtlCol="0" anchor="ctr" wrap="square"/>
+          <a:lstStyle/>
+          <a:p>
+            <a:pPr algn="ctr"/>
+            <a:r>
+              <a:rPr sz="1000" b="0">
+                <a:solidFill>
+                  <a:srgbClr val="808080"/>
+                </a:solidFill>
+                <a:latin typeface="맑은 고딕"/>
+              </a:rPr>
+              <a:t>NTC 단면 사진
+(자리 예약)</a:t>
             </a:r>
           </a:p>
         </p:txBody>
@@ -6875,7 +7091,7 @@
                       </a:r>
                     </a:p>
                   </a:txBody>
-                  <a:tcPr anchor="ctr" marL="36576" marR="36576" marT="18288" marB="18288">
+                  <a:tcPr anchor="ctr" marL="27432" marR="27432" marT="18288" marB="18288">
                     <a:lnL w="12700" cap="flat">
                       <a:solidFill>
                         <a:srgbClr val="000000"/>
@@ -6918,7 +7134,7 @@
                       </a:r>
                     </a:p>
                   </a:txBody>
-                  <a:tcPr anchor="ctr" marL="36576" marR="36576" marT="18288" marB="18288">
+                  <a:tcPr anchor="ctr" marL="27432" marR="27432" marT="18288" marB="18288">
                     <a:lnL w="12700" cap="flat">
                       <a:solidFill>
                         <a:srgbClr val="000000"/>
@@ -6961,7 +7177,7 @@
                       </a:r>
                     </a:p>
                   </a:txBody>
-                  <a:tcPr anchor="ctr" marL="36576" marR="36576" marT="18288" marB="18288">
+                  <a:tcPr anchor="ctr" marL="27432" marR="27432" marT="18288" marB="18288">
                     <a:lnL w="12700" cap="flat">
                       <a:solidFill>
                         <a:srgbClr val="000000"/>
@@ -7004,7 +7220,7 @@
                       </a:r>
                     </a:p>
                   </a:txBody>
-                  <a:tcPr anchor="ctr" marL="36576" marR="36576" marT="18288" marB="18288">
+                  <a:tcPr anchor="ctr" marL="27432" marR="27432" marT="18288" marB="18288">
                     <a:lnL w="12700" cap="flat">
                       <a:solidFill>
                         <a:srgbClr val="000000"/>
@@ -7049,7 +7265,7 @@
                       </a:r>
                     </a:p>
                   </a:txBody>
-                  <a:tcPr anchor="ctr" marL="36576" marR="36576" marT="18288" marB="18288">
+                  <a:tcPr anchor="ctr" marL="27432" marR="27432" marT="18288" marB="18288">
                     <a:lnL w="12700" cap="flat">
                       <a:solidFill>
                         <a:srgbClr val="000000"/>
@@ -7092,7 +7308,7 @@
                       </a:r>
                     </a:p>
                   </a:txBody>
-                  <a:tcPr anchor="ctr" marL="36576" marR="36576" marT="18288" marB="18288">
+                  <a:tcPr anchor="ctr" marL="27432" marR="27432" marT="18288" marB="18288">
                     <a:lnL w="12700" cap="flat">
                       <a:solidFill>
                         <a:srgbClr val="000000"/>
@@ -7135,7 +7351,7 @@
                       </a:r>
                     </a:p>
                   </a:txBody>
-                  <a:tcPr anchor="ctr" marL="36576" marR="36576" marT="18288" marB="18288">
+                  <a:tcPr anchor="ctr" marL="27432" marR="27432" marT="18288" marB="18288">
                     <a:lnL w="12700" cap="flat">
                       <a:solidFill>
                         <a:srgbClr val="000000"/>
@@ -7178,7 +7394,7 @@
                       </a:r>
                     </a:p>
                   </a:txBody>
-                  <a:tcPr anchor="ctr" marL="36576" marR="36576" marT="18288" marB="18288">
+                  <a:tcPr anchor="ctr" marL="27432" marR="27432" marT="18288" marB="18288">
                     <a:lnL w="12700" cap="flat">
                       <a:solidFill>
                         <a:srgbClr val="000000"/>
@@ -7223,7 +7439,7 @@
                       </a:r>
                     </a:p>
                   </a:txBody>
-                  <a:tcPr anchor="ctr" marL="36576" marR="36576" marT="18288" marB="18288">
+                  <a:tcPr anchor="ctr" marL="27432" marR="27432" marT="18288" marB="18288">
                     <a:lnL w="12700" cap="flat">
                       <a:solidFill>
                         <a:srgbClr val="000000"/>
@@ -7266,7 +7482,7 @@
                       </a:r>
                     </a:p>
                   </a:txBody>
-                  <a:tcPr anchor="ctr" marL="36576" marR="36576" marT="18288" marB="18288">
+                  <a:tcPr anchor="ctr" marL="27432" marR="27432" marT="18288" marB="18288">
                     <a:lnL w="12700" cap="flat">
                       <a:solidFill>
                         <a:srgbClr val="000000"/>
@@ -7309,7 +7525,7 @@
                       </a:r>
                     </a:p>
                   </a:txBody>
-                  <a:tcPr anchor="ctr" marL="36576" marR="36576" marT="18288" marB="18288">
+                  <a:tcPr anchor="ctr" marL="27432" marR="27432" marT="18288" marB="18288">
                     <a:lnL w="12700" cap="flat">
                       <a:solidFill>
                         <a:srgbClr val="000000"/>
@@ -7352,7 +7568,7 @@
                       </a:r>
                     </a:p>
                   </a:txBody>
-                  <a:tcPr anchor="ctr" marL="36576" marR="36576" marT="18288" marB="18288">
+                  <a:tcPr anchor="ctr" marL="27432" marR="27432" marT="18288" marB="18288">
                     <a:lnL w="12700" cap="flat">
                       <a:solidFill>
                         <a:srgbClr val="000000"/>
@@ -7397,7 +7613,7 @@
                       </a:r>
                     </a:p>
                   </a:txBody>
-                  <a:tcPr anchor="ctr" marL="36576" marR="36576" marT="18288" marB="18288">
+                  <a:tcPr anchor="ctr" marL="27432" marR="27432" marT="18288" marB="18288">
                     <a:lnL w="12700" cap="flat">
                       <a:solidFill>
                         <a:srgbClr val="000000"/>
@@ -7440,7 +7656,7 @@
                       </a:r>
                     </a:p>
                   </a:txBody>
-                  <a:tcPr anchor="ctr" marL="36576" marR="36576" marT="18288" marB="18288">
+                  <a:tcPr anchor="ctr" marL="27432" marR="27432" marT="18288" marB="18288">
                     <a:lnL w="12700" cap="flat">
                       <a:solidFill>
                         <a:srgbClr val="000000"/>
@@ -7483,7 +7699,7 @@
                       </a:r>
                     </a:p>
                   </a:txBody>
-                  <a:tcPr anchor="ctr" marL="36576" marR="36576" marT="18288" marB="18288">
+                  <a:tcPr anchor="ctr" marL="27432" marR="27432" marT="18288" marB="18288">
                     <a:lnL w="12700" cap="flat">
                       <a:solidFill>
                         <a:srgbClr val="000000"/>
@@ -7526,7 +7742,7 @@
                       </a:r>
                     </a:p>
                   </a:txBody>
-                  <a:tcPr anchor="ctr" marL="36576" marR="36576" marT="18288" marB="18288">
+                  <a:tcPr anchor="ctr" marL="27432" marR="27432" marT="18288" marB="18288">
                     <a:lnL w="12700" cap="flat">
                       <a:solidFill>
                         <a:srgbClr val="000000"/>
@@ -7571,7 +7787,7 @@
                       </a:r>
                     </a:p>
                   </a:txBody>
-                  <a:tcPr anchor="ctr" marL="36576" marR="36576" marT="18288" marB="18288">
+                  <a:tcPr anchor="ctr" marL="27432" marR="27432" marT="18288" marB="18288">
                     <a:lnL w="12700" cap="flat">
                       <a:solidFill>
                         <a:srgbClr val="000000"/>
@@ -7614,7 +7830,7 @@
                       </a:r>
                     </a:p>
                   </a:txBody>
-                  <a:tcPr anchor="ctr" marL="36576" marR="36576" marT="18288" marB="18288">
+                  <a:tcPr anchor="ctr" marL="27432" marR="27432" marT="18288" marB="18288">
                     <a:lnL w="12700" cap="flat">
                       <a:solidFill>
                         <a:srgbClr val="000000"/>
@@ -7657,7 +7873,7 @@
                       </a:r>
                     </a:p>
                   </a:txBody>
-                  <a:tcPr anchor="ctr" marL="36576" marR="36576" marT="18288" marB="18288">
+                  <a:tcPr anchor="ctr" marL="27432" marR="27432" marT="18288" marB="18288">
                     <a:lnL w="12700" cap="flat">
                       <a:solidFill>
                         <a:srgbClr val="000000"/>
@@ -7700,7 +7916,7 @@
                       </a:r>
                     </a:p>
                   </a:txBody>
-                  <a:tcPr anchor="ctr" marL="36576" marR="36576" marT="18288" marB="18288">
+                  <a:tcPr anchor="ctr" marL="27432" marR="27432" marT="18288" marB="18288">
                     <a:lnL w="12700" cap="flat">
                       <a:solidFill>
                         <a:srgbClr val="000000"/>
@@ -7971,7 +8187,7 @@
                 </a:solidFill>
                 <a:latin typeface="맑은 고딕"/>
               </a:rPr>
-              <a:t>■ 외관/단면 사진자료 첨부하여 최종본 업데이트</a:t>
+              <a:t>■ 부위별 대표 시료 사진(외관/단면) 첨부하여 최종본 업데이트</a:t>
             </a:r>
           </a:p>
           <a:p>
@@ -8434,7 +8650,7 @@
                       </a:r>
                     </a:p>
                   </a:txBody>
-                  <a:tcPr anchor="ctr" marL="36576" marR="36576" marT="18288" marB="18288">
+                  <a:tcPr anchor="ctr" marL="27432" marR="27432" marT="18288" marB="18288">
                     <a:lnL w="12700" cap="flat">
                       <a:solidFill>
                         <a:srgbClr val="000000"/>
@@ -8477,7 +8693,7 @@
                       </a:r>
                     </a:p>
                   </a:txBody>
-                  <a:tcPr anchor="ctr" marL="36576" marR="36576" marT="18288" marB="18288">
+                  <a:tcPr anchor="ctr" marL="27432" marR="27432" marT="18288" marB="18288">
                     <a:lnL w="12700" cap="flat">
                       <a:solidFill>
                         <a:srgbClr val="000000"/>
@@ -8522,7 +8738,7 @@
                       </a:r>
                     </a:p>
                   </a:txBody>
-                  <a:tcPr anchor="ctr" marL="36576" marR="36576" marT="18288" marB="18288">
+                  <a:tcPr anchor="ctr" marL="27432" marR="27432" marT="18288" marB="18288">
                     <a:lnL w="12700" cap="flat">
                       <a:solidFill>
                         <a:srgbClr val="000000"/>
@@ -8565,7 +8781,7 @@
                       </a:r>
                     </a:p>
                   </a:txBody>
-                  <a:tcPr anchor="ctr" marL="36576" marR="36576" marT="18288" marB="18288">
+                  <a:tcPr anchor="ctr" marL="27432" marR="27432" marT="18288" marB="18288">
                     <a:lnL w="12700" cap="flat">
                       <a:solidFill>
                         <a:srgbClr val="000000"/>
@@ -8610,7 +8826,7 @@
                       </a:r>
                     </a:p>
                   </a:txBody>
-                  <a:tcPr anchor="ctr" marL="36576" marR="36576" marT="18288" marB="18288">
+                  <a:tcPr anchor="ctr" marL="27432" marR="27432" marT="18288" marB="18288">
                     <a:lnL w="12700" cap="flat">
                       <a:solidFill>
                         <a:srgbClr val="000000"/>
@@ -8653,7 +8869,7 @@
                       </a:r>
                     </a:p>
                   </a:txBody>
-                  <a:tcPr anchor="ctr" marL="36576" marR="36576" marT="18288" marB="18288">
+                  <a:tcPr anchor="ctr" marL="27432" marR="27432" marT="18288" marB="18288">
                     <a:lnL w="12700" cap="flat">
                       <a:solidFill>
                         <a:srgbClr val="000000"/>
@@ -9002,7 +9218,7 @@
         <p:spPr>
           <a:xfrm>
             <a:off x="384048" y="914400"/>
-            <a:ext cx="9107424" cy="292608"/>
+            <a:ext cx="5212080" cy="292608"/>
           </a:xfrm>
           <a:prstGeom prst="rect">
             <a:avLst/>
@@ -9041,8 +9257,8 @@
           <p:nvPr/>
         </p:nvGraphicFramePr>
         <p:xfrm>
-          <a:off x="457200" y="1234440"/>
-          <a:ext cx="9875520" cy="2240280"/>
+          <a:off x="384048" y="1234440"/>
+          <a:ext cx="5212080" cy="2240280"/>
         </p:xfrm>
         <a:graphic>
           <a:graphicData uri="http://schemas.openxmlformats.org/drawingml/2006/table">
@@ -9051,12 +9267,12 @@
                 <a:tableStyleId>{5C22544A-7EE6-4342-B048-85BDC9FD1C3A}</a:tableStyleId>
               </a:tblPr>
               <a:tblGrid>
-                <a:gridCol w="1371600"/>
-                <a:gridCol w="1371600"/>
-                <a:gridCol w="1828800"/>
-                <a:gridCol w="1828800"/>
-                <a:gridCol w="1828800"/>
-                <a:gridCol w="1645920"/>
+                <a:gridCol w="731520"/>
+                <a:gridCol w="548640"/>
+                <a:gridCol w="982980"/>
+                <a:gridCol w="982980"/>
+                <a:gridCol w="982980"/>
+                <a:gridCol w="982980"/>
               </a:tblGrid>
               <a:tr h="320040">
                 <a:tc>
@@ -9066,7 +9282,7 @@
                     <a:p>
                       <a:pPr algn="ctr"/>
                       <a:r>
-                        <a:rPr sz="950" b="1">
+                        <a:rPr sz="850" b="1">
                           <a:solidFill>
                             <a:srgbClr val="FFFFFF"/>
                           </a:solidFill>
@@ -9076,7 +9292,7 @@
                       </a:r>
                     </a:p>
                   </a:txBody>
-                  <a:tcPr anchor="ctr" marL="36576" marR="36576" marT="18288" marB="18288">
+                  <a:tcPr anchor="ctr" marL="27432" marR="27432" marT="18288" marB="18288">
                     <a:lnL w="12700" cap="flat">
                       <a:solidFill>
                         <a:srgbClr val="000000"/>
@@ -9109,7 +9325,7 @@
                     <a:p>
                       <a:pPr algn="ctr"/>
                       <a:r>
-                        <a:rPr sz="950" b="1">
+                        <a:rPr sz="850" b="1">
                           <a:solidFill>
                             <a:srgbClr val="FFFFFF"/>
                           </a:solidFill>
@@ -9119,7 +9335,7 @@
                       </a:r>
                     </a:p>
                   </a:txBody>
-                  <a:tcPr anchor="ctr" marL="36576" marR="36576" marT="18288" marB="18288">
+                  <a:tcPr anchor="ctr" marL="27432" marR="27432" marT="18288" marB="18288">
                     <a:lnL w="12700" cap="flat">
                       <a:solidFill>
                         <a:srgbClr val="000000"/>
@@ -9152,7 +9368,7 @@
                     <a:p>
                       <a:pPr algn="ctr"/>
                       <a:r>
-                        <a:rPr sz="950" b="1">
+                        <a:rPr sz="850" b="1">
                           <a:solidFill>
                             <a:srgbClr val="FFFFFF"/>
                           </a:solidFill>
@@ -9162,7 +9378,7 @@
                       </a:r>
                     </a:p>
                   </a:txBody>
-                  <a:tcPr anchor="ctr" marL="36576" marR="36576" marT="18288" marB="18288">
+                  <a:tcPr anchor="ctr" marL="27432" marR="27432" marT="18288" marB="18288">
                     <a:lnL w="12700" cap="flat">
                       <a:solidFill>
                         <a:srgbClr val="000000"/>
@@ -9195,7 +9411,7 @@
                     <a:p>
                       <a:pPr algn="ctr"/>
                       <a:r>
-                        <a:rPr sz="950" b="1">
+                        <a:rPr sz="850" b="1">
                           <a:solidFill>
                             <a:srgbClr val="FFFFFF"/>
                           </a:solidFill>
@@ -9205,7 +9421,7 @@
                       </a:r>
                     </a:p>
                   </a:txBody>
-                  <a:tcPr anchor="ctr" marL="36576" marR="36576" marT="18288" marB="18288">
+                  <a:tcPr anchor="ctr" marL="27432" marR="27432" marT="18288" marB="18288">
                     <a:lnL w="12700" cap="flat">
                       <a:solidFill>
                         <a:srgbClr val="000000"/>
@@ -9238,7 +9454,7 @@
                     <a:p>
                       <a:pPr algn="ctr"/>
                       <a:r>
-                        <a:rPr sz="950" b="1">
+                        <a:rPr sz="850" b="1">
                           <a:solidFill>
                             <a:srgbClr val="FFFFFF"/>
                           </a:solidFill>
@@ -9248,7 +9464,7 @@
                       </a:r>
                     </a:p>
                   </a:txBody>
-                  <a:tcPr anchor="ctr" marL="36576" marR="36576" marT="18288" marB="18288">
+                  <a:tcPr anchor="ctr" marL="27432" marR="27432" marT="18288" marB="18288">
                     <a:lnL w="12700" cap="flat">
                       <a:solidFill>
                         <a:srgbClr val="000000"/>
@@ -9281,7 +9497,7 @@
                     <a:p>
                       <a:pPr algn="ctr"/>
                       <a:r>
-                        <a:rPr sz="950" b="1">
+                        <a:rPr sz="850" b="1">
                           <a:solidFill>
                             <a:srgbClr val="FFFFFF"/>
                           </a:solidFill>
@@ -9291,7 +9507,7 @@
                       </a:r>
                     </a:p>
                   </a:txBody>
-                  <a:tcPr anchor="ctr" marL="36576" marR="36576" marT="18288" marB="18288">
+                  <a:tcPr anchor="ctr" marL="27432" marR="27432" marT="18288" marB="18288">
                     <a:lnL w="12700" cap="flat">
                       <a:solidFill>
                         <a:srgbClr val="000000"/>
@@ -9326,7 +9542,7 @@
                     <a:p>
                       <a:pPr algn="ctr"/>
                       <a:r>
-                        <a:rPr sz="900" b="1">
+                        <a:rPr sz="800" b="1">
                           <a:solidFill>
                             <a:srgbClr val="000000"/>
                           </a:solidFill>
@@ -9336,7 +9552,7 @@
                       </a:r>
                     </a:p>
                   </a:txBody>
-                  <a:tcPr anchor="ctr" marL="36576" marR="36576" marT="18288" marB="18288">
+                  <a:tcPr anchor="ctr" marL="27432" marR="27432" marT="18288" marB="18288">
                     <a:lnL w="12700" cap="flat">
                       <a:solidFill>
                         <a:srgbClr val="000000"/>
@@ -9369,7 +9585,7 @@
                     <a:p>
                       <a:pPr algn="ctr"/>
                       <a:r>
-                        <a:rPr sz="900" b="0">
+                        <a:rPr sz="800" b="0">
                           <a:solidFill>
                             <a:srgbClr val="000000"/>
                           </a:solidFill>
@@ -9379,7 +9595,7 @@
                       </a:r>
                     </a:p>
                   </a:txBody>
-                  <a:tcPr anchor="ctr" marL="36576" marR="36576" marT="18288" marB="18288">
+                  <a:tcPr anchor="ctr" marL="27432" marR="27432" marT="18288" marB="18288">
                     <a:lnL w="12700" cap="flat">
                       <a:solidFill>
                         <a:srgbClr val="000000"/>
@@ -9412,7 +9628,7 @@
                     <a:p>
                       <a:pPr algn="ctr"/>
                       <a:r>
-                        <a:rPr sz="900" b="0">
+                        <a:rPr sz="800" b="0">
                           <a:solidFill>
                             <a:srgbClr val="000000"/>
                           </a:solidFill>
@@ -9422,7 +9638,7 @@
                       </a:r>
                     </a:p>
                   </a:txBody>
-                  <a:tcPr anchor="ctr" marL="36576" marR="36576" marT="18288" marB="18288">
+                  <a:tcPr anchor="ctr" marL="27432" marR="27432" marT="18288" marB="18288">
                     <a:lnL w="12700" cap="flat">
                       <a:solidFill>
                         <a:srgbClr val="000000"/>
@@ -9455,7 +9671,7 @@
                     <a:p>
                       <a:pPr algn="ctr"/>
                       <a:r>
-                        <a:rPr sz="900" b="0">
+                        <a:rPr sz="800" b="0">
                           <a:solidFill>
                             <a:srgbClr val="000000"/>
                           </a:solidFill>
@@ -9465,7 +9681,7 @@
                       </a:r>
                     </a:p>
                   </a:txBody>
-                  <a:tcPr anchor="ctr" marL="36576" marR="36576" marT="18288" marB="18288">
+                  <a:tcPr anchor="ctr" marL="27432" marR="27432" marT="18288" marB="18288">
                     <a:lnL w="12700" cap="flat">
                       <a:solidFill>
                         <a:srgbClr val="000000"/>
@@ -9498,7 +9714,7 @@
                     <a:p>
                       <a:pPr algn="ctr"/>
                       <a:r>
-                        <a:rPr sz="900" b="0">
+                        <a:rPr sz="800" b="0">
                           <a:solidFill>
                             <a:srgbClr val="000000"/>
                           </a:solidFill>
@@ -9508,7 +9724,7 @@
                       </a:r>
                     </a:p>
                   </a:txBody>
-                  <a:tcPr anchor="ctr" marL="36576" marR="36576" marT="18288" marB="18288">
+                  <a:tcPr anchor="ctr" marL="27432" marR="27432" marT="18288" marB="18288">
                     <a:lnL w="12700" cap="flat">
                       <a:solidFill>
                         <a:srgbClr val="000000"/>
@@ -9541,7 +9757,7 @@
                     <a:p>
                       <a:pPr algn="ctr"/>
                       <a:r>
-                        <a:rPr sz="900" b="0">
+                        <a:rPr sz="800" b="0">
                           <a:solidFill>
                             <a:srgbClr val="000000"/>
                           </a:solidFill>
@@ -9551,7 +9767,7 @@
                       </a:r>
                     </a:p>
                   </a:txBody>
-                  <a:tcPr anchor="ctr" marL="36576" marR="36576" marT="18288" marB="18288">
+                  <a:tcPr anchor="ctr" marL="27432" marR="27432" marT="18288" marB="18288">
                     <a:lnL w="12700" cap="flat">
                       <a:solidFill>
                         <a:srgbClr val="000000"/>
@@ -9586,7 +9802,7 @@
                     <a:p>
                       <a:pPr algn="ctr"/>
                       <a:r>
-                        <a:rPr sz="900" b="1">
+                        <a:rPr sz="800" b="1">
                           <a:solidFill>
                             <a:srgbClr val="000000"/>
                           </a:solidFill>
@@ -9596,7 +9812,7 @@
                       </a:r>
                     </a:p>
                   </a:txBody>
-                  <a:tcPr anchor="ctr" marL="36576" marR="36576" marT="18288" marB="18288">
+                  <a:tcPr anchor="ctr" marL="27432" marR="27432" marT="18288" marB="18288">
                     <a:lnL w="12700" cap="flat">
                       <a:solidFill>
                         <a:srgbClr val="000000"/>
@@ -9629,7 +9845,7 @@
                     <a:p>
                       <a:pPr algn="ctr"/>
                       <a:r>
-                        <a:rPr sz="900" b="0">
+                        <a:rPr sz="800" b="0">
                           <a:solidFill>
                             <a:srgbClr val="000000"/>
                           </a:solidFill>
@@ -9639,7 +9855,7 @@
                       </a:r>
                     </a:p>
                   </a:txBody>
-                  <a:tcPr anchor="ctr" marL="36576" marR="36576" marT="18288" marB="18288">
+                  <a:tcPr anchor="ctr" marL="27432" marR="27432" marT="18288" marB="18288">
                     <a:lnL w="12700" cap="flat">
                       <a:solidFill>
                         <a:srgbClr val="000000"/>
@@ -9672,7 +9888,7 @@
                     <a:p>
                       <a:pPr algn="ctr"/>
                       <a:r>
-                        <a:rPr sz="900" b="0">
+                        <a:rPr sz="800" b="0">
                           <a:solidFill>
                             <a:srgbClr val="000000"/>
                           </a:solidFill>
@@ -9682,7 +9898,7 @@
                       </a:r>
                     </a:p>
                   </a:txBody>
-                  <a:tcPr anchor="ctr" marL="36576" marR="36576" marT="18288" marB="18288">
+                  <a:tcPr anchor="ctr" marL="27432" marR="27432" marT="18288" marB="18288">
                     <a:lnL w="12700" cap="flat">
                       <a:solidFill>
                         <a:srgbClr val="000000"/>
@@ -9715,7 +9931,7 @@
                     <a:p>
                       <a:pPr algn="ctr"/>
                       <a:r>
-                        <a:rPr sz="900" b="0">
+                        <a:rPr sz="800" b="0">
                           <a:solidFill>
                             <a:srgbClr val="000000"/>
                           </a:solidFill>
@@ -9725,7 +9941,7 @@
                       </a:r>
                     </a:p>
                   </a:txBody>
-                  <a:tcPr anchor="ctr" marL="36576" marR="36576" marT="18288" marB="18288">
+                  <a:tcPr anchor="ctr" marL="27432" marR="27432" marT="18288" marB="18288">
                     <a:lnL w="12700" cap="flat">
                       <a:solidFill>
                         <a:srgbClr val="000000"/>
@@ -9758,7 +9974,7 @@
                     <a:p>
                       <a:pPr algn="ctr"/>
                       <a:r>
-                        <a:rPr sz="900" b="0">
+                        <a:rPr sz="800" b="0">
                           <a:solidFill>
                             <a:srgbClr val="000000"/>
                           </a:solidFill>
@@ -9768,7 +9984,7 @@
                       </a:r>
                     </a:p>
                   </a:txBody>
-                  <a:tcPr anchor="ctr" marL="36576" marR="36576" marT="18288" marB="18288">
+                  <a:tcPr anchor="ctr" marL="27432" marR="27432" marT="18288" marB="18288">
                     <a:lnL w="12700" cap="flat">
                       <a:solidFill>
                         <a:srgbClr val="000000"/>
@@ -9801,7 +10017,7 @@
                     <a:p>
                       <a:pPr algn="ctr"/>
                       <a:r>
-                        <a:rPr sz="900" b="0">
+                        <a:rPr sz="800" b="0">
                           <a:solidFill>
                             <a:srgbClr val="000000"/>
                           </a:solidFill>
@@ -9811,7 +10027,7 @@
                       </a:r>
                     </a:p>
                   </a:txBody>
-                  <a:tcPr anchor="ctr" marL="36576" marR="36576" marT="18288" marB="18288">
+                  <a:tcPr anchor="ctr" marL="27432" marR="27432" marT="18288" marB="18288">
                     <a:lnL w="12700" cap="flat">
                       <a:solidFill>
                         <a:srgbClr val="000000"/>
@@ -9846,7 +10062,7 @@
                     <a:p>
                       <a:pPr algn="ctr"/>
                       <a:r>
-                        <a:rPr sz="900" b="1">
+                        <a:rPr sz="800" b="1">
                           <a:solidFill>
                             <a:srgbClr val="000000"/>
                           </a:solidFill>
@@ -9856,7 +10072,7 @@
                       </a:r>
                     </a:p>
                   </a:txBody>
-                  <a:tcPr anchor="ctr" marL="36576" marR="36576" marT="18288" marB="18288">
+                  <a:tcPr anchor="ctr" marL="27432" marR="27432" marT="18288" marB="18288">
                     <a:lnL w="12700" cap="flat">
                       <a:solidFill>
                         <a:srgbClr val="000000"/>
@@ -9889,7 +10105,7 @@
                     <a:p>
                       <a:pPr algn="ctr"/>
                       <a:r>
-                        <a:rPr sz="900" b="0">
+                        <a:rPr sz="800" b="0">
                           <a:solidFill>
                             <a:srgbClr val="000000"/>
                           </a:solidFill>
@@ -9899,7 +10115,7 @@
                       </a:r>
                     </a:p>
                   </a:txBody>
-                  <a:tcPr anchor="ctr" marL="36576" marR="36576" marT="18288" marB="18288">
+                  <a:tcPr anchor="ctr" marL="27432" marR="27432" marT="18288" marB="18288">
                     <a:lnL w="12700" cap="flat">
                       <a:solidFill>
                         <a:srgbClr val="000000"/>
@@ -9932,7 +10148,7 @@
                     <a:p>
                       <a:pPr algn="ctr"/>
                       <a:r>
-                        <a:rPr sz="900" b="0">
+                        <a:rPr sz="800" b="0">
                           <a:solidFill>
                             <a:srgbClr val="000000"/>
                           </a:solidFill>
@@ -9942,7 +10158,7 @@
                       </a:r>
                     </a:p>
                   </a:txBody>
-                  <a:tcPr anchor="ctr" marL="36576" marR="36576" marT="18288" marB="18288">
+                  <a:tcPr anchor="ctr" marL="27432" marR="27432" marT="18288" marB="18288">
                     <a:lnL w="12700" cap="flat">
                       <a:solidFill>
                         <a:srgbClr val="000000"/>
@@ -9975,7 +10191,7 @@
                     <a:p>
                       <a:pPr algn="ctr"/>
                       <a:r>
-                        <a:rPr sz="900" b="0">
+                        <a:rPr sz="800" b="0">
                           <a:solidFill>
                             <a:srgbClr val="000000"/>
                           </a:solidFill>
@@ -9985,7 +10201,7 @@
                       </a:r>
                     </a:p>
                   </a:txBody>
-                  <a:tcPr anchor="ctr" marL="36576" marR="36576" marT="18288" marB="18288">
+                  <a:tcPr anchor="ctr" marL="27432" marR="27432" marT="18288" marB="18288">
                     <a:lnL w="12700" cap="flat">
                       <a:solidFill>
                         <a:srgbClr val="000000"/>
@@ -10018,7 +10234,7 @@
                     <a:p>
                       <a:pPr algn="ctr"/>
                       <a:r>
-                        <a:rPr sz="900" b="0">
+                        <a:rPr sz="800" b="0">
                           <a:solidFill>
                             <a:srgbClr val="000000"/>
                           </a:solidFill>
@@ -10028,7 +10244,7 @@
                       </a:r>
                     </a:p>
                   </a:txBody>
-                  <a:tcPr anchor="ctr" marL="36576" marR="36576" marT="18288" marB="18288">
+                  <a:tcPr anchor="ctr" marL="27432" marR="27432" marT="18288" marB="18288">
                     <a:lnL w="12700" cap="flat">
                       <a:solidFill>
                         <a:srgbClr val="000000"/>
@@ -10061,7 +10277,7 @@
                     <a:p>
                       <a:pPr algn="ctr"/>
                       <a:r>
-                        <a:rPr sz="900" b="0">
+                        <a:rPr sz="800" b="0">
                           <a:solidFill>
                             <a:srgbClr val="000000"/>
                           </a:solidFill>
@@ -10071,7 +10287,7 @@
                       </a:r>
                     </a:p>
                   </a:txBody>
-                  <a:tcPr anchor="ctr" marL="36576" marR="36576" marT="18288" marB="18288">
+                  <a:tcPr anchor="ctr" marL="27432" marR="27432" marT="18288" marB="18288">
                     <a:lnL w="12700" cap="flat">
                       <a:solidFill>
                         <a:srgbClr val="000000"/>
@@ -10106,7 +10322,7 @@
                     <a:p>
                       <a:pPr algn="ctr"/>
                       <a:r>
-                        <a:rPr sz="900" b="1">
+                        <a:rPr sz="800" b="1">
                           <a:solidFill>
                             <a:srgbClr val="000000"/>
                           </a:solidFill>
@@ -10116,7 +10332,7 @@
                       </a:r>
                     </a:p>
                   </a:txBody>
-                  <a:tcPr anchor="ctr" marL="36576" marR="36576" marT="18288" marB="18288">
+                  <a:tcPr anchor="ctr" marL="27432" marR="27432" marT="18288" marB="18288">
                     <a:lnL w="12700" cap="flat">
                       <a:solidFill>
                         <a:srgbClr val="000000"/>
@@ -10149,7 +10365,7 @@
                     <a:p>
                       <a:pPr algn="ctr"/>
                       <a:r>
-                        <a:rPr sz="900" b="0">
+                        <a:rPr sz="800" b="0">
                           <a:solidFill>
                             <a:srgbClr val="000000"/>
                           </a:solidFill>
@@ -10159,7 +10375,7 @@
                       </a:r>
                     </a:p>
                   </a:txBody>
-                  <a:tcPr anchor="ctr" marL="36576" marR="36576" marT="18288" marB="18288">
+                  <a:tcPr anchor="ctr" marL="27432" marR="27432" marT="18288" marB="18288">
                     <a:lnL w="12700" cap="flat">
                       <a:solidFill>
                         <a:srgbClr val="000000"/>
@@ -10192,7 +10408,7 @@
                     <a:p>
                       <a:pPr algn="ctr"/>
                       <a:r>
-                        <a:rPr sz="900" b="0">
+                        <a:rPr sz="800" b="0">
                           <a:solidFill>
                             <a:srgbClr val="000000"/>
                           </a:solidFill>
@@ -10202,7 +10418,7 @@
                       </a:r>
                     </a:p>
                   </a:txBody>
-                  <a:tcPr anchor="ctr" marL="36576" marR="36576" marT="18288" marB="18288">
+                  <a:tcPr anchor="ctr" marL="27432" marR="27432" marT="18288" marB="18288">
                     <a:lnL w="12700" cap="flat">
                       <a:solidFill>
                         <a:srgbClr val="000000"/>
@@ -10235,7 +10451,7 @@
                     <a:p>
                       <a:pPr algn="ctr"/>
                       <a:r>
-                        <a:rPr sz="900" b="0">
+                        <a:rPr sz="800" b="0">
                           <a:solidFill>
                             <a:srgbClr val="000000"/>
                           </a:solidFill>
@@ -10245,7 +10461,7 @@
                       </a:r>
                     </a:p>
                   </a:txBody>
-                  <a:tcPr anchor="ctr" marL="36576" marR="36576" marT="18288" marB="18288">
+                  <a:tcPr anchor="ctr" marL="27432" marR="27432" marT="18288" marB="18288">
                     <a:lnL w="12700" cap="flat">
                       <a:solidFill>
                         <a:srgbClr val="000000"/>
@@ -10278,7 +10494,7 @@
                     <a:p>
                       <a:pPr algn="ctr"/>
                       <a:r>
-                        <a:rPr sz="900" b="0">
+                        <a:rPr sz="800" b="0">
                           <a:solidFill>
                             <a:srgbClr val="000000"/>
                           </a:solidFill>
@@ -10288,7 +10504,7 @@
                       </a:r>
                     </a:p>
                   </a:txBody>
-                  <a:tcPr anchor="ctr" marL="36576" marR="36576" marT="18288" marB="18288">
+                  <a:tcPr anchor="ctr" marL="27432" marR="27432" marT="18288" marB="18288">
                     <a:lnL w="12700" cap="flat">
                       <a:solidFill>
                         <a:srgbClr val="000000"/>
@@ -10321,7 +10537,7 @@
                     <a:p>
                       <a:pPr algn="ctr"/>
                       <a:r>
-                        <a:rPr sz="900" b="0">
+                        <a:rPr sz="800" b="0">
                           <a:solidFill>
                             <a:srgbClr val="000000"/>
                           </a:solidFill>
@@ -10331,7 +10547,7 @@
                       </a:r>
                     </a:p>
                   </a:txBody>
-                  <a:tcPr anchor="ctr" marL="36576" marR="36576" marT="18288" marB="18288">
+                  <a:tcPr anchor="ctr" marL="27432" marR="27432" marT="18288" marB="18288">
                     <a:lnL w="12700" cap="flat">
                       <a:solidFill>
                         <a:srgbClr val="000000"/>
@@ -10366,7 +10582,7 @@
                     <a:p>
                       <a:pPr algn="ctr"/>
                       <a:r>
-                        <a:rPr sz="900" b="1">
+                        <a:rPr sz="800" b="1">
                           <a:solidFill>
                             <a:srgbClr val="000000"/>
                           </a:solidFill>
@@ -10376,7 +10592,7 @@
                       </a:r>
                     </a:p>
                   </a:txBody>
-                  <a:tcPr anchor="ctr" marL="36576" marR="36576" marT="18288" marB="18288">
+                  <a:tcPr anchor="ctr" marL="27432" marR="27432" marT="18288" marB="18288">
                     <a:lnL w="12700" cap="flat">
                       <a:solidFill>
                         <a:srgbClr val="000000"/>
@@ -10409,7 +10625,7 @@
                     <a:p>
                       <a:pPr algn="ctr"/>
                       <a:r>
-                        <a:rPr sz="900" b="0">
+                        <a:rPr sz="800" b="0">
                           <a:solidFill>
                             <a:srgbClr val="000000"/>
                           </a:solidFill>
@@ -10419,7 +10635,7 @@
                       </a:r>
                     </a:p>
                   </a:txBody>
-                  <a:tcPr anchor="ctr" marL="36576" marR="36576" marT="18288" marB="18288">
+                  <a:tcPr anchor="ctr" marL="27432" marR="27432" marT="18288" marB="18288">
                     <a:lnL w="12700" cap="flat">
                       <a:solidFill>
                         <a:srgbClr val="000000"/>
@@ -10452,7 +10668,7 @@
                     <a:p>
                       <a:pPr algn="ctr"/>
                       <a:r>
-                        <a:rPr sz="900" b="0">
+                        <a:rPr sz="800" b="0">
                           <a:solidFill>
                             <a:srgbClr val="000000"/>
                           </a:solidFill>
@@ -10462,7 +10678,7 @@
                       </a:r>
                     </a:p>
                   </a:txBody>
-                  <a:tcPr anchor="ctr" marL="36576" marR="36576" marT="18288" marB="18288">
+                  <a:tcPr anchor="ctr" marL="27432" marR="27432" marT="18288" marB="18288">
                     <a:lnL w="12700" cap="flat">
                       <a:solidFill>
                         <a:srgbClr val="000000"/>
@@ -10495,7 +10711,7 @@
                     <a:p>
                       <a:pPr algn="ctr"/>
                       <a:r>
-                        <a:rPr sz="900" b="0">
+                        <a:rPr sz="800" b="0">
                           <a:solidFill>
                             <a:srgbClr val="000000"/>
                           </a:solidFill>
@@ -10505,7 +10721,7 @@
                       </a:r>
                     </a:p>
                   </a:txBody>
-                  <a:tcPr anchor="ctr" marL="36576" marR="36576" marT="18288" marB="18288">
+                  <a:tcPr anchor="ctr" marL="27432" marR="27432" marT="18288" marB="18288">
                     <a:lnL w="12700" cap="flat">
                       <a:solidFill>
                         <a:srgbClr val="000000"/>
@@ -10538,7 +10754,7 @@
                     <a:p>
                       <a:pPr algn="ctr"/>
                       <a:r>
-                        <a:rPr sz="900" b="0">
+                        <a:rPr sz="800" b="0">
                           <a:solidFill>
                             <a:srgbClr val="000000"/>
                           </a:solidFill>
@@ -10548,7 +10764,7 @@
                       </a:r>
                     </a:p>
                   </a:txBody>
-                  <a:tcPr anchor="ctr" marL="36576" marR="36576" marT="18288" marB="18288">
+                  <a:tcPr anchor="ctr" marL="27432" marR="27432" marT="18288" marB="18288">
                     <a:lnL w="12700" cap="flat">
                       <a:solidFill>
                         <a:srgbClr val="000000"/>
@@ -10581,7 +10797,7 @@
                     <a:p>
                       <a:pPr algn="ctr"/>
                       <a:r>
-                        <a:rPr sz="900" b="0">
+                        <a:rPr sz="800" b="0">
                           <a:solidFill>
                             <a:srgbClr val="000000"/>
                           </a:solidFill>
@@ -10591,7 +10807,7 @@
                       </a:r>
                     </a:p>
                   </a:txBody>
-                  <a:tcPr anchor="ctr" marL="36576" marR="36576" marT="18288" marB="18288">
+                  <a:tcPr anchor="ctr" marL="27432" marR="27432" marT="18288" marB="18288">
                     <a:lnL w="12700" cap="flat">
                       <a:solidFill>
                         <a:srgbClr val="000000"/>
@@ -10626,7 +10842,7 @@
                     <a:p>
                       <a:pPr algn="ctr"/>
                       <a:r>
-                        <a:rPr sz="900" b="1">
+                        <a:rPr sz="800" b="1">
                           <a:solidFill>
                             <a:srgbClr val="000000"/>
                           </a:solidFill>
@@ -10636,7 +10852,7 @@
                       </a:r>
                     </a:p>
                   </a:txBody>
-                  <a:tcPr anchor="ctr" marL="36576" marR="36576" marT="18288" marB="18288">
+                  <a:tcPr anchor="ctr" marL="27432" marR="27432" marT="18288" marB="18288">
                     <a:lnL w="12700" cap="flat">
                       <a:solidFill>
                         <a:srgbClr val="000000"/>
@@ -10669,7 +10885,7 @@
                     <a:p>
                       <a:pPr algn="ctr"/>
                       <a:r>
-                        <a:rPr sz="900" b="0">
+                        <a:rPr sz="800" b="0">
                           <a:solidFill>
                             <a:srgbClr val="000000"/>
                           </a:solidFill>
@@ -10679,7 +10895,7 @@
                       </a:r>
                     </a:p>
                   </a:txBody>
-                  <a:tcPr anchor="ctr" marL="36576" marR="36576" marT="18288" marB="18288">
+                  <a:tcPr anchor="ctr" marL="27432" marR="27432" marT="18288" marB="18288">
                     <a:lnL w="12700" cap="flat">
                       <a:solidFill>
                         <a:srgbClr val="000000"/>
@@ -10712,7 +10928,7 @@
                     <a:p>
                       <a:pPr algn="ctr"/>
                       <a:r>
-                        <a:rPr sz="900" b="0">
+                        <a:rPr sz="800" b="0">
                           <a:solidFill>
                             <a:srgbClr val="000000"/>
                           </a:solidFill>
@@ -10722,7 +10938,7 @@
                       </a:r>
                     </a:p>
                   </a:txBody>
-                  <a:tcPr anchor="ctr" marL="36576" marR="36576" marT="18288" marB="18288">
+                  <a:tcPr anchor="ctr" marL="27432" marR="27432" marT="18288" marB="18288">
                     <a:lnL w="12700" cap="flat">
                       <a:solidFill>
                         <a:srgbClr val="000000"/>
@@ -10755,7 +10971,7 @@
                     <a:p>
                       <a:pPr algn="ctr"/>
                       <a:r>
-                        <a:rPr sz="900" b="0">
+                        <a:rPr sz="800" b="0">
                           <a:solidFill>
                             <a:srgbClr val="000000"/>
                           </a:solidFill>
@@ -10765,7 +10981,7 @@
                       </a:r>
                     </a:p>
                   </a:txBody>
-                  <a:tcPr anchor="ctr" marL="36576" marR="36576" marT="18288" marB="18288">
+                  <a:tcPr anchor="ctr" marL="27432" marR="27432" marT="18288" marB="18288">
                     <a:lnL w="12700" cap="flat">
                       <a:solidFill>
                         <a:srgbClr val="000000"/>
@@ -10798,7 +11014,7 @@
                     <a:p>
                       <a:pPr algn="ctr"/>
                       <a:r>
-                        <a:rPr sz="900" b="0">
+                        <a:rPr sz="800" b="0">
                           <a:solidFill>
                             <a:srgbClr val="000000"/>
                           </a:solidFill>
@@ -10808,7 +11024,7 @@
                       </a:r>
                     </a:p>
                   </a:txBody>
-                  <a:tcPr anchor="ctr" marL="36576" marR="36576" marT="18288" marB="18288">
+                  <a:tcPr anchor="ctr" marL="27432" marR="27432" marT="18288" marB="18288">
                     <a:lnL w="12700" cap="flat">
                       <a:solidFill>
                         <a:srgbClr val="000000"/>
@@ -10841,7 +11057,7 @@
                     <a:p>
                       <a:pPr algn="ctr"/>
                       <a:r>
-                        <a:rPr sz="900" b="0">
+                        <a:rPr sz="800" b="0">
                           <a:solidFill>
                             <a:srgbClr val="000000"/>
                           </a:solidFill>
@@ -10851,7 +11067,7 @@
                       </a:r>
                     </a:p>
                   </a:txBody>
-                  <a:tcPr anchor="ctr" marL="36576" marR="36576" marT="18288" marB="18288">
+                  <a:tcPr anchor="ctr" marL="27432" marR="27432" marT="18288" marB="18288">
                     <a:lnL w="12700" cap="flat">
                       <a:solidFill>
                         <a:srgbClr val="000000"/>
@@ -10891,7 +11107,7 @@
         <p:spPr>
           <a:xfrm>
             <a:off x="384048" y="3566160"/>
-            <a:ext cx="9107424" cy="292608"/>
+            <a:ext cx="5212080" cy="292608"/>
           </a:xfrm>
           <a:prstGeom prst="rect">
             <a:avLst/>
@@ -10930,8 +11146,8 @@
           <p:nvPr/>
         </p:nvGraphicFramePr>
         <p:xfrm>
-          <a:off x="457200" y="3886200"/>
-          <a:ext cx="9107424" cy="1463040"/>
+          <a:off x="384048" y="3886200"/>
+          <a:ext cx="5212079" cy="1463040"/>
         </p:xfrm>
         <a:graphic>
           <a:graphicData uri="http://schemas.openxmlformats.org/drawingml/2006/table">
@@ -10940,10 +11156,10 @@
                 <a:tableStyleId>{5C22544A-7EE6-4342-B048-85BDC9FD1C3A}</a:tableStyleId>
               </a:tblPr>
               <a:tblGrid>
-                <a:gridCol w="2286000"/>
-                <a:gridCol w="2286000"/>
-                <a:gridCol w="2286000"/>
-                <a:gridCol w="2249424"/>
+                <a:gridCol w="1280160"/>
+                <a:gridCol w="1310335"/>
+                <a:gridCol w="1310335"/>
+                <a:gridCol w="1311249"/>
               </a:tblGrid>
               <a:tr h="292608">
                 <a:tc>
@@ -10953,7 +11169,7 @@
                     <a:p>
                       <a:pPr algn="ctr"/>
                       <a:r>
-                        <a:rPr sz="950" b="1">
+                        <a:rPr sz="850" b="1">
                           <a:solidFill>
                             <a:srgbClr val="FFFFFF"/>
                           </a:solidFill>
@@ -10963,7 +11179,7 @@
                       </a:r>
                     </a:p>
                   </a:txBody>
-                  <a:tcPr anchor="ctr" marL="36576" marR="36576" marT="18288" marB="18288">
+                  <a:tcPr anchor="ctr" marL="27432" marR="27432" marT="18288" marB="18288">
                     <a:lnL w="12700" cap="flat">
                       <a:solidFill>
                         <a:srgbClr val="000000"/>
@@ -10996,17 +11212,17 @@
                     <a:p>
                       <a:pPr algn="ctr"/>
                       <a:r>
-                        <a:rPr sz="950" b="1">
+                        <a:rPr sz="850" b="1">
                           <a:solidFill>
                             <a:srgbClr val="FFFFFF"/>
                           </a:solidFill>
                           <a:latin typeface="맑은 고딕"/>
                         </a:rPr>
-                        <a:t>Min(um)</a:t>
-                      </a:r>
-                    </a:p>
-                  </a:txBody>
-                  <a:tcPr anchor="ctr" marL="36576" marR="36576" marT="18288" marB="18288">
+                        <a:t>Min</a:t>
+                      </a:r>
+                    </a:p>
+                  </a:txBody>
+                  <a:tcPr anchor="ctr" marL="27432" marR="27432" marT="18288" marB="18288">
                     <a:lnL w="12700" cap="flat">
                       <a:solidFill>
                         <a:srgbClr val="000000"/>
@@ -11039,17 +11255,17 @@
                     <a:p>
                       <a:pPr algn="ctr"/>
                       <a:r>
-                        <a:rPr sz="950" b="1">
+                        <a:rPr sz="850" b="1">
                           <a:solidFill>
                             <a:srgbClr val="FFFFFF"/>
                           </a:solidFill>
                           <a:latin typeface="맑은 고딕"/>
                         </a:rPr>
-                        <a:t>Max(um)</a:t>
-                      </a:r>
-                    </a:p>
-                  </a:txBody>
-                  <a:tcPr anchor="ctr" marL="36576" marR="36576" marT="18288" marB="18288">
+                        <a:t>Max</a:t>
+                      </a:r>
+                    </a:p>
+                  </a:txBody>
+                  <a:tcPr anchor="ctr" marL="27432" marR="27432" marT="18288" marB="18288">
                     <a:lnL w="12700" cap="flat">
                       <a:solidFill>
                         <a:srgbClr val="000000"/>
@@ -11082,17 +11298,17 @@
                     <a:p>
                       <a:pPr algn="ctr"/>
                       <a:r>
-                        <a:rPr sz="950" b="1">
+                        <a:rPr sz="850" b="1">
                           <a:solidFill>
                             <a:srgbClr val="FFFFFF"/>
                           </a:solidFill>
                           <a:latin typeface="맑은 고딕"/>
                         </a:rPr>
-                        <a:t>AVG(um)</a:t>
-                      </a:r>
-                    </a:p>
-                  </a:txBody>
-                  <a:tcPr anchor="ctr" marL="36576" marR="36576" marT="18288" marB="18288">
+                        <a:t>AVG</a:t>
+                      </a:r>
+                    </a:p>
+                  </a:txBody>
+                  <a:tcPr anchor="ctr" marL="27432" marR="27432" marT="18288" marB="18288">
                     <a:lnL w="12700" cap="flat">
                       <a:solidFill>
                         <a:srgbClr val="000000"/>
@@ -11127,7 +11343,7 @@
                     <a:p>
                       <a:pPr algn="ctr"/>
                       <a:r>
-                        <a:rPr sz="950" b="1">
+                        <a:rPr sz="850" b="1">
                           <a:solidFill>
                             <a:srgbClr val="000000"/>
                           </a:solidFill>
@@ -11137,7 +11353,7 @@
                       </a:r>
                     </a:p>
                   </a:txBody>
-                  <a:tcPr anchor="ctr" marL="36576" marR="36576" marT="18288" marB="18288">
+                  <a:tcPr anchor="ctr" marL="27432" marR="27432" marT="18288" marB="18288">
                     <a:lnL w="12700" cap="flat">
                       <a:solidFill>
                         <a:srgbClr val="000000"/>
@@ -11170,7 +11386,7 @@
                     <a:p>
                       <a:pPr algn="ctr"/>
                       <a:r>
-                        <a:rPr sz="950" b="0">
+                        <a:rPr sz="850" b="0">
                           <a:solidFill>
                             <a:srgbClr val="000000"/>
                           </a:solidFill>
@@ -11180,7 +11396,7 @@
                       </a:r>
                     </a:p>
                   </a:txBody>
-                  <a:tcPr anchor="ctr" marL="36576" marR="36576" marT="18288" marB="18288">
+                  <a:tcPr anchor="ctr" marL="27432" marR="27432" marT="18288" marB="18288">
                     <a:lnL w="12700" cap="flat">
                       <a:solidFill>
                         <a:srgbClr val="000000"/>
@@ -11213,7 +11429,7 @@
                     <a:p>
                       <a:pPr algn="ctr"/>
                       <a:r>
-                        <a:rPr sz="950" b="0">
+                        <a:rPr sz="850" b="0">
                           <a:solidFill>
                             <a:srgbClr val="000000"/>
                           </a:solidFill>
@@ -11223,7 +11439,7 @@
                       </a:r>
                     </a:p>
                   </a:txBody>
-                  <a:tcPr anchor="ctr" marL="36576" marR="36576" marT="18288" marB="18288">
+                  <a:tcPr anchor="ctr" marL="27432" marR="27432" marT="18288" marB="18288">
                     <a:lnL w="12700" cap="flat">
                       <a:solidFill>
                         <a:srgbClr val="000000"/>
@@ -11256,7 +11472,7 @@
                     <a:p>
                       <a:pPr algn="ctr"/>
                       <a:r>
-                        <a:rPr sz="950" b="0">
+                        <a:rPr sz="850" b="0">
                           <a:solidFill>
                             <a:srgbClr val="000000"/>
                           </a:solidFill>
@@ -11266,7 +11482,7 @@
                       </a:r>
                     </a:p>
                   </a:txBody>
-                  <a:tcPr anchor="ctr" marL="36576" marR="36576" marT="18288" marB="18288">
+                  <a:tcPr anchor="ctr" marL="27432" marR="27432" marT="18288" marB="18288">
                     <a:lnL w="12700" cap="flat">
                       <a:solidFill>
                         <a:srgbClr val="000000"/>
@@ -11301,7 +11517,7 @@
                     <a:p>
                       <a:pPr algn="ctr"/>
                       <a:r>
-                        <a:rPr sz="950" b="1">
+                        <a:rPr sz="850" b="1">
                           <a:solidFill>
                             <a:srgbClr val="000000"/>
                           </a:solidFill>
@@ -11311,7 +11527,7 @@
                       </a:r>
                     </a:p>
                   </a:txBody>
-                  <a:tcPr anchor="ctr" marL="36576" marR="36576" marT="18288" marB="18288">
+                  <a:tcPr anchor="ctr" marL="27432" marR="27432" marT="18288" marB="18288">
                     <a:lnL w="12700" cap="flat">
                       <a:solidFill>
                         <a:srgbClr val="000000"/>
@@ -11344,7 +11560,7 @@
                     <a:p>
                       <a:pPr algn="ctr"/>
                       <a:r>
-                        <a:rPr sz="950" b="0">
+                        <a:rPr sz="850" b="0">
                           <a:solidFill>
                             <a:srgbClr val="000000"/>
                           </a:solidFill>
@@ -11354,7 +11570,7 @@
                       </a:r>
                     </a:p>
                   </a:txBody>
-                  <a:tcPr anchor="ctr" marL="36576" marR="36576" marT="18288" marB="18288">
+                  <a:tcPr anchor="ctr" marL="27432" marR="27432" marT="18288" marB="18288">
                     <a:lnL w="12700" cap="flat">
                       <a:solidFill>
                         <a:srgbClr val="000000"/>
@@ -11387,7 +11603,7 @@
                     <a:p>
                       <a:pPr algn="ctr"/>
                       <a:r>
-                        <a:rPr sz="950" b="0">
+                        <a:rPr sz="850" b="0">
                           <a:solidFill>
                             <a:srgbClr val="000000"/>
                           </a:solidFill>
@@ -11397,7 +11613,7 @@
                       </a:r>
                     </a:p>
                   </a:txBody>
-                  <a:tcPr anchor="ctr" marL="36576" marR="36576" marT="18288" marB="18288">
+                  <a:tcPr anchor="ctr" marL="27432" marR="27432" marT="18288" marB="18288">
                     <a:lnL w="12700" cap="flat">
                       <a:solidFill>
                         <a:srgbClr val="000000"/>
@@ -11430,7 +11646,7 @@
                     <a:p>
                       <a:pPr algn="ctr"/>
                       <a:r>
-                        <a:rPr sz="950" b="0">
+                        <a:rPr sz="850" b="0">
                           <a:solidFill>
                             <a:srgbClr val="000000"/>
                           </a:solidFill>
@@ -11440,7 +11656,7 @@
                       </a:r>
                     </a:p>
                   </a:txBody>
-                  <a:tcPr anchor="ctr" marL="36576" marR="36576" marT="18288" marB="18288">
+                  <a:tcPr anchor="ctr" marL="27432" marR="27432" marT="18288" marB="18288">
                     <a:lnL w="12700" cap="flat">
                       <a:solidFill>
                         <a:srgbClr val="000000"/>
@@ -11475,7 +11691,7 @@
                     <a:p>
                       <a:pPr algn="ctr"/>
                       <a:r>
-                        <a:rPr sz="950" b="1">
+                        <a:rPr sz="850" b="1">
                           <a:solidFill>
                             <a:srgbClr val="000000"/>
                           </a:solidFill>
@@ -11485,7 +11701,7 @@
                       </a:r>
                     </a:p>
                   </a:txBody>
-                  <a:tcPr anchor="ctr" marL="36576" marR="36576" marT="18288" marB="18288">
+                  <a:tcPr anchor="ctr" marL="27432" marR="27432" marT="18288" marB="18288">
                     <a:lnL w="12700" cap="flat">
                       <a:solidFill>
                         <a:srgbClr val="000000"/>
@@ -11518,7 +11734,7 @@
                     <a:p>
                       <a:pPr algn="ctr"/>
                       <a:r>
-                        <a:rPr sz="950" b="0">
+                        <a:rPr sz="850" b="0">
                           <a:solidFill>
                             <a:srgbClr val="000000"/>
                           </a:solidFill>
@@ -11528,7 +11744,7 @@
                       </a:r>
                     </a:p>
                   </a:txBody>
-                  <a:tcPr anchor="ctr" marL="36576" marR="36576" marT="18288" marB="18288">
+                  <a:tcPr anchor="ctr" marL="27432" marR="27432" marT="18288" marB="18288">
                     <a:lnL w="12700" cap="flat">
                       <a:solidFill>
                         <a:srgbClr val="000000"/>
@@ -11561,7 +11777,7 @@
                     <a:p>
                       <a:pPr algn="ctr"/>
                       <a:r>
-                        <a:rPr sz="950" b="0">
+                        <a:rPr sz="850" b="0">
                           <a:solidFill>
                             <a:srgbClr val="000000"/>
                           </a:solidFill>
@@ -11571,7 +11787,7 @@
                       </a:r>
                     </a:p>
                   </a:txBody>
-                  <a:tcPr anchor="ctr" marL="36576" marR="36576" marT="18288" marB="18288">
+                  <a:tcPr anchor="ctr" marL="27432" marR="27432" marT="18288" marB="18288">
                     <a:lnL w="12700" cap="flat">
                       <a:solidFill>
                         <a:srgbClr val="000000"/>
@@ -11604,7 +11820,7 @@
                     <a:p>
                       <a:pPr algn="ctr"/>
                       <a:r>
-                        <a:rPr sz="950" b="0">
+                        <a:rPr sz="850" b="0">
                           <a:solidFill>
                             <a:srgbClr val="000000"/>
                           </a:solidFill>
@@ -11614,7 +11830,7 @@
                       </a:r>
                     </a:p>
                   </a:txBody>
-                  <a:tcPr anchor="ctr" marL="36576" marR="36576" marT="18288" marB="18288">
+                  <a:tcPr anchor="ctr" marL="27432" marR="27432" marT="18288" marB="18288">
                     <a:lnL w="12700" cap="flat">
                       <a:solidFill>
                         <a:srgbClr val="000000"/>
@@ -11649,7 +11865,7 @@
                     <a:p>
                       <a:pPr algn="ctr"/>
                       <a:r>
-                        <a:rPr sz="950" b="1">
+                        <a:rPr sz="850" b="1">
                           <a:solidFill>
                             <a:srgbClr val="000000"/>
                           </a:solidFill>
@@ -11659,7 +11875,7 @@
                       </a:r>
                     </a:p>
                   </a:txBody>
-                  <a:tcPr anchor="ctr" marL="36576" marR="36576" marT="18288" marB="18288">
+                  <a:tcPr anchor="ctr" marL="27432" marR="27432" marT="18288" marB="18288">
                     <a:lnL w="12700" cap="flat">
                       <a:solidFill>
                         <a:srgbClr val="000000"/>
@@ -11692,7 +11908,7 @@
                     <a:p>
                       <a:pPr algn="ctr"/>
                       <a:r>
-                        <a:rPr sz="950" b="0">
+                        <a:rPr sz="850" b="0">
                           <a:solidFill>
                             <a:srgbClr val="000000"/>
                           </a:solidFill>
@@ -11702,7 +11918,7 @@
                       </a:r>
                     </a:p>
                   </a:txBody>
-                  <a:tcPr anchor="ctr" marL="36576" marR="36576" marT="18288" marB="18288">
+                  <a:tcPr anchor="ctr" marL="27432" marR="27432" marT="18288" marB="18288">
                     <a:lnL w="12700" cap="flat">
                       <a:solidFill>
                         <a:srgbClr val="000000"/>
@@ -11735,7 +11951,7 @@
                     <a:p>
                       <a:pPr algn="ctr"/>
                       <a:r>
-                        <a:rPr sz="950" b="0">
+                        <a:rPr sz="850" b="0">
                           <a:solidFill>
                             <a:srgbClr val="000000"/>
                           </a:solidFill>
@@ -11745,7 +11961,7 @@
                       </a:r>
                     </a:p>
                   </a:txBody>
-                  <a:tcPr anchor="ctr" marL="36576" marR="36576" marT="18288" marB="18288">
+                  <a:tcPr anchor="ctr" marL="27432" marR="27432" marT="18288" marB="18288">
                     <a:lnL w="12700" cap="flat">
                       <a:solidFill>
                         <a:srgbClr val="000000"/>
@@ -11778,7 +11994,7 @@
                     <a:p>
                       <a:pPr algn="ctr"/>
                       <a:r>
-                        <a:rPr sz="950" b="0">
+                        <a:rPr sz="850" b="0">
                           <a:solidFill>
                             <a:srgbClr val="000000"/>
                           </a:solidFill>
@@ -11788,7 +12004,7 @@
                       </a:r>
                     </a:p>
                   </a:txBody>
-                  <a:tcPr anchor="ctr" marL="36576" marR="36576" marT="18288" marB="18288">
+                  <a:tcPr anchor="ctr" marL="27432" marR="27432" marT="18288" marB="18288">
                     <a:lnL w="12700" cap="flat">
                       <a:solidFill>
                         <a:srgbClr val="000000"/>
@@ -11827,8 +12043,8 @@
         </p:nvSpPr>
         <p:spPr>
           <a:xfrm>
-            <a:off x="457200" y="5486400"/>
-            <a:ext cx="8961120" cy="548640"/>
+            <a:off x="384048" y="5486400"/>
+            <a:ext cx="5212080" cy="457200"/>
           </a:xfrm>
           <a:prstGeom prst="rect">
             <a:avLst/>
@@ -11842,24 +12058,138 @@
           <a:lstStyle/>
           <a:p>
             <a:r>
-              <a:rPr sz="950">
+              <a:rPr sz="900">
                 <a:solidFill>
                   <a:srgbClr val="909090"/>
                 </a:solidFill>
                 <a:latin typeface="맑은 고딕"/>
               </a:rPr>
-              <a:t>■ Sensing Tab 전체 24개 측정 포인트 결과, 940~1350um 범위에서 안정적으로 분포</a:t>
+              <a:t>■ Sensing Tab 전체 24개 측정 포인트: 940~1350um 범위에서 안정적으로 분포</a:t>
             </a:r>
           </a:p>
+        </p:txBody>
+      </p:sp>
+      <p:sp>
+        <p:nvSpPr>
+          <p:cNvPr id="10" name="Rectangle 9"/>
+          <p:cNvSpPr/>
+          <p:nvPr/>
+        </p:nvSpPr>
+        <p:spPr>
+          <a:xfrm>
+            <a:off x="5733288" y="914400"/>
+            <a:ext cx="3776472" cy="292608"/>
+          </a:xfrm>
+          <a:prstGeom prst="rect">
+            <a:avLst/>
+          </a:prstGeom>
+          <a:solidFill>
+            <a:srgbClr val="17365D"/>
+          </a:solidFill>
+          <a:ln>
+            <a:noFill/>
+          </a:ln>
+          <a:effectLst/>
+        </p:spPr>
+        <p:txBody>
+          <a:bodyPr rtlCol="0" anchor="ctr" wrap="square" lIns="73152" tIns="0" bIns="0"/>
+          <a:lstStyle/>
           <a:p>
+            <a:pPr algn="l"/>
             <a:r>
-              <a:rPr sz="950">
+              <a:rPr sz="1100" b="1">
                 <a:solidFill>
-                  <a:srgbClr val="909090"/>
+                  <a:srgbClr val="FFFFFF"/>
                 </a:solidFill>
                 <a:latin typeface="맑은 고딕"/>
               </a:rPr>
-              <a:t>■ 사진자료(외관/단면 이미지)는 별첨 예정</a:t>
+              <a:t>▣ 대표 시료 사진</a:t>
+            </a:r>
+          </a:p>
+        </p:txBody>
+      </p:sp>
+      <p:sp>
+        <p:nvSpPr>
+          <p:cNvPr id="11" name="Rectangle 10"/>
+          <p:cNvSpPr/>
+          <p:nvPr/>
+        </p:nvSpPr>
+        <p:spPr>
+          <a:xfrm>
+            <a:off x="5733288" y="1344168"/>
+            <a:ext cx="3776472" cy="2048255"/>
+          </a:xfrm>
+          <a:prstGeom prst="rect">
+            <a:avLst/>
+          </a:prstGeom>
+          <a:solidFill>
+            <a:srgbClr val="F2F2F2"/>
+          </a:solidFill>
+          <a:ln w="12700">
+            <a:solidFill>
+              <a:srgbClr val="B0B0B0"/>
+            </a:solidFill>
+            <a:prstDash val="sysDot"/>
+          </a:ln>
+          <a:effectLst/>
+        </p:spPr>
+        <p:txBody>
+          <a:bodyPr rtlCol="0" anchor="ctr" wrap="square"/>
+          <a:lstStyle/>
+          <a:p>
+            <a:pPr algn="ctr"/>
+            <a:r>
+              <a:rPr sz="1000" b="0">
+                <a:solidFill>
+                  <a:srgbClr val="808080"/>
+                </a:solidFill>
+                <a:latin typeface="맑은 고딕"/>
+              </a:rPr>
+              <a:t>Sensing Tab 외관 사진
+(자리 예약)</a:t>
+            </a:r>
+          </a:p>
+        </p:txBody>
+      </p:sp>
+      <p:sp>
+        <p:nvSpPr>
+          <p:cNvPr id="12" name="Rectangle 11"/>
+          <p:cNvSpPr/>
+          <p:nvPr/>
+        </p:nvSpPr>
+        <p:spPr>
+          <a:xfrm>
+            <a:off x="5733288" y="3529584"/>
+            <a:ext cx="3776472" cy="2048255"/>
+          </a:xfrm>
+          <a:prstGeom prst="rect">
+            <a:avLst/>
+          </a:prstGeom>
+          <a:solidFill>
+            <a:srgbClr val="F2F2F2"/>
+          </a:solidFill>
+          <a:ln w="12700">
+            <a:solidFill>
+              <a:srgbClr val="B0B0B0"/>
+            </a:solidFill>
+            <a:prstDash val="sysDot"/>
+          </a:ln>
+          <a:effectLst/>
+        </p:spPr>
+        <p:txBody>
+          <a:bodyPr rtlCol="0" anchor="ctr" wrap="square"/>
+          <a:lstStyle/>
+          <a:p>
+            <a:pPr algn="ctr"/>
+            <a:r>
+              <a:rPr sz="1000" b="0">
+                <a:solidFill>
+                  <a:srgbClr val="808080"/>
+                </a:solidFill>
+                <a:latin typeface="맑은 고딕"/>
+              </a:rPr>
+              <a:t>Sensing Tab 단면 사진
+(자리 예약)</a:t>
             </a:r>
           </a:p>
         </p:txBody>
@@ -12003,7 +12333,7 @@
         <p:spPr>
           <a:xfrm>
             <a:off x="384048" y="914400"/>
-            <a:ext cx="9107424" cy="292608"/>
+            <a:ext cx="5212080" cy="292608"/>
           </a:xfrm>
           <a:prstGeom prst="rect">
             <a:avLst/>
@@ -12042,8 +12372,8 @@
           <p:nvPr/>
         </p:nvGraphicFramePr>
         <p:xfrm>
-          <a:off x="457200" y="1234440"/>
-          <a:ext cx="9107424" cy="2240280"/>
+          <a:off x="384048" y="1234440"/>
+          <a:ext cx="5212079" cy="2240280"/>
         </p:xfrm>
         <a:graphic>
           <a:graphicData uri="http://schemas.openxmlformats.org/drawingml/2006/table">
@@ -12052,11 +12382,11 @@
                 <a:tableStyleId>{5C22544A-7EE6-4342-B048-85BDC9FD1C3A}</a:tableStyleId>
               </a:tblPr>
               <a:tblGrid>
-                <a:gridCol w="1371600"/>
-                <a:gridCol w="1371600"/>
-                <a:gridCol w="2121408"/>
-                <a:gridCol w="2121408"/>
-                <a:gridCol w="2121408"/>
+                <a:gridCol w="731520"/>
+                <a:gridCol w="548640"/>
+                <a:gridCol w="1310335"/>
+                <a:gridCol w="1310335"/>
+                <a:gridCol w="1311249"/>
               </a:tblGrid>
               <a:tr h="320040">
                 <a:tc>
@@ -12066,7 +12396,7 @@
                     <a:p>
                       <a:pPr algn="ctr"/>
                       <a:r>
-                        <a:rPr sz="950" b="1">
+                        <a:rPr sz="850" b="1">
                           <a:solidFill>
                             <a:srgbClr val="FFFFFF"/>
                           </a:solidFill>
@@ -12076,7 +12406,7 @@
                       </a:r>
                     </a:p>
                   </a:txBody>
-                  <a:tcPr anchor="ctr" marL="36576" marR="36576" marT="18288" marB="18288">
+                  <a:tcPr anchor="ctr" marL="27432" marR="27432" marT="18288" marB="18288">
                     <a:lnL w="12700" cap="flat">
                       <a:solidFill>
                         <a:srgbClr val="000000"/>
@@ -12109,7 +12439,7 @@
                     <a:p>
                       <a:pPr algn="ctr"/>
                       <a:r>
-                        <a:rPr sz="950" b="1">
+                        <a:rPr sz="850" b="1">
                           <a:solidFill>
                             <a:srgbClr val="FFFFFF"/>
                           </a:solidFill>
@@ -12119,7 +12449,7 @@
                       </a:r>
                     </a:p>
                   </a:txBody>
-                  <a:tcPr anchor="ctr" marL="36576" marR="36576" marT="18288" marB="18288">
+                  <a:tcPr anchor="ctr" marL="27432" marR="27432" marT="18288" marB="18288">
                     <a:lnL w="12700" cap="flat">
                       <a:solidFill>
                         <a:srgbClr val="000000"/>
@@ -12152,7 +12482,7 @@
                     <a:p>
                       <a:pPr algn="ctr"/>
                       <a:r>
-                        <a:rPr sz="950" b="1">
+                        <a:rPr sz="850" b="1">
                           <a:solidFill>
                             <a:srgbClr val="FFFFFF"/>
                           </a:solidFill>
@@ -12162,7 +12492,7 @@
                       </a:r>
                     </a:p>
                   </a:txBody>
-                  <a:tcPr anchor="ctr" marL="36576" marR="36576" marT="18288" marB="18288">
+                  <a:tcPr anchor="ctr" marL="27432" marR="27432" marT="18288" marB="18288">
                     <a:lnL w="12700" cap="flat">
                       <a:solidFill>
                         <a:srgbClr val="000000"/>
@@ -12195,7 +12525,7 @@
                     <a:p>
                       <a:pPr algn="ctr"/>
                       <a:r>
-                        <a:rPr sz="950" b="1">
+                        <a:rPr sz="850" b="1">
                           <a:solidFill>
                             <a:srgbClr val="FFFFFF"/>
                           </a:solidFill>
@@ -12205,7 +12535,7 @@
                       </a:r>
                     </a:p>
                   </a:txBody>
-                  <a:tcPr anchor="ctr" marL="36576" marR="36576" marT="18288" marB="18288">
+                  <a:tcPr anchor="ctr" marL="27432" marR="27432" marT="18288" marB="18288">
                     <a:lnL w="12700" cap="flat">
                       <a:solidFill>
                         <a:srgbClr val="000000"/>
@@ -12238,7 +12568,7 @@
                     <a:p>
                       <a:pPr algn="ctr"/>
                       <a:r>
-                        <a:rPr sz="950" b="1">
+                        <a:rPr sz="850" b="1">
                           <a:solidFill>
                             <a:srgbClr val="FFFFFF"/>
                           </a:solidFill>
@@ -12248,7 +12578,7 @@
                       </a:r>
                     </a:p>
                   </a:txBody>
-                  <a:tcPr anchor="ctr" marL="36576" marR="36576" marT="18288" marB="18288">
+                  <a:tcPr anchor="ctr" marL="27432" marR="27432" marT="18288" marB="18288">
                     <a:lnL w="12700" cap="flat">
                       <a:solidFill>
                         <a:srgbClr val="000000"/>
@@ -12283,7 +12613,7 @@
                     <a:p>
                       <a:pPr algn="ctr"/>
                       <a:r>
-                        <a:rPr sz="900" b="1">
+                        <a:rPr sz="800" b="1">
                           <a:solidFill>
                             <a:srgbClr val="000000"/>
                           </a:solidFill>
@@ -12293,7 +12623,7 @@
                       </a:r>
                     </a:p>
                   </a:txBody>
-                  <a:tcPr anchor="ctr" marL="36576" marR="36576" marT="18288" marB="18288">
+                  <a:tcPr anchor="ctr" marL="27432" marR="27432" marT="18288" marB="18288">
                     <a:lnL w="12700" cap="flat">
                       <a:solidFill>
                         <a:srgbClr val="000000"/>
@@ -12326,7 +12656,7 @@
                     <a:p>
                       <a:pPr algn="ctr"/>
                       <a:r>
-                        <a:rPr sz="900" b="0">
+                        <a:rPr sz="800" b="0">
                           <a:solidFill>
                             <a:srgbClr val="000000"/>
                           </a:solidFill>
@@ -12336,7 +12666,7 @@
                       </a:r>
                     </a:p>
                   </a:txBody>
-                  <a:tcPr anchor="ctr" marL="36576" marR="36576" marT="18288" marB="18288">
+                  <a:tcPr anchor="ctr" marL="27432" marR="27432" marT="18288" marB="18288">
                     <a:lnL w="12700" cap="flat">
                       <a:solidFill>
                         <a:srgbClr val="000000"/>
@@ -12369,7 +12699,7 @@
                     <a:p>
                       <a:pPr algn="ctr"/>
                       <a:r>
-                        <a:rPr sz="900" b="0">
+                        <a:rPr sz="800" b="0">
                           <a:solidFill>
                             <a:srgbClr val="000000"/>
                           </a:solidFill>
@@ -12379,7 +12709,7 @@
                       </a:r>
                     </a:p>
                   </a:txBody>
-                  <a:tcPr anchor="ctr" marL="36576" marR="36576" marT="18288" marB="18288">
+                  <a:tcPr anchor="ctr" marL="27432" marR="27432" marT="18288" marB="18288">
                     <a:lnL w="12700" cap="flat">
                       <a:solidFill>
                         <a:srgbClr val="000000"/>
@@ -12412,7 +12742,7 @@
                     <a:p>
                       <a:pPr algn="ctr"/>
                       <a:r>
-                        <a:rPr sz="900" b="0">
+                        <a:rPr sz="800" b="0">
                           <a:solidFill>
                             <a:srgbClr val="000000"/>
                           </a:solidFill>
@@ -12422,7 +12752,7 @@
                       </a:r>
                     </a:p>
                   </a:txBody>
-                  <a:tcPr anchor="ctr" marL="36576" marR="36576" marT="18288" marB="18288">
+                  <a:tcPr anchor="ctr" marL="27432" marR="27432" marT="18288" marB="18288">
                     <a:lnL w="12700" cap="flat">
                       <a:solidFill>
                         <a:srgbClr val="000000"/>
@@ -12455,7 +12785,7 @@
                     <a:p>
                       <a:pPr algn="ctr"/>
                       <a:r>
-                        <a:rPr sz="900" b="0">
+                        <a:rPr sz="800" b="0">
                           <a:solidFill>
                             <a:srgbClr val="000000"/>
                           </a:solidFill>
@@ -12465,7 +12795,7 @@
                       </a:r>
                     </a:p>
                   </a:txBody>
-                  <a:tcPr anchor="ctr" marL="36576" marR="36576" marT="18288" marB="18288">
+                  <a:tcPr anchor="ctr" marL="27432" marR="27432" marT="18288" marB="18288">
                     <a:lnL w="12700" cap="flat">
                       <a:solidFill>
                         <a:srgbClr val="000000"/>
@@ -12500,7 +12830,7 @@
                     <a:p>
                       <a:pPr algn="ctr"/>
                       <a:r>
-                        <a:rPr sz="900" b="1">
+                        <a:rPr sz="800" b="1">
                           <a:solidFill>
                             <a:srgbClr val="000000"/>
                           </a:solidFill>
@@ -12510,7 +12840,7 @@
                       </a:r>
                     </a:p>
                   </a:txBody>
-                  <a:tcPr anchor="ctr" marL="36576" marR="36576" marT="18288" marB="18288">
+                  <a:tcPr anchor="ctr" marL="27432" marR="27432" marT="18288" marB="18288">
                     <a:lnL w="12700" cap="flat">
                       <a:solidFill>
                         <a:srgbClr val="000000"/>
@@ -12543,7 +12873,7 @@
                     <a:p>
                       <a:pPr algn="ctr"/>
                       <a:r>
-                        <a:rPr sz="900" b="0">
+                        <a:rPr sz="800" b="0">
                           <a:solidFill>
                             <a:srgbClr val="000000"/>
                           </a:solidFill>
@@ -12553,7 +12883,7 @@
                       </a:r>
                     </a:p>
                   </a:txBody>
-                  <a:tcPr anchor="ctr" marL="36576" marR="36576" marT="18288" marB="18288">
+                  <a:tcPr anchor="ctr" marL="27432" marR="27432" marT="18288" marB="18288">
                     <a:lnL w="12700" cap="flat">
                       <a:solidFill>
                         <a:srgbClr val="000000"/>
@@ -12586,7 +12916,7 @@
                     <a:p>
                       <a:pPr algn="ctr"/>
                       <a:r>
-                        <a:rPr sz="900" b="0">
+                        <a:rPr sz="800" b="0">
                           <a:solidFill>
                             <a:srgbClr val="000000"/>
                           </a:solidFill>
@@ -12596,7 +12926,7 @@
                       </a:r>
                     </a:p>
                   </a:txBody>
-                  <a:tcPr anchor="ctr" marL="36576" marR="36576" marT="18288" marB="18288">
+                  <a:tcPr anchor="ctr" marL="27432" marR="27432" marT="18288" marB="18288">
                     <a:lnL w="12700" cap="flat">
                       <a:solidFill>
                         <a:srgbClr val="000000"/>
@@ -12629,7 +12959,7 @@
                     <a:p>
                       <a:pPr algn="ctr"/>
                       <a:r>
-                        <a:rPr sz="900" b="0">
+                        <a:rPr sz="800" b="0">
                           <a:solidFill>
                             <a:srgbClr val="000000"/>
                           </a:solidFill>
@@ -12639,7 +12969,7 @@
                       </a:r>
                     </a:p>
                   </a:txBody>
-                  <a:tcPr anchor="ctr" marL="36576" marR="36576" marT="18288" marB="18288">
+                  <a:tcPr anchor="ctr" marL="27432" marR="27432" marT="18288" marB="18288">
                     <a:lnL w="12700" cap="flat">
                       <a:solidFill>
                         <a:srgbClr val="000000"/>
@@ -12672,7 +13002,7 @@
                     <a:p>
                       <a:pPr algn="ctr"/>
                       <a:r>
-                        <a:rPr sz="900" b="0">
+                        <a:rPr sz="800" b="0">
                           <a:solidFill>
                             <a:srgbClr val="000000"/>
                           </a:solidFill>
@@ -12682,7 +13012,7 @@
                       </a:r>
                     </a:p>
                   </a:txBody>
-                  <a:tcPr anchor="ctr" marL="36576" marR="36576" marT="18288" marB="18288">
+                  <a:tcPr anchor="ctr" marL="27432" marR="27432" marT="18288" marB="18288">
                     <a:lnL w="12700" cap="flat">
                       <a:solidFill>
                         <a:srgbClr val="000000"/>
@@ -12717,7 +13047,7 @@
                     <a:p>
                       <a:pPr algn="ctr"/>
                       <a:r>
-                        <a:rPr sz="900" b="1">
+                        <a:rPr sz="800" b="1">
                           <a:solidFill>
                             <a:srgbClr val="000000"/>
                           </a:solidFill>
@@ -12727,7 +13057,7 @@
                       </a:r>
                     </a:p>
                   </a:txBody>
-                  <a:tcPr anchor="ctr" marL="36576" marR="36576" marT="18288" marB="18288">
+                  <a:tcPr anchor="ctr" marL="27432" marR="27432" marT="18288" marB="18288">
                     <a:lnL w="12700" cap="flat">
                       <a:solidFill>
                         <a:srgbClr val="000000"/>
@@ -12760,7 +13090,7 @@
                     <a:p>
                       <a:pPr algn="ctr"/>
                       <a:r>
-                        <a:rPr sz="900" b="0">
+                        <a:rPr sz="800" b="0">
                           <a:solidFill>
                             <a:srgbClr val="000000"/>
                           </a:solidFill>
@@ -12770,7 +13100,7 @@
                       </a:r>
                     </a:p>
                   </a:txBody>
-                  <a:tcPr anchor="ctr" marL="36576" marR="36576" marT="18288" marB="18288">
+                  <a:tcPr anchor="ctr" marL="27432" marR="27432" marT="18288" marB="18288">
                     <a:lnL w="12700" cap="flat">
                       <a:solidFill>
                         <a:srgbClr val="000000"/>
@@ -12803,7 +13133,7 @@
                     <a:p>
                       <a:pPr algn="ctr"/>
                       <a:r>
-                        <a:rPr sz="900" b="0">
+                        <a:rPr sz="800" b="0">
                           <a:solidFill>
                             <a:srgbClr val="000000"/>
                           </a:solidFill>
@@ -12813,7 +13143,7 @@
                       </a:r>
                     </a:p>
                   </a:txBody>
-                  <a:tcPr anchor="ctr" marL="36576" marR="36576" marT="18288" marB="18288">
+                  <a:tcPr anchor="ctr" marL="27432" marR="27432" marT="18288" marB="18288">
                     <a:lnL w="12700" cap="flat">
                       <a:solidFill>
                         <a:srgbClr val="000000"/>
@@ -12846,7 +13176,7 @@
                     <a:p>
                       <a:pPr algn="ctr"/>
                       <a:r>
-                        <a:rPr sz="900" b="0">
+                        <a:rPr sz="800" b="0">
                           <a:solidFill>
                             <a:srgbClr val="000000"/>
                           </a:solidFill>
@@ -12856,7 +13186,7 @@
                       </a:r>
                     </a:p>
                   </a:txBody>
-                  <a:tcPr anchor="ctr" marL="36576" marR="36576" marT="18288" marB="18288">
+                  <a:tcPr anchor="ctr" marL="27432" marR="27432" marT="18288" marB="18288">
                     <a:lnL w="12700" cap="flat">
                       <a:solidFill>
                         <a:srgbClr val="000000"/>
@@ -12889,7 +13219,7 @@
                     <a:p>
                       <a:pPr algn="ctr"/>
                       <a:r>
-                        <a:rPr sz="900" b="0">
+                        <a:rPr sz="800" b="0">
                           <a:solidFill>
                             <a:srgbClr val="000000"/>
                           </a:solidFill>
@@ -12899,7 +13229,7 @@
                       </a:r>
                     </a:p>
                   </a:txBody>
-                  <a:tcPr anchor="ctr" marL="36576" marR="36576" marT="18288" marB="18288">
+                  <a:tcPr anchor="ctr" marL="27432" marR="27432" marT="18288" marB="18288">
                     <a:lnL w="12700" cap="flat">
                       <a:solidFill>
                         <a:srgbClr val="000000"/>
@@ -12934,7 +13264,7 @@
                     <a:p>
                       <a:pPr algn="ctr"/>
                       <a:r>
-                        <a:rPr sz="900" b="1">
+                        <a:rPr sz="800" b="1">
                           <a:solidFill>
                             <a:srgbClr val="000000"/>
                           </a:solidFill>
@@ -12944,7 +13274,7 @@
                       </a:r>
                     </a:p>
                   </a:txBody>
-                  <a:tcPr anchor="ctr" marL="36576" marR="36576" marT="18288" marB="18288">
+                  <a:tcPr anchor="ctr" marL="27432" marR="27432" marT="18288" marB="18288">
                     <a:lnL w="12700" cap="flat">
                       <a:solidFill>
                         <a:srgbClr val="000000"/>
@@ -12977,7 +13307,7 @@
                     <a:p>
                       <a:pPr algn="ctr"/>
                       <a:r>
-                        <a:rPr sz="900" b="0">
+                        <a:rPr sz="800" b="0">
                           <a:solidFill>
                             <a:srgbClr val="000000"/>
                           </a:solidFill>
@@ -12987,7 +13317,7 @@
                       </a:r>
                     </a:p>
                   </a:txBody>
-                  <a:tcPr anchor="ctr" marL="36576" marR="36576" marT="18288" marB="18288">
+                  <a:tcPr anchor="ctr" marL="27432" marR="27432" marT="18288" marB="18288">
                     <a:lnL w="12700" cap="flat">
                       <a:solidFill>
                         <a:srgbClr val="000000"/>
@@ -13020,7 +13350,7 @@
                     <a:p>
                       <a:pPr algn="ctr"/>
                       <a:r>
-                        <a:rPr sz="900" b="0">
+                        <a:rPr sz="800" b="0">
                           <a:solidFill>
                             <a:srgbClr val="000000"/>
                           </a:solidFill>
@@ -13030,7 +13360,7 @@
                       </a:r>
                     </a:p>
                   </a:txBody>
-                  <a:tcPr anchor="ctr" marL="36576" marR="36576" marT="18288" marB="18288">
+                  <a:tcPr anchor="ctr" marL="27432" marR="27432" marT="18288" marB="18288">
                     <a:lnL w="12700" cap="flat">
                       <a:solidFill>
                         <a:srgbClr val="000000"/>
@@ -13063,7 +13393,7 @@
                     <a:p>
                       <a:pPr algn="ctr"/>
                       <a:r>
-                        <a:rPr sz="900" b="0">
+                        <a:rPr sz="800" b="0">
                           <a:solidFill>
                             <a:srgbClr val="000000"/>
                           </a:solidFill>
@@ -13073,7 +13403,7 @@
                       </a:r>
                     </a:p>
                   </a:txBody>
-                  <a:tcPr anchor="ctr" marL="36576" marR="36576" marT="18288" marB="18288">
+                  <a:tcPr anchor="ctr" marL="27432" marR="27432" marT="18288" marB="18288">
                     <a:lnL w="12700" cap="flat">
                       <a:solidFill>
                         <a:srgbClr val="000000"/>
@@ -13106,7 +13436,7 @@
                     <a:p>
                       <a:pPr algn="ctr"/>
                       <a:r>
-                        <a:rPr sz="900" b="0">
+                        <a:rPr sz="800" b="0">
                           <a:solidFill>
                             <a:srgbClr val="000000"/>
                           </a:solidFill>
@@ -13116,7 +13446,7 @@
                       </a:r>
                     </a:p>
                   </a:txBody>
-                  <a:tcPr anchor="ctr" marL="36576" marR="36576" marT="18288" marB="18288">
+                  <a:tcPr anchor="ctr" marL="27432" marR="27432" marT="18288" marB="18288">
                     <a:lnL w="12700" cap="flat">
                       <a:solidFill>
                         <a:srgbClr val="000000"/>
@@ -13151,7 +13481,7 @@
                     <a:p>
                       <a:pPr algn="ctr"/>
                       <a:r>
-                        <a:rPr sz="900" b="1">
+                        <a:rPr sz="800" b="1">
                           <a:solidFill>
                             <a:srgbClr val="000000"/>
                           </a:solidFill>
@@ -13161,7 +13491,7 @@
                       </a:r>
                     </a:p>
                   </a:txBody>
-                  <a:tcPr anchor="ctr" marL="36576" marR="36576" marT="18288" marB="18288">
+                  <a:tcPr anchor="ctr" marL="27432" marR="27432" marT="18288" marB="18288">
                     <a:lnL w="12700" cap="flat">
                       <a:solidFill>
                         <a:srgbClr val="000000"/>
@@ -13194,7 +13524,7 @@
                     <a:p>
                       <a:pPr algn="ctr"/>
                       <a:r>
-                        <a:rPr sz="900" b="0">
+                        <a:rPr sz="800" b="0">
                           <a:solidFill>
                             <a:srgbClr val="000000"/>
                           </a:solidFill>
@@ -13204,7 +13534,7 @@
                       </a:r>
                     </a:p>
                   </a:txBody>
-                  <a:tcPr anchor="ctr" marL="36576" marR="36576" marT="18288" marB="18288">
+                  <a:tcPr anchor="ctr" marL="27432" marR="27432" marT="18288" marB="18288">
                     <a:lnL w="12700" cap="flat">
                       <a:solidFill>
                         <a:srgbClr val="000000"/>
@@ -13237,7 +13567,7 @@
                     <a:p>
                       <a:pPr algn="ctr"/>
                       <a:r>
-                        <a:rPr sz="900" b="0">
+                        <a:rPr sz="800" b="0">
                           <a:solidFill>
                             <a:srgbClr val="000000"/>
                           </a:solidFill>
@@ -13247,7 +13577,7 @@
                       </a:r>
                     </a:p>
                   </a:txBody>
-                  <a:tcPr anchor="ctr" marL="36576" marR="36576" marT="18288" marB="18288">
+                  <a:tcPr anchor="ctr" marL="27432" marR="27432" marT="18288" marB="18288">
                     <a:lnL w="12700" cap="flat">
                       <a:solidFill>
                         <a:srgbClr val="000000"/>
@@ -13280,7 +13610,7 @@
                     <a:p>
                       <a:pPr algn="ctr"/>
                       <a:r>
-                        <a:rPr sz="900" b="0">
+                        <a:rPr sz="800" b="0">
                           <a:solidFill>
                             <a:srgbClr val="000000"/>
                           </a:solidFill>
@@ -13290,7 +13620,7 @@
                       </a:r>
                     </a:p>
                   </a:txBody>
-                  <a:tcPr anchor="ctr" marL="36576" marR="36576" marT="18288" marB="18288">
+                  <a:tcPr anchor="ctr" marL="27432" marR="27432" marT="18288" marB="18288">
                     <a:lnL w="12700" cap="flat">
                       <a:solidFill>
                         <a:srgbClr val="000000"/>
@@ -13323,7 +13653,7 @@
                     <a:p>
                       <a:pPr algn="ctr"/>
                       <a:r>
-                        <a:rPr sz="900" b="0">
+                        <a:rPr sz="800" b="0">
                           <a:solidFill>
                             <a:srgbClr val="000000"/>
                           </a:solidFill>
@@ -13333,7 +13663,7 @@
                       </a:r>
                     </a:p>
                   </a:txBody>
-                  <a:tcPr anchor="ctr" marL="36576" marR="36576" marT="18288" marB="18288">
+                  <a:tcPr anchor="ctr" marL="27432" marR="27432" marT="18288" marB="18288">
                     <a:lnL w="12700" cap="flat">
                       <a:solidFill>
                         <a:srgbClr val="000000"/>
@@ -13368,7 +13698,7 @@
                     <a:p>
                       <a:pPr algn="ctr"/>
                       <a:r>
-                        <a:rPr sz="900" b="1">
+                        <a:rPr sz="800" b="1">
                           <a:solidFill>
                             <a:srgbClr val="000000"/>
                           </a:solidFill>
@@ -13378,7 +13708,7 @@
                       </a:r>
                     </a:p>
                   </a:txBody>
-                  <a:tcPr anchor="ctr" marL="36576" marR="36576" marT="18288" marB="18288">
+                  <a:tcPr anchor="ctr" marL="27432" marR="27432" marT="18288" marB="18288">
                     <a:lnL w="12700" cap="flat">
                       <a:solidFill>
                         <a:srgbClr val="000000"/>
@@ -13411,7 +13741,7 @@
                     <a:p>
                       <a:pPr algn="ctr"/>
                       <a:r>
-                        <a:rPr sz="900" b="0">
+                        <a:rPr sz="800" b="0">
                           <a:solidFill>
                             <a:srgbClr val="000000"/>
                           </a:solidFill>
@@ -13421,7 +13751,7 @@
                       </a:r>
                     </a:p>
                   </a:txBody>
-                  <a:tcPr anchor="ctr" marL="36576" marR="36576" marT="18288" marB="18288">
+                  <a:tcPr anchor="ctr" marL="27432" marR="27432" marT="18288" marB="18288">
                     <a:lnL w="12700" cap="flat">
                       <a:solidFill>
                         <a:srgbClr val="000000"/>
@@ -13454,7 +13784,7 @@
                     <a:p>
                       <a:pPr algn="ctr"/>
                       <a:r>
-                        <a:rPr sz="900" b="0">
+                        <a:rPr sz="800" b="0">
                           <a:solidFill>
                             <a:srgbClr val="000000"/>
                           </a:solidFill>
@@ -13464,7 +13794,7 @@
                       </a:r>
                     </a:p>
                   </a:txBody>
-                  <a:tcPr anchor="ctr" marL="36576" marR="36576" marT="18288" marB="18288">
+                  <a:tcPr anchor="ctr" marL="27432" marR="27432" marT="18288" marB="18288">
                     <a:lnL w="12700" cap="flat">
                       <a:solidFill>
                         <a:srgbClr val="000000"/>
@@ -13497,7 +13827,7 @@
                     <a:p>
                       <a:pPr algn="ctr"/>
                       <a:r>
-                        <a:rPr sz="900" b="0">
+                        <a:rPr sz="800" b="0">
                           <a:solidFill>
                             <a:srgbClr val="000000"/>
                           </a:solidFill>
@@ -13507,7 +13837,7 @@
                       </a:r>
                     </a:p>
                   </a:txBody>
-                  <a:tcPr anchor="ctr" marL="36576" marR="36576" marT="18288" marB="18288">
+                  <a:tcPr anchor="ctr" marL="27432" marR="27432" marT="18288" marB="18288">
                     <a:lnL w="12700" cap="flat">
                       <a:solidFill>
                         <a:srgbClr val="000000"/>
@@ -13540,7 +13870,7 @@
                     <a:p>
                       <a:pPr algn="ctr"/>
                       <a:r>
-                        <a:rPr sz="900" b="0">
+                        <a:rPr sz="800" b="0">
                           <a:solidFill>
                             <a:srgbClr val="000000"/>
                           </a:solidFill>
@@ -13550,7 +13880,7 @@
                       </a:r>
                     </a:p>
                   </a:txBody>
-                  <a:tcPr anchor="ctr" marL="36576" marR="36576" marT="18288" marB="18288">
+                  <a:tcPr anchor="ctr" marL="27432" marR="27432" marT="18288" marB="18288">
                     <a:lnL w="12700" cap="flat">
                       <a:solidFill>
                         <a:srgbClr val="000000"/>
@@ -13590,7 +13920,7 @@
         <p:spPr>
           <a:xfrm>
             <a:off x="384048" y="3566160"/>
-            <a:ext cx="9107424" cy="292608"/>
+            <a:ext cx="5212080" cy="292608"/>
           </a:xfrm>
           <a:prstGeom prst="rect">
             <a:avLst/>
@@ -13629,8 +13959,8 @@
           <p:nvPr/>
         </p:nvGraphicFramePr>
         <p:xfrm>
-          <a:off x="457200" y="3886200"/>
-          <a:ext cx="9107424" cy="1463040"/>
+          <a:off x="384048" y="3886200"/>
+          <a:ext cx="5212079" cy="1463040"/>
         </p:xfrm>
         <a:graphic>
           <a:graphicData uri="http://schemas.openxmlformats.org/drawingml/2006/table">
@@ -13639,10 +13969,10 @@
                 <a:tableStyleId>{5C22544A-7EE6-4342-B048-85BDC9FD1C3A}</a:tableStyleId>
               </a:tblPr>
               <a:tblGrid>
-                <a:gridCol w="2286000"/>
-                <a:gridCol w="2286000"/>
-                <a:gridCol w="2286000"/>
-                <a:gridCol w="2249424"/>
+                <a:gridCol w="1280160"/>
+                <a:gridCol w="1310335"/>
+                <a:gridCol w="1310335"/>
+                <a:gridCol w="1311249"/>
               </a:tblGrid>
               <a:tr h="292608">
                 <a:tc>
@@ -13652,7 +13982,7 @@
                     <a:p>
                       <a:pPr algn="ctr"/>
                       <a:r>
-                        <a:rPr sz="950" b="1">
+                        <a:rPr sz="850" b="1">
                           <a:solidFill>
                             <a:srgbClr val="FFFFFF"/>
                           </a:solidFill>
@@ -13662,7 +13992,7 @@
                       </a:r>
                     </a:p>
                   </a:txBody>
-                  <a:tcPr anchor="ctr" marL="36576" marR="36576" marT="18288" marB="18288">
+                  <a:tcPr anchor="ctr" marL="27432" marR="27432" marT="18288" marB="18288">
                     <a:lnL w="12700" cap="flat">
                       <a:solidFill>
                         <a:srgbClr val="000000"/>
@@ -13695,17 +14025,17 @@
                     <a:p>
                       <a:pPr algn="ctr"/>
                       <a:r>
-                        <a:rPr sz="950" b="1">
+                        <a:rPr sz="850" b="1">
                           <a:solidFill>
                             <a:srgbClr val="FFFFFF"/>
                           </a:solidFill>
                           <a:latin typeface="맑은 고딕"/>
                         </a:rPr>
-                        <a:t>Min(um)</a:t>
-                      </a:r>
-                    </a:p>
-                  </a:txBody>
-                  <a:tcPr anchor="ctr" marL="36576" marR="36576" marT="18288" marB="18288">
+                        <a:t>Min</a:t>
+                      </a:r>
+                    </a:p>
+                  </a:txBody>
+                  <a:tcPr anchor="ctr" marL="27432" marR="27432" marT="18288" marB="18288">
                     <a:lnL w="12700" cap="flat">
                       <a:solidFill>
                         <a:srgbClr val="000000"/>
@@ -13738,17 +14068,17 @@
                     <a:p>
                       <a:pPr algn="ctr"/>
                       <a:r>
-                        <a:rPr sz="950" b="1">
+                        <a:rPr sz="850" b="1">
                           <a:solidFill>
                             <a:srgbClr val="FFFFFF"/>
                           </a:solidFill>
                           <a:latin typeface="맑은 고딕"/>
                         </a:rPr>
-                        <a:t>Max(um)</a:t>
-                      </a:r>
-                    </a:p>
-                  </a:txBody>
-                  <a:tcPr anchor="ctr" marL="36576" marR="36576" marT="18288" marB="18288">
+                        <a:t>Max</a:t>
+                      </a:r>
+                    </a:p>
+                  </a:txBody>
+                  <a:tcPr anchor="ctr" marL="27432" marR="27432" marT="18288" marB="18288">
                     <a:lnL w="12700" cap="flat">
                       <a:solidFill>
                         <a:srgbClr val="000000"/>
@@ -13781,17 +14111,17 @@
                     <a:p>
                       <a:pPr algn="ctr"/>
                       <a:r>
-                        <a:rPr sz="950" b="1">
+                        <a:rPr sz="850" b="1">
                           <a:solidFill>
                             <a:srgbClr val="FFFFFF"/>
                           </a:solidFill>
                           <a:latin typeface="맑은 고딕"/>
                         </a:rPr>
-                        <a:t>AVG(um)</a:t>
-                      </a:r>
-                    </a:p>
-                  </a:txBody>
-                  <a:tcPr anchor="ctr" marL="36576" marR="36576" marT="18288" marB="18288">
+                        <a:t>AVG</a:t>
+                      </a:r>
+                    </a:p>
+                  </a:txBody>
+                  <a:tcPr anchor="ctr" marL="27432" marR="27432" marT="18288" marB="18288">
                     <a:lnL w="12700" cap="flat">
                       <a:solidFill>
                         <a:srgbClr val="000000"/>
@@ -13826,7 +14156,7 @@
                     <a:p>
                       <a:pPr algn="ctr"/>
                       <a:r>
-                        <a:rPr sz="950" b="1">
+                        <a:rPr sz="850" b="1">
                           <a:solidFill>
                             <a:srgbClr val="000000"/>
                           </a:solidFill>
@@ -13836,7 +14166,7 @@
                       </a:r>
                     </a:p>
                   </a:txBody>
-                  <a:tcPr anchor="ctr" marL="36576" marR="36576" marT="18288" marB="18288">
+                  <a:tcPr anchor="ctr" marL="27432" marR="27432" marT="18288" marB="18288">
                     <a:lnL w="12700" cap="flat">
                       <a:solidFill>
                         <a:srgbClr val="000000"/>
@@ -13869,7 +14199,7 @@
                     <a:p>
                       <a:pPr algn="ctr"/>
                       <a:r>
-                        <a:rPr sz="950" b="0">
+                        <a:rPr sz="850" b="0">
                           <a:solidFill>
                             <a:srgbClr val="000000"/>
                           </a:solidFill>
@@ -13879,7 +14209,7 @@
                       </a:r>
                     </a:p>
                   </a:txBody>
-                  <a:tcPr anchor="ctr" marL="36576" marR="36576" marT="18288" marB="18288">
+                  <a:tcPr anchor="ctr" marL="27432" marR="27432" marT="18288" marB="18288">
                     <a:lnL w="12700" cap="flat">
                       <a:solidFill>
                         <a:srgbClr val="000000"/>
@@ -13912,7 +14242,7 @@
                     <a:p>
                       <a:pPr algn="ctr"/>
                       <a:r>
-                        <a:rPr sz="950" b="0">
+                        <a:rPr sz="850" b="0">
                           <a:solidFill>
                             <a:srgbClr val="000000"/>
                           </a:solidFill>
@@ -13922,7 +14252,7 @@
                       </a:r>
                     </a:p>
                   </a:txBody>
-                  <a:tcPr anchor="ctr" marL="36576" marR="36576" marT="18288" marB="18288">
+                  <a:tcPr anchor="ctr" marL="27432" marR="27432" marT="18288" marB="18288">
                     <a:lnL w="12700" cap="flat">
                       <a:solidFill>
                         <a:srgbClr val="000000"/>
@@ -13955,7 +14285,7 @@
                     <a:p>
                       <a:pPr algn="ctr"/>
                       <a:r>
-                        <a:rPr sz="950" b="0">
+                        <a:rPr sz="850" b="0">
                           <a:solidFill>
                             <a:srgbClr val="000000"/>
                           </a:solidFill>
@@ -13965,7 +14295,7 @@
                       </a:r>
                     </a:p>
                   </a:txBody>
-                  <a:tcPr anchor="ctr" marL="36576" marR="36576" marT="18288" marB="18288">
+                  <a:tcPr anchor="ctr" marL="27432" marR="27432" marT="18288" marB="18288">
                     <a:lnL w="12700" cap="flat">
                       <a:solidFill>
                         <a:srgbClr val="000000"/>
@@ -14000,7 +14330,7 @@
                     <a:p>
                       <a:pPr algn="ctr"/>
                       <a:r>
-                        <a:rPr sz="950" b="1">
+                        <a:rPr sz="850" b="1">
                           <a:solidFill>
                             <a:srgbClr val="000000"/>
                           </a:solidFill>
@@ -14010,7 +14340,7 @@
                       </a:r>
                     </a:p>
                   </a:txBody>
-                  <a:tcPr anchor="ctr" marL="36576" marR="36576" marT="18288" marB="18288">
+                  <a:tcPr anchor="ctr" marL="27432" marR="27432" marT="18288" marB="18288">
                     <a:lnL w="12700" cap="flat">
                       <a:solidFill>
                         <a:srgbClr val="000000"/>
@@ -14043,7 +14373,7 @@
                     <a:p>
                       <a:pPr algn="ctr"/>
                       <a:r>
-                        <a:rPr sz="950" b="0">
+                        <a:rPr sz="850" b="0">
                           <a:solidFill>
                             <a:srgbClr val="000000"/>
                           </a:solidFill>
@@ -14053,7 +14383,7 @@
                       </a:r>
                     </a:p>
                   </a:txBody>
-                  <a:tcPr anchor="ctr" marL="36576" marR="36576" marT="18288" marB="18288">
+                  <a:tcPr anchor="ctr" marL="27432" marR="27432" marT="18288" marB="18288">
                     <a:lnL w="12700" cap="flat">
                       <a:solidFill>
                         <a:srgbClr val="000000"/>
@@ -14086,7 +14416,7 @@
                     <a:p>
                       <a:pPr algn="ctr"/>
                       <a:r>
-                        <a:rPr sz="950" b="0">
+                        <a:rPr sz="850" b="0">
                           <a:solidFill>
                             <a:srgbClr val="000000"/>
                           </a:solidFill>
@@ -14096,7 +14426,7 @@
                       </a:r>
                     </a:p>
                   </a:txBody>
-                  <a:tcPr anchor="ctr" marL="36576" marR="36576" marT="18288" marB="18288">
+                  <a:tcPr anchor="ctr" marL="27432" marR="27432" marT="18288" marB="18288">
                     <a:lnL w="12700" cap="flat">
                       <a:solidFill>
                         <a:srgbClr val="000000"/>
@@ -14129,7 +14459,7 @@
                     <a:p>
                       <a:pPr algn="ctr"/>
                       <a:r>
-                        <a:rPr sz="950" b="0">
+                        <a:rPr sz="850" b="0">
                           <a:solidFill>
                             <a:srgbClr val="000000"/>
                           </a:solidFill>
@@ -14139,7 +14469,7 @@
                       </a:r>
                     </a:p>
                   </a:txBody>
-                  <a:tcPr anchor="ctr" marL="36576" marR="36576" marT="18288" marB="18288">
+                  <a:tcPr anchor="ctr" marL="27432" marR="27432" marT="18288" marB="18288">
                     <a:lnL w="12700" cap="flat">
                       <a:solidFill>
                         <a:srgbClr val="000000"/>
@@ -14174,7 +14504,7 @@
                     <a:p>
                       <a:pPr algn="ctr"/>
                       <a:r>
-                        <a:rPr sz="950" b="1">
+                        <a:rPr sz="850" b="1">
                           <a:solidFill>
                             <a:srgbClr val="000000"/>
                           </a:solidFill>
@@ -14184,7 +14514,7 @@
                       </a:r>
                     </a:p>
                   </a:txBody>
-                  <a:tcPr anchor="ctr" marL="36576" marR="36576" marT="18288" marB="18288">
+                  <a:tcPr anchor="ctr" marL="27432" marR="27432" marT="18288" marB="18288">
                     <a:lnL w="12700" cap="flat">
                       <a:solidFill>
                         <a:srgbClr val="000000"/>
@@ -14217,7 +14547,7 @@
                     <a:p>
                       <a:pPr algn="ctr"/>
                       <a:r>
-                        <a:rPr sz="950" b="0">
+                        <a:rPr sz="850" b="0">
                           <a:solidFill>
                             <a:srgbClr val="000000"/>
                           </a:solidFill>
@@ -14227,7 +14557,7 @@
                       </a:r>
                     </a:p>
                   </a:txBody>
-                  <a:tcPr anchor="ctr" marL="36576" marR="36576" marT="18288" marB="18288">
+                  <a:tcPr anchor="ctr" marL="27432" marR="27432" marT="18288" marB="18288">
                     <a:lnL w="12700" cap="flat">
                       <a:solidFill>
                         <a:srgbClr val="000000"/>
@@ -14260,7 +14590,7 @@
                     <a:p>
                       <a:pPr algn="ctr"/>
                       <a:r>
-                        <a:rPr sz="950" b="0">
+                        <a:rPr sz="850" b="0">
                           <a:solidFill>
                             <a:srgbClr val="000000"/>
                           </a:solidFill>
@@ -14270,7 +14600,7 @@
                       </a:r>
                     </a:p>
                   </a:txBody>
-                  <a:tcPr anchor="ctr" marL="36576" marR="36576" marT="18288" marB="18288">
+                  <a:tcPr anchor="ctr" marL="27432" marR="27432" marT="18288" marB="18288">
                     <a:lnL w="12700" cap="flat">
                       <a:solidFill>
                         <a:srgbClr val="000000"/>
@@ -14303,7 +14633,7 @@
                     <a:p>
                       <a:pPr algn="ctr"/>
                       <a:r>
-                        <a:rPr sz="950" b="0">
+                        <a:rPr sz="850" b="0">
                           <a:solidFill>
                             <a:srgbClr val="000000"/>
                           </a:solidFill>
@@ -14313,7 +14643,7 @@
                       </a:r>
                     </a:p>
                   </a:txBody>
-                  <a:tcPr anchor="ctr" marL="36576" marR="36576" marT="18288" marB="18288">
+                  <a:tcPr anchor="ctr" marL="27432" marR="27432" marT="18288" marB="18288">
                     <a:lnL w="12700" cap="flat">
                       <a:solidFill>
                         <a:srgbClr val="000000"/>
@@ -14348,7 +14678,7 @@
                     <a:p>
                       <a:pPr algn="ctr"/>
                       <a:r>
-                        <a:rPr sz="950" b="1">
+                        <a:rPr sz="850" b="1">
                           <a:solidFill>
                             <a:srgbClr val="000000"/>
                           </a:solidFill>
@@ -14358,7 +14688,7 @@
                       </a:r>
                     </a:p>
                   </a:txBody>
-                  <a:tcPr anchor="ctr" marL="36576" marR="36576" marT="18288" marB="18288">
+                  <a:tcPr anchor="ctr" marL="27432" marR="27432" marT="18288" marB="18288">
                     <a:lnL w="12700" cap="flat">
                       <a:solidFill>
                         <a:srgbClr val="000000"/>
@@ -14391,7 +14721,7 @@
                     <a:p>
                       <a:pPr algn="ctr"/>
                       <a:r>
-                        <a:rPr sz="950" b="0">
+                        <a:rPr sz="850" b="0">
                           <a:solidFill>
                             <a:srgbClr val="000000"/>
                           </a:solidFill>
@@ -14401,7 +14731,7 @@
                       </a:r>
                     </a:p>
                   </a:txBody>
-                  <a:tcPr anchor="ctr" marL="36576" marR="36576" marT="18288" marB="18288">
+                  <a:tcPr anchor="ctr" marL="27432" marR="27432" marT="18288" marB="18288">
                     <a:lnL w="12700" cap="flat">
                       <a:solidFill>
                         <a:srgbClr val="000000"/>
@@ -14434,7 +14764,7 @@
                     <a:p>
                       <a:pPr algn="ctr"/>
                       <a:r>
-                        <a:rPr sz="950" b="0">
+                        <a:rPr sz="850" b="0">
                           <a:solidFill>
                             <a:srgbClr val="000000"/>
                           </a:solidFill>
@@ -14444,7 +14774,7 @@
                       </a:r>
                     </a:p>
                   </a:txBody>
-                  <a:tcPr anchor="ctr" marL="36576" marR="36576" marT="18288" marB="18288">
+                  <a:tcPr anchor="ctr" marL="27432" marR="27432" marT="18288" marB="18288">
                     <a:lnL w="12700" cap="flat">
                       <a:solidFill>
                         <a:srgbClr val="000000"/>
@@ -14477,7 +14807,7 @@
                     <a:p>
                       <a:pPr algn="ctr"/>
                       <a:r>
-                        <a:rPr sz="950" b="0">
+                        <a:rPr sz="850" b="0">
                           <a:solidFill>
                             <a:srgbClr val="000000"/>
                           </a:solidFill>
@@ -14487,7 +14817,7 @@
                       </a:r>
                     </a:p>
                   </a:txBody>
-                  <a:tcPr anchor="ctr" marL="36576" marR="36576" marT="18288" marB="18288">
+                  <a:tcPr anchor="ctr" marL="27432" marR="27432" marT="18288" marB="18288">
                     <a:lnL w="12700" cap="flat">
                       <a:solidFill>
                         <a:srgbClr val="000000"/>
@@ -14526,8 +14856,8 @@
         </p:nvSpPr>
         <p:spPr>
           <a:xfrm>
-            <a:off x="457200" y="5486400"/>
-            <a:ext cx="8961120" cy="548640"/>
+            <a:off x="384048" y="5486400"/>
+            <a:ext cx="5212080" cy="457200"/>
           </a:xfrm>
           <a:prstGeom prst="rect">
             <a:avLst/>
@@ -14541,24 +14871,138 @@
           <a:lstStyle/>
           <a:p>
             <a:r>
-              <a:rPr sz="950">
+              <a:rPr sz="900">
                 <a:solidFill>
                   <a:srgbClr val="909090"/>
                 </a:solidFill>
                 <a:latin typeface="맑은 고딕"/>
               </a:rPr>
-              <a:t>■ Fuse 전체 18개 측정 포인트 결과, 836~1138um 범위에서 안정적으로 분포</a:t>
+              <a:t>■ Fuse 전체 18개 측정 포인트: 836~1138um 범위에서 안정적으로 분포</a:t>
             </a:r>
           </a:p>
+        </p:txBody>
+      </p:sp>
+      <p:sp>
+        <p:nvSpPr>
+          <p:cNvPr id="10" name="Rectangle 9"/>
+          <p:cNvSpPr/>
+          <p:nvPr/>
+        </p:nvSpPr>
+        <p:spPr>
+          <a:xfrm>
+            <a:off x="5733288" y="914400"/>
+            <a:ext cx="3776472" cy="292608"/>
+          </a:xfrm>
+          <a:prstGeom prst="rect">
+            <a:avLst/>
+          </a:prstGeom>
+          <a:solidFill>
+            <a:srgbClr val="17365D"/>
+          </a:solidFill>
+          <a:ln>
+            <a:noFill/>
+          </a:ln>
+          <a:effectLst/>
+        </p:spPr>
+        <p:txBody>
+          <a:bodyPr rtlCol="0" anchor="ctr" wrap="square" lIns="73152" tIns="0" bIns="0"/>
+          <a:lstStyle/>
           <a:p>
+            <a:pPr algn="l"/>
             <a:r>
-              <a:rPr sz="950">
+              <a:rPr sz="1100" b="1">
                 <a:solidFill>
-                  <a:srgbClr val="909090"/>
+                  <a:srgbClr val="FFFFFF"/>
                 </a:solidFill>
                 <a:latin typeface="맑은 고딕"/>
               </a:rPr>
-              <a:t>■ 사진자료(외관/단면 이미지)는 별첨 예정</a:t>
+              <a:t>▣ 대표 시료 사진</a:t>
+            </a:r>
+          </a:p>
+        </p:txBody>
+      </p:sp>
+      <p:sp>
+        <p:nvSpPr>
+          <p:cNvPr id="11" name="Rectangle 10"/>
+          <p:cNvSpPr/>
+          <p:nvPr/>
+        </p:nvSpPr>
+        <p:spPr>
+          <a:xfrm>
+            <a:off x="5733288" y="1344168"/>
+            <a:ext cx="3776472" cy="2048255"/>
+          </a:xfrm>
+          <a:prstGeom prst="rect">
+            <a:avLst/>
+          </a:prstGeom>
+          <a:solidFill>
+            <a:srgbClr val="F2F2F2"/>
+          </a:solidFill>
+          <a:ln w="12700">
+            <a:solidFill>
+              <a:srgbClr val="B0B0B0"/>
+            </a:solidFill>
+            <a:prstDash val="sysDot"/>
+          </a:ln>
+          <a:effectLst/>
+        </p:spPr>
+        <p:txBody>
+          <a:bodyPr rtlCol="0" anchor="ctr" wrap="square"/>
+          <a:lstStyle/>
+          <a:p>
+            <a:pPr algn="ctr"/>
+            <a:r>
+              <a:rPr sz="1000" b="0">
+                <a:solidFill>
+                  <a:srgbClr val="808080"/>
+                </a:solidFill>
+                <a:latin typeface="맑은 고딕"/>
+              </a:rPr>
+              <a:t>Fuse 외관 사진
+(자리 예약)</a:t>
+            </a:r>
+          </a:p>
+        </p:txBody>
+      </p:sp>
+      <p:sp>
+        <p:nvSpPr>
+          <p:cNvPr id="12" name="Rectangle 11"/>
+          <p:cNvSpPr/>
+          <p:nvPr/>
+        </p:nvSpPr>
+        <p:spPr>
+          <a:xfrm>
+            <a:off x="5733288" y="3529584"/>
+            <a:ext cx="3776472" cy="2048255"/>
+          </a:xfrm>
+          <a:prstGeom prst="rect">
+            <a:avLst/>
+          </a:prstGeom>
+          <a:solidFill>
+            <a:srgbClr val="F2F2F2"/>
+          </a:solidFill>
+          <a:ln w="12700">
+            <a:solidFill>
+              <a:srgbClr val="B0B0B0"/>
+            </a:solidFill>
+            <a:prstDash val="sysDot"/>
+          </a:ln>
+          <a:effectLst/>
+        </p:spPr>
+        <p:txBody>
+          <a:bodyPr rtlCol="0" anchor="ctr" wrap="square"/>
+          <a:lstStyle/>
+          <a:p>
+            <a:pPr algn="ctr"/>
+            <a:r>
+              <a:rPr sz="1000" b="0">
+                <a:solidFill>
+                  <a:srgbClr val="808080"/>
+                </a:solidFill>
+                <a:latin typeface="맑은 고딕"/>
+              </a:rPr>
+              <a:t>Fuse 단면 사진
+(자리 예약)</a:t>
             </a:r>
           </a:p>
         </p:txBody>

--- a/docs/SX3K-코팅섹션-분석결과.pptx
+++ b/docs/SX3K-코팅섹션-분석결과.pptx
@@ -6159,7 +6159,7 @@
         </p:nvGraphicFramePr>
         <p:xfrm>
           <a:off x="384048" y="1234440"/>
-          <a:ext cx="5212078" cy="960120"/>
+          <a:ext cx="5212078" cy="1280160"/>
         </p:xfrm>
         <a:graphic>
           <a:graphicData uri="http://schemas.openxmlformats.org/drawingml/2006/table">
@@ -6695,6 +6695,180 @@
                   </a:tcPr>
                 </a:tc>
               </a:tr>
+              <a:tr h="320040">
+                <a:tc>
+                  <a:txBody>
+                    <a:bodyPr wrap="square"/>
+                    <a:lstStyle/>
+                    <a:p>
+                      <a:pPr algn="ctr"/>
+                      <a:r>
+                        <a:rPr sz="800" b="1">
+                          <a:solidFill>
+                            <a:srgbClr val="000000"/>
+                          </a:solidFill>
+                          <a:latin typeface="맑은 고딕"/>
+                        </a:rPr>
+                        <a:t>#3</a:t>
+                      </a:r>
+                    </a:p>
+                  </a:txBody>
+                  <a:tcPr anchor="ctr" marL="27432" marR="27432" marT="18288" marB="18288">
+                    <a:lnL w="12700" cap="flat">
+                      <a:solidFill>
+                        <a:srgbClr val="000000"/>
+                      </a:solidFill>
+                    </a:lnL>
+                    <a:lnR w="12700" cap="flat">
+                      <a:solidFill>
+                        <a:srgbClr val="000000"/>
+                      </a:solidFill>
+                    </a:lnR>
+                    <a:lnT w="12700" cap="flat">
+                      <a:solidFill>
+                        <a:srgbClr val="000000"/>
+                      </a:solidFill>
+                    </a:lnT>
+                    <a:lnB w="12700" cap="flat">
+                      <a:solidFill>
+                        <a:srgbClr val="000000"/>
+                      </a:solidFill>
+                    </a:lnB>
+                    <a:solidFill>
+                      <a:srgbClr val="FFFFFF"/>
+                    </a:solidFill>
+                  </a:tcPr>
+                </a:tc>
+                <a:tc>
+                  <a:txBody>
+                    <a:bodyPr wrap="square"/>
+                    <a:lstStyle/>
+                    <a:p>
+                      <a:pPr algn="ctr"/>
+                      <a:r>
+                        <a:rPr sz="800" b="0">
+                          <a:solidFill>
+                            <a:srgbClr val="000000"/>
+                          </a:solidFill>
+                          <a:latin typeface="맑은 고딕"/>
+                        </a:rPr>
+                        <a:t>205</a:t>
+                      </a:r>
+                    </a:p>
+                  </a:txBody>
+                  <a:tcPr anchor="ctr" marL="27432" marR="27432" marT="18288" marB="18288">
+                    <a:lnL w="12700" cap="flat">
+                      <a:solidFill>
+                        <a:srgbClr val="000000"/>
+                      </a:solidFill>
+                    </a:lnL>
+                    <a:lnR w="12700" cap="flat">
+                      <a:solidFill>
+                        <a:srgbClr val="000000"/>
+                      </a:solidFill>
+                    </a:lnR>
+                    <a:lnT w="12700" cap="flat">
+                      <a:solidFill>
+                        <a:srgbClr val="000000"/>
+                      </a:solidFill>
+                    </a:lnT>
+                    <a:lnB w="12700" cap="flat">
+                      <a:solidFill>
+                        <a:srgbClr val="000000"/>
+                      </a:solidFill>
+                    </a:lnB>
+                    <a:solidFill>
+                      <a:srgbClr val="FFFFFF"/>
+                    </a:solidFill>
+                  </a:tcPr>
+                </a:tc>
+                <a:tc>
+                  <a:txBody>
+                    <a:bodyPr wrap="square"/>
+                    <a:lstStyle/>
+                    <a:p>
+                      <a:pPr algn="ctr"/>
+                      <a:r>
+                        <a:rPr sz="800" b="0">
+                          <a:solidFill>
+                            <a:srgbClr val="000000"/>
+                          </a:solidFill>
+                          <a:latin typeface="맑은 고딕"/>
+                        </a:rPr>
+                        <a:t>123</a:t>
+                      </a:r>
+                    </a:p>
+                  </a:txBody>
+                  <a:tcPr anchor="ctr" marL="27432" marR="27432" marT="18288" marB="18288">
+                    <a:lnL w="12700" cap="flat">
+                      <a:solidFill>
+                        <a:srgbClr val="000000"/>
+                      </a:solidFill>
+                    </a:lnL>
+                    <a:lnR w="12700" cap="flat">
+                      <a:solidFill>
+                        <a:srgbClr val="000000"/>
+                      </a:solidFill>
+                    </a:lnR>
+                    <a:lnT w="12700" cap="flat">
+                      <a:solidFill>
+                        <a:srgbClr val="000000"/>
+                      </a:solidFill>
+                    </a:lnT>
+                    <a:lnB w="12700" cap="flat">
+                      <a:solidFill>
+                        <a:srgbClr val="000000"/>
+                      </a:solidFill>
+                    </a:lnB>
+                    <a:solidFill>
+                      <a:srgbClr val="FFFFFF"/>
+                    </a:solidFill>
+                  </a:tcPr>
+                </a:tc>
+                <a:tc>
+                  <a:txBody>
+                    <a:bodyPr wrap="square"/>
+                    <a:lstStyle/>
+                    <a:p>
+                      <a:pPr algn="ctr"/>
+                      <a:r>
+                        <a:rPr sz="800" b="0">
+                          <a:solidFill>
+                            <a:srgbClr val="000000"/>
+                          </a:solidFill>
+                          <a:latin typeface="맑은 고딕"/>
+                        </a:rPr>
+                        <a:t>87</a:t>
+                      </a:r>
+                    </a:p>
+                  </a:txBody>
+                  <a:tcPr anchor="ctr" marL="27432" marR="27432" marT="18288" marB="18288">
+                    <a:lnL w="12700" cap="flat">
+                      <a:solidFill>
+                        <a:srgbClr val="000000"/>
+                      </a:solidFill>
+                    </a:lnL>
+                    <a:lnR w="12700" cap="flat">
+                      <a:solidFill>
+                        <a:srgbClr val="000000"/>
+                      </a:solidFill>
+                    </a:lnR>
+                    <a:lnT w="12700" cap="flat">
+                      <a:solidFill>
+                        <a:srgbClr val="000000"/>
+                      </a:solidFill>
+                    </a:lnT>
+                    <a:lnB w="12700" cap="flat">
+                      <a:solidFill>
+                        <a:srgbClr val="000000"/>
+                      </a:solidFill>
+                    </a:lnB>
+                    <a:solidFill>
+                      <a:srgbClr val="FFFFFF"/>
+                    </a:solidFill>
+                  </a:tcPr>
+                </a:tc>
+              </a:tr>
             </a:tbl>
           </a:graphicData>
         </a:graphic>
@@ -6707,7 +6881,7 @@
         </p:nvSpPr>
         <p:spPr>
           <a:xfrm>
-            <a:off x="384048" y="2331720"/>
+            <a:off x="384048" y="2651760"/>
             <a:ext cx="5212080" cy="1188720"/>
           </a:xfrm>
           <a:prstGeom prst="rect">
@@ -6728,7 +6902,7 @@
                 </a:solidFill>
                 <a:latin typeface="맑은 고딕"/>
               </a:rPr>
-              <a:t>■ NTC 전체 6개 포인트: Min 77 / Max 203 / AVG 126.8um</a:t>
+              <a:t>■ NTC 전체 9개 포인트: Min 77 / Max 205 / AVG 130.7um</a:t>
             </a:r>
           </a:p>
           <a:p>
@@ -6750,7 +6924,7 @@
                 </a:solidFill>
                 <a:latin typeface="맑은 고딕"/>
               </a:rPr>
-              <a:t>■ 샘플 간 편차(#1 154~203um, #2 77~86um)는 별도 확인 필요</a:t>
+              <a:t>■ 샘플 간 편차(#1 154~203um, #2 77~86um, #3 87~205um)는 별도 확인 필요</a:t>
             </a:r>
           </a:p>
         </p:txBody>
@@ -7869,7 +8043,7 @@
                           </a:solidFill>
                           <a:latin typeface="맑은 고딕"/>
                         </a:rPr>
-                        <a:t>203</a:t>
+                        <a:t>205</a:t>
                       </a:r>
                     </a:p>
                   </a:txBody>
@@ -7912,7 +8086,7 @@
                           </a:solidFill>
                           <a:latin typeface="맑은 고딕"/>
                         </a:rPr>
-                        <a:t>126.8</a:t>
+                        <a:t>130.7</a:t>
                       </a:r>
                     </a:p>
                   </a:txBody>
@@ -8114,7 +8288,7 @@
                 </a:solidFill>
                 <a:latin typeface="맑은 고딕"/>
               </a:rPr>
-              <a:t>4. NTC 부위는 샘플 간 편차(#1 154~203um, #2 77~86um)가 확인되어 원인 확인 권장</a:t>
+              <a:t>4. NTC 부위는 샘플 간 편차(#1 154~203um, #2 77~86um, #3 87~205um)가 확인되어 원인 확인 권장</a:t>
             </a:r>
           </a:p>
         </p:txBody>
@@ -8777,7 +8951,7 @@
                           </a:solidFill>
                           <a:latin typeface="맑은 고딕"/>
                         </a:rPr>
-                        <a:t>8EA (TOP LH/RH, BOT LH/RH 4종 PCB 2SET)</a:t>
+                        <a:t>TOP LH/RH, BOT LH/RH 4종 PCB 2SET 중 부위별 아래 수량 분석</a:t>
                       </a:r>
                     </a:p>
                   </a:txBody>
@@ -8865,7 +9039,7 @@
                           </a:solidFill>
                           <a:latin typeface="맑은 고딕"/>
                         </a:rPr>
-                        <a:t>Sensing Tab 8p / Fuse 8p / Connector 8p / NTC 6p (부위별 1p씩, TOP·RH 제품 분석)</a:t>
+                        <a:t>Sensing Tab 6p / Fuse 6p / Connector 5p / NTC 3p (부위별 1p씩, TOP·RH 제품 분석)</a:t>
                       </a:r>
                     </a:p>
                   </a:txBody>

--- a/docs/SX3K-코팅섹션-분석결과.pptx
+++ b/docs/SX3K-코팅섹션-분석결과.pptx
@@ -19,6 +19,7 @@
     <p:sldId id="3695" r:id="rId18"/>
     <p:sldId id="3696" r:id="rId19"/>
     <p:sldId id="3697" r:id="rId20"/>
+    <p:sldId id="3698" r:id="rId21"/>
   </p:sldIdLst>
   <p:sldSz cx="9906000" cy="6859588"/>
   <p:notesSz cx="6805613" cy="9939338"/>
@@ -7119,6 +7120,2190 @@
                 </a:solidFill>
                 <a:latin typeface="맑은 고딕"/>
               </a:rPr>
+              <a:t>NTC 도포 방식 비교 (Manual vs 설비 자동 도포)</a:t>
+            </a:r>
+          </a:p>
+        </p:txBody>
+      </p:sp>
+      <p:sp>
+        <p:nvSpPr>
+          <p:cNvPr id="3" name="Rectangle 2"/>
+          <p:cNvSpPr/>
+          <p:nvPr/>
+        </p:nvSpPr>
+        <p:spPr>
+          <a:xfrm>
+            <a:off x="384048" y="731520"/>
+            <a:ext cx="9125712" cy="32004"/>
+          </a:xfrm>
+          <a:prstGeom prst="rect">
+            <a:avLst/>
+          </a:prstGeom>
+          <a:solidFill>
+            <a:srgbClr val="17365D"/>
+          </a:solidFill>
+          <a:ln>
+            <a:noFill/>
+          </a:ln>
+          <a:effectLst/>
+        </p:spPr>
+        <p:txBody>
+          <a:bodyPr rtlCol="0" anchor="ctr"/>
+          <a:lstStyle/>
+          <a:p>
+            <a:pPr algn="ctr"/>
+          </a:p>
+        </p:txBody>
+      </p:sp>
+      <p:sp>
+        <p:nvSpPr>
+          <p:cNvPr id="4" name="Rectangle 3"/>
+          <p:cNvSpPr/>
+          <p:nvPr/>
+        </p:nvSpPr>
+        <p:spPr>
+          <a:xfrm>
+            <a:off x="320040" y="2468880"/>
+            <a:ext cx="9281160" cy="640080"/>
+          </a:xfrm>
+          <a:prstGeom prst="rect">
+            <a:avLst/>
+          </a:prstGeom>
+          <a:solidFill>
+            <a:srgbClr val="FFFFFF"/>
+          </a:solidFill>
+          <a:ln>
+            <a:noFill/>
+          </a:ln>
+          <a:effectLst/>
+        </p:spPr>
+        <p:txBody>
+          <a:bodyPr rtlCol="0" anchor="ctr"/>
+          <a:lstStyle/>
+          <a:p>
+            <a:pPr algn="ctr"/>
+          </a:p>
+        </p:txBody>
+      </p:sp>
+      <p:sp>
+        <p:nvSpPr>
+          <p:cNvPr id="5" name="Rectangle 4"/>
+          <p:cNvSpPr/>
+          <p:nvPr/>
+        </p:nvSpPr>
+        <p:spPr>
+          <a:xfrm>
+            <a:off x="384048" y="914400"/>
+            <a:ext cx="9107424" cy="292608"/>
+          </a:xfrm>
+          <a:prstGeom prst="rect">
+            <a:avLst/>
+          </a:prstGeom>
+          <a:solidFill>
+            <a:srgbClr val="17365D"/>
+          </a:solidFill>
+          <a:ln>
+            <a:noFill/>
+          </a:ln>
+          <a:effectLst/>
+        </p:spPr>
+        <p:txBody>
+          <a:bodyPr rtlCol="0" anchor="ctr" wrap="square" lIns="73152" tIns="0" bIns="0"/>
+          <a:lstStyle/>
+          <a:p>
+            <a:pPr algn="l"/>
+            <a:r>
+              <a:rPr sz="1100" b="1">
+                <a:solidFill>
+                  <a:srgbClr val="FFFFFF"/>
+                </a:solidFill>
+                <a:latin typeface="맑은 고딕"/>
+              </a:rPr>
+              <a:t>▣ 비교 배경</a:t>
+            </a:r>
+          </a:p>
+        </p:txBody>
+      </p:sp>
+      <p:sp>
+        <p:nvSpPr>
+          <p:cNvPr id="6" name="TextBox 5"/>
+          <p:cNvSpPr txBox="1"/>
+          <p:nvPr/>
+        </p:nvSpPr>
+        <p:spPr>
+          <a:xfrm>
+            <a:off x="457200" y="1234440"/>
+            <a:ext cx="8961120" cy="502920"/>
+          </a:xfrm>
+          <a:prstGeom prst="rect">
+            <a:avLst/>
+          </a:prstGeom>
+          <a:noFill/>
+        </p:spPr>
+        <p:txBody>
+          <a:bodyPr wrap="square">
+            <a:spAutoFit/>
+          </a:bodyPr>
+          <a:lstStyle/>
+          <a:p>
+            <a:r>
+              <a:rPr sz="1000">
+                <a:solidFill>
+                  <a:srgbClr val="000000"/>
+                </a:solidFill>
+                <a:latin typeface="맑은 고딕"/>
+              </a:rPr>
+              <a:t>NTC 부위는 도포 방식에 따라 좌/우 형상 편차가 발생할 수 있어, Manual 도포와 설비</a:t>
+            </a:r>
+          </a:p>
+          <a:p>
+            <a:r>
+              <a:rPr sz="1000">
+                <a:solidFill>
+                  <a:srgbClr val="000000"/>
+                </a:solidFill>
+                <a:latin typeface="맑은 고딕"/>
+              </a:rPr>
+              <a:t>자동 도포의 단면 형상 균일도를 비교 검토함</a:t>
+            </a:r>
+          </a:p>
+        </p:txBody>
+      </p:sp>
+      <p:sp>
+        <p:nvSpPr>
+          <p:cNvPr id="7" name="Rectangle 6"/>
+          <p:cNvSpPr/>
+          <p:nvPr/>
+        </p:nvSpPr>
+        <p:spPr>
+          <a:xfrm>
+            <a:off x="384048" y="1874519"/>
+            <a:ext cx="9107424" cy="292608"/>
+          </a:xfrm>
+          <a:prstGeom prst="rect">
+            <a:avLst/>
+          </a:prstGeom>
+          <a:solidFill>
+            <a:srgbClr val="17365D"/>
+          </a:solidFill>
+          <a:ln>
+            <a:noFill/>
+          </a:ln>
+          <a:effectLst/>
+        </p:spPr>
+        <p:txBody>
+          <a:bodyPr rtlCol="0" anchor="ctr" wrap="square" lIns="73152" tIns="0" bIns="0"/>
+          <a:lstStyle/>
+          <a:p>
+            <a:pPr algn="l"/>
+            <a:r>
+              <a:rPr sz="1100" b="1">
+                <a:solidFill>
+                  <a:srgbClr val="FFFFFF"/>
+                </a:solidFill>
+                <a:latin typeface="맑은 고딕"/>
+              </a:rPr>
+              <a:t>▣ 측정 결과 비교 (단위: um)</a:t>
+            </a:r>
+          </a:p>
+        </p:txBody>
+      </p:sp>
+      <p:graphicFrame>
+        <p:nvGraphicFramePr>
+          <p:cNvPr id="8" name="Table 7"/>
+          <p:cNvGraphicFramePr>
+            <a:graphicFrameLocks noGrp="1"/>
+          </p:cNvGraphicFramePr>
+          <p:nvPr/>
+        </p:nvGraphicFramePr>
+        <p:xfrm>
+          <a:off x="457200" y="2194560"/>
+          <a:ext cx="9107424" cy="1920240"/>
+        </p:xfrm>
+        <a:graphic>
+          <a:graphicData uri="http://schemas.openxmlformats.org/drawingml/2006/table">
+            <a:tbl>
+              <a:tblPr>
+                <a:tableStyleId>{5C22544A-7EE6-4342-B048-85BDC9FD1C3A}</a:tableStyleId>
+              </a:tblPr>
+              <a:tblGrid>
+                <a:gridCol w="1280160"/>
+                <a:gridCol w="914400"/>
+                <a:gridCol w="1554480"/>
+                <a:gridCol w="1554480"/>
+                <a:gridCol w="1554480"/>
+                <a:gridCol w="2249424"/>
+              </a:tblGrid>
+              <a:tr h="320040">
+                <a:tc>
+                  <a:txBody>
+                    <a:bodyPr wrap="square"/>
+                    <a:lstStyle/>
+                    <a:p>
+                      <a:pPr algn="ctr"/>
+                      <a:r>
+                        <a:rPr sz="900" b="1">
+                          <a:solidFill>
+                            <a:srgbClr val="FFFFFF"/>
+                          </a:solidFill>
+                          <a:latin typeface="맑은 고딕"/>
+                        </a:rPr>
+                        <a:t>구분</a:t>
+                      </a:r>
+                    </a:p>
+                  </a:txBody>
+                  <a:tcPr anchor="ctr" marL="27432" marR="27432" marT="18288" marB="18288">
+                    <a:lnL w="12700" cap="flat">
+                      <a:solidFill>
+                        <a:srgbClr val="000000"/>
+                      </a:solidFill>
+                    </a:lnL>
+                    <a:lnR w="12700" cap="flat">
+                      <a:solidFill>
+                        <a:srgbClr val="000000"/>
+                      </a:solidFill>
+                    </a:lnR>
+                    <a:lnT w="12700" cap="flat">
+                      <a:solidFill>
+                        <a:srgbClr val="000000"/>
+                      </a:solidFill>
+                    </a:lnT>
+                    <a:lnB w="12700" cap="flat">
+                      <a:solidFill>
+                        <a:srgbClr val="000000"/>
+                      </a:solidFill>
+                    </a:lnB>
+                    <a:solidFill>
+                      <a:srgbClr val="17365D"/>
+                    </a:solidFill>
+                  </a:tcPr>
+                </a:tc>
+                <a:tc>
+                  <a:txBody>
+                    <a:bodyPr wrap="square"/>
+                    <a:lstStyle/>
+                    <a:p>
+                      <a:pPr algn="ctr"/>
+                      <a:r>
+                        <a:rPr sz="900" b="1">
+                          <a:solidFill>
+                            <a:srgbClr val="FFFFFF"/>
+                          </a:solidFill>
+                          <a:latin typeface="맑은 고딕"/>
+                        </a:rPr>
+                        <a:t>샘플</a:t>
+                      </a:r>
+                    </a:p>
+                  </a:txBody>
+                  <a:tcPr anchor="ctr" marL="27432" marR="27432" marT="18288" marB="18288">
+                    <a:lnL w="12700" cap="flat">
+                      <a:solidFill>
+                        <a:srgbClr val="000000"/>
+                      </a:solidFill>
+                    </a:lnL>
+                    <a:lnR w="12700" cap="flat">
+                      <a:solidFill>
+                        <a:srgbClr val="000000"/>
+                      </a:solidFill>
+                    </a:lnR>
+                    <a:lnT w="12700" cap="flat">
+                      <a:solidFill>
+                        <a:srgbClr val="000000"/>
+                      </a:solidFill>
+                    </a:lnT>
+                    <a:lnB w="12700" cap="flat">
+                      <a:solidFill>
+                        <a:srgbClr val="000000"/>
+                      </a:solidFill>
+                    </a:lnB>
+                    <a:solidFill>
+                      <a:srgbClr val="17365D"/>
+                    </a:solidFill>
+                  </a:tcPr>
+                </a:tc>
+                <a:tc>
+                  <a:txBody>
+                    <a:bodyPr wrap="square"/>
+                    <a:lstStyle/>
+                    <a:p>
+                      <a:pPr algn="ctr"/>
+                      <a:r>
+                        <a:rPr sz="900" b="1">
+                          <a:solidFill>
+                            <a:srgbClr val="FFFFFF"/>
+                          </a:solidFill>
+                          <a:latin typeface="맑은 고딕"/>
+                        </a:rPr>
+                        <a:t>측정1(좌)</a:t>
+                      </a:r>
+                    </a:p>
+                  </a:txBody>
+                  <a:tcPr anchor="ctr" marL="27432" marR="27432" marT="18288" marB="18288">
+                    <a:lnL w="12700" cap="flat">
+                      <a:solidFill>
+                        <a:srgbClr val="000000"/>
+                      </a:solidFill>
+                    </a:lnL>
+                    <a:lnR w="12700" cap="flat">
+                      <a:solidFill>
+                        <a:srgbClr val="000000"/>
+                      </a:solidFill>
+                    </a:lnR>
+                    <a:lnT w="12700" cap="flat">
+                      <a:solidFill>
+                        <a:srgbClr val="000000"/>
+                      </a:solidFill>
+                    </a:lnT>
+                    <a:lnB w="12700" cap="flat">
+                      <a:solidFill>
+                        <a:srgbClr val="000000"/>
+                      </a:solidFill>
+                    </a:lnB>
+                    <a:solidFill>
+                      <a:srgbClr val="17365D"/>
+                    </a:solidFill>
+                  </a:tcPr>
+                </a:tc>
+                <a:tc>
+                  <a:txBody>
+                    <a:bodyPr wrap="square"/>
+                    <a:lstStyle/>
+                    <a:p>
+                      <a:pPr algn="ctr"/>
+                      <a:r>
+                        <a:rPr sz="900" b="1">
+                          <a:solidFill>
+                            <a:srgbClr val="FFFFFF"/>
+                          </a:solidFill>
+                          <a:latin typeface="맑은 고딕"/>
+                        </a:rPr>
+                        <a:t>측정2(상단)</a:t>
+                      </a:r>
+                    </a:p>
+                  </a:txBody>
+                  <a:tcPr anchor="ctr" marL="27432" marR="27432" marT="18288" marB="18288">
+                    <a:lnL w="12700" cap="flat">
+                      <a:solidFill>
+                        <a:srgbClr val="000000"/>
+                      </a:solidFill>
+                    </a:lnL>
+                    <a:lnR w="12700" cap="flat">
+                      <a:solidFill>
+                        <a:srgbClr val="000000"/>
+                      </a:solidFill>
+                    </a:lnR>
+                    <a:lnT w="12700" cap="flat">
+                      <a:solidFill>
+                        <a:srgbClr val="000000"/>
+                      </a:solidFill>
+                    </a:lnT>
+                    <a:lnB w="12700" cap="flat">
+                      <a:solidFill>
+                        <a:srgbClr val="000000"/>
+                      </a:solidFill>
+                    </a:lnB>
+                    <a:solidFill>
+                      <a:srgbClr val="17365D"/>
+                    </a:solidFill>
+                  </a:tcPr>
+                </a:tc>
+                <a:tc>
+                  <a:txBody>
+                    <a:bodyPr wrap="square"/>
+                    <a:lstStyle/>
+                    <a:p>
+                      <a:pPr algn="ctr"/>
+                      <a:r>
+                        <a:rPr sz="900" b="1">
+                          <a:solidFill>
+                            <a:srgbClr val="FFFFFF"/>
+                          </a:solidFill>
+                          <a:latin typeface="맑은 고딕"/>
+                        </a:rPr>
+                        <a:t>측정3(우)</a:t>
+                      </a:r>
+                    </a:p>
+                  </a:txBody>
+                  <a:tcPr anchor="ctr" marL="27432" marR="27432" marT="18288" marB="18288">
+                    <a:lnL w="12700" cap="flat">
+                      <a:solidFill>
+                        <a:srgbClr val="000000"/>
+                      </a:solidFill>
+                    </a:lnL>
+                    <a:lnR w="12700" cap="flat">
+                      <a:solidFill>
+                        <a:srgbClr val="000000"/>
+                      </a:solidFill>
+                    </a:lnR>
+                    <a:lnT w="12700" cap="flat">
+                      <a:solidFill>
+                        <a:srgbClr val="000000"/>
+                      </a:solidFill>
+                    </a:lnT>
+                    <a:lnB w="12700" cap="flat">
+                      <a:solidFill>
+                        <a:srgbClr val="000000"/>
+                      </a:solidFill>
+                    </a:lnB>
+                    <a:solidFill>
+                      <a:srgbClr val="17365D"/>
+                    </a:solidFill>
+                  </a:tcPr>
+                </a:tc>
+                <a:tc>
+                  <a:txBody>
+                    <a:bodyPr wrap="square"/>
+                    <a:lstStyle/>
+                    <a:p>
+                      <a:pPr algn="ctr"/>
+                      <a:r>
+                        <a:rPr sz="900" b="1">
+                          <a:solidFill>
+                            <a:srgbClr val="FFFFFF"/>
+                          </a:solidFill>
+                          <a:latin typeface="맑은 고딕"/>
+                        </a:rPr>
+                        <a:t>편차(Max-Min)</a:t>
+                      </a:r>
+                    </a:p>
+                  </a:txBody>
+                  <a:tcPr anchor="ctr" marL="27432" marR="27432" marT="18288" marB="18288">
+                    <a:lnL w="12700" cap="flat">
+                      <a:solidFill>
+                        <a:srgbClr val="000000"/>
+                      </a:solidFill>
+                    </a:lnL>
+                    <a:lnR w="12700" cap="flat">
+                      <a:solidFill>
+                        <a:srgbClr val="000000"/>
+                      </a:solidFill>
+                    </a:lnR>
+                    <a:lnT w="12700" cap="flat">
+                      <a:solidFill>
+                        <a:srgbClr val="000000"/>
+                      </a:solidFill>
+                    </a:lnT>
+                    <a:lnB w="12700" cap="flat">
+                      <a:solidFill>
+                        <a:srgbClr val="000000"/>
+                      </a:solidFill>
+                    </a:lnB>
+                    <a:solidFill>
+                      <a:srgbClr val="17365D"/>
+                    </a:solidFill>
+                  </a:tcPr>
+                </a:tc>
+              </a:tr>
+              <a:tr h="320040">
+                <a:tc>
+                  <a:txBody>
+                    <a:bodyPr wrap="square"/>
+                    <a:lstStyle/>
+                    <a:p>
+                      <a:pPr algn="ctr"/>
+                      <a:r>
+                        <a:rPr sz="900" b="1">
+                          <a:solidFill>
+                            <a:srgbClr val="000000"/>
+                          </a:solidFill>
+                          <a:latin typeface="맑은 고딕"/>
+                        </a:rPr>
+                        <a:t>Manual 도포</a:t>
+                      </a:r>
+                    </a:p>
+                  </a:txBody>
+                  <a:tcPr anchor="ctr" marL="27432" marR="27432" marT="18288" marB="18288">
+                    <a:lnL w="12700" cap="flat">
+                      <a:solidFill>
+                        <a:srgbClr val="000000"/>
+                      </a:solidFill>
+                    </a:lnL>
+                    <a:lnR w="12700" cap="flat">
+                      <a:solidFill>
+                        <a:srgbClr val="000000"/>
+                      </a:solidFill>
+                    </a:lnR>
+                    <a:lnT w="12700" cap="flat">
+                      <a:solidFill>
+                        <a:srgbClr val="000000"/>
+                      </a:solidFill>
+                    </a:lnT>
+                    <a:lnB w="12700" cap="flat">
+                      <a:solidFill>
+                        <a:srgbClr val="000000"/>
+                      </a:solidFill>
+                    </a:lnB>
+                    <a:solidFill>
+                      <a:srgbClr val="E7F0F7"/>
+                    </a:solidFill>
+                  </a:tcPr>
+                </a:tc>
+                <a:tc>
+                  <a:txBody>
+                    <a:bodyPr wrap="square"/>
+                    <a:lstStyle/>
+                    <a:p>
+                      <a:pPr algn="ctr"/>
+                      <a:r>
+                        <a:rPr sz="900" b="0">
+                          <a:solidFill>
+                            <a:srgbClr val="000000"/>
+                          </a:solidFill>
+                          <a:latin typeface="맑은 고딕"/>
+                        </a:rPr>
+                        <a:t>#1</a:t>
+                      </a:r>
+                    </a:p>
+                  </a:txBody>
+                  <a:tcPr anchor="ctr" marL="27432" marR="27432" marT="18288" marB="18288">
+                    <a:lnL w="12700" cap="flat">
+                      <a:solidFill>
+                        <a:srgbClr val="000000"/>
+                      </a:solidFill>
+                    </a:lnL>
+                    <a:lnR w="12700" cap="flat">
+                      <a:solidFill>
+                        <a:srgbClr val="000000"/>
+                      </a:solidFill>
+                    </a:lnR>
+                    <a:lnT w="12700" cap="flat">
+                      <a:solidFill>
+                        <a:srgbClr val="000000"/>
+                      </a:solidFill>
+                    </a:lnT>
+                    <a:lnB w="12700" cap="flat">
+                      <a:solidFill>
+                        <a:srgbClr val="000000"/>
+                      </a:solidFill>
+                    </a:lnB>
+                    <a:solidFill>
+                      <a:srgbClr val="FFFFFF"/>
+                    </a:solidFill>
+                  </a:tcPr>
+                </a:tc>
+                <a:tc>
+                  <a:txBody>
+                    <a:bodyPr wrap="square"/>
+                    <a:lstStyle/>
+                    <a:p>
+                      <a:pPr algn="ctr"/>
+                      <a:r>
+                        <a:rPr sz="900" b="0">
+                          <a:solidFill>
+                            <a:srgbClr val="000000"/>
+                          </a:solidFill>
+                          <a:latin typeface="맑은 고딕"/>
+                        </a:rPr>
+                        <a:t>154</a:t>
+                      </a:r>
+                    </a:p>
+                  </a:txBody>
+                  <a:tcPr anchor="ctr" marL="27432" marR="27432" marT="18288" marB="18288">
+                    <a:lnL w="12700" cap="flat">
+                      <a:solidFill>
+                        <a:srgbClr val="000000"/>
+                      </a:solidFill>
+                    </a:lnL>
+                    <a:lnR w="12700" cap="flat">
+                      <a:solidFill>
+                        <a:srgbClr val="000000"/>
+                      </a:solidFill>
+                    </a:lnR>
+                    <a:lnT w="12700" cap="flat">
+                      <a:solidFill>
+                        <a:srgbClr val="000000"/>
+                      </a:solidFill>
+                    </a:lnT>
+                    <a:lnB w="12700" cap="flat">
+                      <a:solidFill>
+                        <a:srgbClr val="000000"/>
+                      </a:solidFill>
+                    </a:lnB>
+                    <a:solidFill>
+                      <a:srgbClr val="FFFFFF"/>
+                    </a:solidFill>
+                  </a:tcPr>
+                </a:tc>
+                <a:tc>
+                  <a:txBody>
+                    <a:bodyPr wrap="square"/>
+                    <a:lstStyle/>
+                    <a:p>
+                      <a:pPr algn="ctr"/>
+                      <a:r>
+                        <a:rPr sz="900" b="0">
+                          <a:solidFill>
+                            <a:srgbClr val="000000"/>
+                          </a:solidFill>
+                          <a:latin typeface="맑은 고딕"/>
+                        </a:rPr>
+                        <a:t>159</a:t>
+                      </a:r>
+                    </a:p>
+                  </a:txBody>
+                  <a:tcPr anchor="ctr" marL="27432" marR="27432" marT="18288" marB="18288">
+                    <a:lnL w="12700" cap="flat">
+                      <a:solidFill>
+                        <a:srgbClr val="000000"/>
+                      </a:solidFill>
+                    </a:lnL>
+                    <a:lnR w="12700" cap="flat">
+                      <a:solidFill>
+                        <a:srgbClr val="000000"/>
+                      </a:solidFill>
+                    </a:lnR>
+                    <a:lnT w="12700" cap="flat">
+                      <a:solidFill>
+                        <a:srgbClr val="000000"/>
+                      </a:solidFill>
+                    </a:lnT>
+                    <a:lnB w="12700" cap="flat">
+                      <a:solidFill>
+                        <a:srgbClr val="000000"/>
+                      </a:solidFill>
+                    </a:lnB>
+                    <a:solidFill>
+                      <a:srgbClr val="FFFFFF"/>
+                    </a:solidFill>
+                  </a:tcPr>
+                </a:tc>
+                <a:tc>
+                  <a:txBody>
+                    <a:bodyPr wrap="square"/>
+                    <a:lstStyle/>
+                    <a:p>
+                      <a:pPr algn="ctr"/>
+                      <a:r>
+                        <a:rPr sz="900" b="0">
+                          <a:solidFill>
+                            <a:srgbClr val="000000"/>
+                          </a:solidFill>
+                          <a:latin typeface="맑은 고딕"/>
+                        </a:rPr>
+                        <a:t>203</a:t>
+                      </a:r>
+                    </a:p>
+                  </a:txBody>
+                  <a:tcPr anchor="ctr" marL="27432" marR="27432" marT="18288" marB="18288">
+                    <a:lnL w="12700" cap="flat">
+                      <a:solidFill>
+                        <a:srgbClr val="000000"/>
+                      </a:solidFill>
+                    </a:lnL>
+                    <a:lnR w="12700" cap="flat">
+                      <a:solidFill>
+                        <a:srgbClr val="000000"/>
+                      </a:solidFill>
+                    </a:lnR>
+                    <a:lnT w="12700" cap="flat">
+                      <a:solidFill>
+                        <a:srgbClr val="000000"/>
+                      </a:solidFill>
+                    </a:lnT>
+                    <a:lnB w="12700" cap="flat">
+                      <a:solidFill>
+                        <a:srgbClr val="000000"/>
+                      </a:solidFill>
+                    </a:lnB>
+                    <a:solidFill>
+                      <a:srgbClr val="FFFFFF"/>
+                    </a:solidFill>
+                  </a:tcPr>
+                </a:tc>
+                <a:tc>
+                  <a:txBody>
+                    <a:bodyPr wrap="square"/>
+                    <a:lstStyle/>
+                    <a:p>
+                      <a:pPr algn="ctr"/>
+                      <a:r>
+                        <a:rPr sz="900" b="1">
+                          <a:solidFill>
+                            <a:srgbClr val="000000"/>
+                          </a:solidFill>
+                          <a:latin typeface="맑은 고딕"/>
+                        </a:rPr>
+                        <a:t>49</a:t>
+                      </a:r>
+                    </a:p>
+                  </a:txBody>
+                  <a:tcPr anchor="ctr" marL="27432" marR="27432" marT="18288" marB="18288">
+                    <a:lnL w="12700" cap="flat">
+                      <a:solidFill>
+                        <a:srgbClr val="000000"/>
+                      </a:solidFill>
+                    </a:lnL>
+                    <a:lnR w="12700" cap="flat">
+                      <a:solidFill>
+                        <a:srgbClr val="000000"/>
+                      </a:solidFill>
+                    </a:lnR>
+                    <a:lnT w="12700" cap="flat">
+                      <a:solidFill>
+                        <a:srgbClr val="000000"/>
+                      </a:solidFill>
+                    </a:lnT>
+                    <a:lnB w="12700" cap="flat">
+                      <a:solidFill>
+                        <a:srgbClr val="000000"/>
+                      </a:solidFill>
+                    </a:lnB>
+                    <a:solidFill>
+                      <a:srgbClr val="FFFFFF"/>
+                    </a:solidFill>
+                  </a:tcPr>
+                </a:tc>
+              </a:tr>
+              <a:tr h="320040">
+                <a:tc>
+                  <a:txBody>
+                    <a:bodyPr wrap="square"/>
+                    <a:lstStyle/>
+                    <a:p>
+                      <a:pPr algn="ctr"/>
+                      <a:r>
+                        <a:rPr sz="900" b="1">
+                          <a:solidFill>
+                            <a:srgbClr val="000000"/>
+                          </a:solidFill>
+                          <a:latin typeface="맑은 고딕"/>
+                        </a:rPr>
+                        <a:t/>
+                      </a:r>
+                    </a:p>
+                  </a:txBody>
+                  <a:tcPr anchor="ctr" marL="27432" marR="27432" marT="18288" marB="18288">
+                    <a:lnL w="12700" cap="flat">
+                      <a:solidFill>
+                        <a:srgbClr val="000000"/>
+                      </a:solidFill>
+                    </a:lnL>
+                    <a:lnR w="12700" cap="flat">
+                      <a:solidFill>
+                        <a:srgbClr val="000000"/>
+                      </a:solidFill>
+                    </a:lnR>
+                    <a:lnT w="12700" cap="flat">
+                      <a:solidFill>
+                        <a:srgbClr val="000000"/>
+                      </a:solidFill>
+                    </a:lnT>
+                    <a:lnB w="12700" cap="flat">
+                      <a:solidFill>
+                        <a:srgbClr val="000000"/>
+                      </a:solidFill>
+                    </a:lnB>
+                    <a:solidFill>
+                      <a:srgbClr val="E7F0F7"/>
+                    </a:solidFill>
+                  </a:tcPr>
+                </a:tc>
+                <a:tc>
+                  <a:txBody>
+                    <a:bodyPr wrap="square"/>
+                    <a:lstStyle/>
+                    <a:p>
+                      <a:pPr algn="ctr"/>
+                      <a:r>
+                        <a:rPr sz="900" b="0">
+                          <a:solidFill>
+                            <a:srgbClr val="000000"/>
+                          </a:solidFill>
+                          <a:latin typeface="맑은 고딕"/>
+                        </a:rPr>
+                        <a:t>#2</a:t>
+                      </a:r>
+                    </a:p>
+                  </a:txBody>
+                  <a:tcPr anchor="ctr" marL="27432" marR="27432" marT="18288" marB="18288">
+                    <a:lnL w="12700" cap="flat">
+                      <a:solidFill>
+                        <a:srgbClr val="000000"/>
+                      </a:solidFill>
+                    </a:lnL>
+                    <a:lnR w="12700" cap="flat">
+                      <a:solidFill>
+                        <a:srgbClr val="000000"/>
+                      </a:solidFill>
+                    </a:lnR>
+                    <a:lnT w="12700" cap="flat">
+                      <a:solidFill>
+                        <a:srgbClr val="000000"/>
+                      </a:solidFill>
+                    </a:lnT>
+                    <a:lnB w="12700" cap="flat">
+                      <a:solidFill>
+                        <a:srgbClr val="000000"/>
+                      </a:solidFill>
+                    </a:lnB>
+                    <a:solidFill>
+                      <a:srgbClr val="FFFFFF"/>
+                    </a:solidFill>
+                  </a:tcPr>
+                </a:tc>
+                <a:tc>
+                  <a:txBody>
+                    <a:bodyPr wrap="square"/>
+                    <a:lstStyle/>
+                    <a:p>
+                      <a:pPr algn="ctr"/>
+                      <a:r>
+                        <a:rPr sz="900" b="0">
+                          <a:solidFill>
+                            <a:srgbClr val="000000"/>
+                          </a:solidFill>
+                          <a:latin typeface="맑은 고딕"/>
+                        </a:rPr>
+                        <a:t>77</a:t>
+                      </a:r>
+                    </a:p>
+                  </a:txBody>
+                  <a:tcPr anchor="ctr" marL="27432" marR="27432" marT="18288" marB="18288">
+                    <a:lnL w="12700" cap="flat">
+                      <a:solidFill>
+                        <a:srgbClr val="000000"/>
+                      </a:solidFill>
+                    </a:lnL>
+                    <a:lnR w="12700" cap="flat">
+                      <a:solidFill>
+                        <a:srgbClr val="000000"/>
+                      </a:solidFill>
+                    </a:lnR>
+                    <a:lnT w="12700" cap="flat">
+                      <a:solidFill>
+                        <a:srgbClr val="000000"/>
+                      </a:solidFill>
+                    </a:lnT>
+                    <a:lnB w="12700" cap="flat">
+                      <a:solidFill>
+                        <a:srgbClr val="000000"/>
+                      </a:solidFill>
+                    </a:lnB>
+                    <a:solidFill>
+                      <a:srgbClr val="FFFFFF"/>
+                    </a:solidFill>
+                  </a:tcPr>
+                </a:tc>
+                <a:tc>
+                  <a:txBody>
+                    <a:bodyPr wrap="square"/>
+                    <a:lstStyle/>
+                    <a:p>
+                      <a:pPr algn="ctr"/>
+                      <a:r>
+                        <a:rPr sz="900" b="0">
+                          <a:solidFill>
+                            <a:srgbClr val="000000"/>
+                          </a:solidFill>
+                          <a:latin typeface="맑은 고딕"/>
+                        </a:rPr>
+                        <a:t>86</a:t>
+                      </a:r>
+                    </a:p>
+                  </a:txBody>
+                  <a:tcPr anchor="ctr" marL="27432" marR="27432" marT="18288" marB="18288">
+                    <a:lnL w="12700" cap="flat">
+                      <a:solidFill>
+                        <a:srgbClr val="000000"/>
+                      </a:solidFill>
+                    </a:lnL>
+                    <a:lnR w="12700" cap="flat">
+                      <a:solidFill>
+                        <a:srgbClr val="000000"/>
+                      </a:solidFill>
+                    </a:lnR>
+                    <a:lnT w="12700" cap="flat">
+                      <a:solidFill>
+                        <a:srgbClr val="000000"/>
+                      </a:solidFill>
+                    </a:lnT>
+                    <a:lnB w="12700" cap="flat">
+                      <a:solidFill>
+                        <a:srgbClr val="000000"/>
+                      </a:solidFill>
+                    </a:lnB>
+                    <a:solidFill>
+                      <a:srgbClr val="FFFFFF"/>
+                    </a:solidFill>
+                  </a:tcPr>
+                </a:tc>
+                <a:tc>
+                  <a:txBody>
+                    <a:bodyPr wrap="square"/>
+                    <a:lstStyle/>
+                    <a:p>
+                      <a:pPr algn="ctr"/>
+                      <a:r>
+                        <a:rPr sz="900" b="0">
+                          <a:solidFill>
+                            <a:srgbClr val="000000"/>
+                          </a:solidFill>
+                          <a:latin typeface="맑은 고딕"/>
+                        </a:rPr>
+                        <a:t>82</a:t>
+                      </a:r>
+                    </a:p>
+                  </a:txBody>
+                  <a:tcPr anchor="ctr" marL="27432" marR="27432" marT="18288" marB="18288">
+                    <a:lnL w="12700" cap="flat">
+                      <a:solidFill>
+                        <a:srgbClr val="000000"/>
+                      </a:solidFill>
+                    </a:lnL>
+                    <a:lnR w="12700" cap="flat">
+                      <a:solidFill>
+                        <a:srgbClr val="000000"/>
+                      </a:solidFill>
+                    </a:lnR>
+                    <a:lnT w="12700" cap="flat">
+                      <a:solidFill>
+                        <a:srgbClr val="000000"/>
+                      </a:solidFill>
+                    </a:lnT>
+                    <a:lnB w="12700" cap="flat">
+                      <a:solidFill>
+                        <a:srgbClr val="000000"/>
+                      </a:solidFill>
+                    </a:lnB>
+                    <a:solidFill>
+                      <a:srgbClr val="FFFFFF"/>
+                    </a:solidFill>
+                  </a:tcPr>
+                </a:tc>
+                <a:tc>
+                  <a:txBody>
+                    <a:bodyPr wrap="square"/>
+                    <a:lstStyle/>
+                    <a:p>
+                      <a:pPr algn="ctr"/>
+                      <a:r>
+                        <a:rPr sz="900" b="1">
+                          <a:solidFill>
+                            <a:srgbClr val="000000"/>
+                          </a:solidFill>
+                          <a:latin typeface="맑은 고딕"/>
+                        </a:rPr>
+                        <a:t>9</a:t>
+                      </a:r>
+                    </a:p>
+                  </a:txBody>
+                  <a:tcPr anchor="ctr" marL="27432" marR="27432" marT="18288" marB="18288">
+                    <a:lnL w="12700" cap="flat">
+                      <a:solidFill>
+                        <a:srgbClr val="000000"/>
+                      </a:solidFill>
+                    </a:lnL>
+                    <a:lnR w="12700" cap="flat">
+                      <a:solidFill>
+                        <a:srgbClr val="000000"/>
+                      </a:solidFill>
+                    </a:lnR>
+                    <a:lnT w="12700" cap="flat">
+                      <a:solidFill>
+                        <a:srgbClr val="000000"/>
+                      </a:solidFill>
+                    </a:lnT>
+                    <a:lnB w="12700" cap="flat">
+                      <a:solidFill>
+                        <a:srgbClr val="000000"/>
+                      </a:solidFill>
+                    </a:lnB>
+                    <a:solidFill>
+                      <a:srgbClr val="FFFFFF"/>
+                    </a:solidFill>
+                  </a:tcPr>
+                </a:tc>
+              </a:tr>
+              <a:tr h="320040">
+                <a:tc>
+                  <a:txBody>
+                    <a:bodyPr wrap="square"/>
+                    <a:lstStyle/>
+                    <a:p>
+                      <a:pPr algn="ctr"/>
+                      <a:r>
+                        <a:rPr sz="900" b="1">
+                          <a:solidFill>
+                            <a:srgbClr val="000000"/>
+                          </a:solidFill>
+                          <a:latin typeface="맑은 고딕"/>
+                        </a:rPr>
+                        <a:t/>
+                      </a:r>
+                    </a:p>
+                  </a:txBody>
+                  <a:tcPr anchor="ctr" marL="27432" marR="27432" marT="18288" marB="18288">
+                    <a:lnL w="12700" cap="flat">
+                      <a:solidFill>
+                        <a:srgbClr val="000000"/>
+                      </a:solidFill>
+                    </a:lnL>
+                    <a:lnR w="12700" cap="flat">
+                      <a:solidFill>
+                        <a:srgbClr val="000000"/>
+                      </a:solidFill>
+                    </a:lnR>
+                    <a:lnT w="12700" cap="flat">
+                      <a:solidFill>
+                        <a:srgbClr val="000000"/>
+                      </a:solidFill>
+                    </a:lnT>
+                    <a:lnB w="12700" cap="flat">
+                      <a:solidFill>
+                        <a:srgbClr val="000000"/>
+                      </a:solidFill>
+                    </a:lnB>
+                    <a:solidFill>
+                      <a:srgbClr val="E7F0F7"/>
+                    </a:solidFill>
+                  </a:tcPr>
+                </a:tc>
+                <a:tc>
+                  <a:txBody>
+                    <a:bodyPr wrap="square"/>
+                    <a:lstStyle/>
+                    <a:p>
+                      <a:pPr algn="ctr"/>
+                      <a:r>
+                        <a:rPr sz="900" b="0">
+                          <a:solidFill>
+                            <a:srgbClr val="000000"/>
+                          </a:solidFill>
+                          <a:latin typeface="맑은 고딕"/>
+                        </a:rPr>
+                        <a:t>#3</a:t>
+                      </a:r>
+                    </a:p>
+                  </a:txBody>
+                  <a:tcPr anchor="ctr" marL="27432" marR="27432" marT="18288" marB="18288">
+                    <a:lnL w="12700" cap="flat">
+                      <a:solidFill>
+                        <a:srgbClr val="000000"/>
+                      </a:solidFill>
+                    </a:lnL>
+                    <a:lnR w="12700" cap="flat">
+                      <a:solidFill>
+                        <a:srgbClr val="000000"/>
+                      </a:solidFill>
+                    </a:lnR>
+                    <a:lnT w="12700" cap="flat">
+                      <a:solidFill>
+                        <a:srgbClr val="000000"/>
+                      </a:solidFill>
+                    </a:lnT>
+                    <a:lnB w="12700" cap="flat">
+                      <a:solidFill>
+                        <a:srgbClr val="000000"/>
+                      </a:solidFill>
+                    </a:lnB>
+                    <a:solidFill>
+                      <a:srgbClr val="FFFFFF"/>
+                    </a:solidFill>
+                  </a:tcPr>
+                </a:tc>
+                <a:tc>
+                  <a:txBody>
+                    <a:bodyPr wrap="square"/>
+                    <a:lstStyle/>
+                    <a:p>
+                      <a:pPr algn="ctr"/>
+                      <a:r>
+                        <a:rPr sz="900" b="0">
+                          <a:solidFill>
+                            <a:srgbClr val="000000"/>
+                          </a:solidFill>
+                          <a:latin typeface="맑은 고딕"/>
+                        </a:rPr>
+                        <a:t>205</a:t>
+                      </a:r>
+                    </a:p>
+                  </a:txBody>
+                  <a:tcPr anchor="ctr" marL="27432" marR="27432" marT="18288" marB="18288">
+                    <a:lnL w="12700" cap="flat">
+                      <a:solidFill>
+                        <a:srgbClr val="000000"/>
+                      </a:solidFill>
+                    </a:lnL>
+                    <a:lnR w="12700" cap="flat">
+                      <a:solidFill>
+                        <a:srgbClr val="000000"/>
+                      </a:solidFill>
+                    </a:lnR>
+                    <a:lnT w="12700" cap="flat">
+                      <a:solidFill>
+                        <a:srgbClr val="000000"/>
+                      </a:solidFill>
+                    </a:lnT>
+                    <a:lnB w="12700" cap="flat">
+                      <a:solidFill>
+                        <a:srgbClr val="000000"/>
+                      </a:solidFill>
+                    </a:lnB>
+                    <a:solidFill>
+                      <a:srgbClr val="FFFFFF"/>
+                    </a:solidFill>
+                  </a:tcPr>
+                </a:tc>
+                <a:tc>
+                  <a:txBody>
+                    <a:bodyPr wrap="square"/>
+                    <a:lstStyle/>
+                    <a:p>
+                      <a:pPr algn="ctr"/>
+                      <a:r>
+                        <a:rPr sz="900" b="0">
+                          <a:solidFill>
+                            <a:srgbClr val="000000"/>
+                          </a:solidFill>
+                          <a:latin typeface="맑은 고딕"/>
+                        </a:rPr>
+                        <a:t>123</a:t>
+                      </a:r>
+                    </a:p>
+                  </a:txBody>
+                  <a:tcPr anchor="ctr" marL="27432" marR="27432" marT="18288" marB="18288">
+                    <a:lnL w="12700" cap="flat">
+                      <a:solidFill>
+                        <a:srgbClr val="000000"/>
+                      </a:solidFill>
+                    </a:lnL>
+                    <a:lnR w="12700" cap="flat">
+                      <a:solidFill>
+                        <a:srgbClr val="000000"/>
+                      </a:solidFill>
+                    </a:lnR>
+                    <a:lnT w="12700" cap="flat">
+                      <a:solidFill>
+                        <a:srgbClr val="000000"/>
+                      </a:solidFill>
+                    </a:lnT>
+                    <a:lnB w="12700" cap="flat">
+                      <a:solidFill>
+                        <a:srgbClr val="000000"/>
+                      </a:solidFill>
+                    </a:lnB>
+                    <a:solidFill>
+                      <a:srgbClr val="FFFFFF"/>
+                    </a:solidFill>
+                  </a:tcPr>
+                </a:tc>
+                <a:tc>
+                  <a:txBody>
+                    <a:bodyPr wrap="square"/>
+                    <a:lstStyle/>
+                    <a:p>
+                      <a:pPr algn="ctr"/>
+                      <a:r>
+                        <a:rPr sz="900" b="0">
+                          <a:solidFill>
+                            <a:srgbClr val="000000"/>
+                          </a:solidFill>
+                          <a:latin typeface="맑은 고딕"/>
+                        </a:rPr>
+                        <a:t>87</a:t>
+                      </a:r>
+                    </a:p>
+                  </a:txBody>
+                  <a:tcPr anchor="ctr" marL="27432" marR="27432" marT="18288" marB="18288">
+                    <a:lnL w="12700" cap="flat">
+                      <a:solidFill>
+                        <a:srgbClr val="000000"/>
+                      </a:solidFill>
+                    </a:lnL>
+                    <a:lnR w="12700" cap="flat">
+                      <a:solidFill>
+                        <a:srgbClr val="000000"/>
+                      </a:solidFill>
+                    </a:lnR>
+                    <a:lnT w="12700" cap="flat">
+                      <a:solidFill>
+                        <a:srgbClr val="000000"/>
+                      </a:solidFill>
+                    </a:lnT>
+                    <a:lnB w="12700" cap="flat">
+                      <a:solidFill>
+                        <a:srgbClr val="000000"/>
+                      </a:solidFill>
+                    </a:lnB>
+                    <a:solidFill>
+                      <a:srgbClr val="FFFFFF"/>
+                    </a:solidFill>
+                  </a:tcPr>
+                </a:tc>
+                <a:tc>
+                  <a:txBody>
+                    <a:bodyPr wrap="square"/>
+                    <a:lstStyle/>
+                    <a:p>
+                      <a:pPr algn="ctr"/>
+                      <a:r>
+                        <a:rPr sz="900" b="1">
+                          <a:solidFill>
+                            <a:srgbClr val="000000"/>
+                          </a:solidFill>
+                          <a:latin typeface="맑은 고딕"/>
+                        </a:rPr>
+                        <a:t>118</a:t>
+                      </a:r>
+                    </a:p>
+                  </a:txBody>
+                  <a:tcPr anchor="ctr" marL="27432" marR="27432" marT="18288" marB="18288">
+                    <a:lnL w="12700" cap="flat">
+                      <a:solidFill>
+                        <a:srgbClr val="000000"/>
+                      </a:solidFill>
+                    </a:lnL>
+                    <a:lnR w="12700" cap="flat">
+                      <a:solidFill>
+                        <a:srgbClr val="000000"/>
+                      </a:solidFill>
+                    </a:lnR>
+                    <a:lnT w="12700" cap="flat">
+                      <a:solidFill>
+                        <a:srgbClr val="000000"/>
+                      </a:solidFill>
+                    </a:lnT>
+                    <a:lnB w="12700" cap="flat">
+                      <a:solidFill>
+                        <a:srgbClr val="000000"/>
+                      </a:solidFill>
+                    </a:lnB>
+                    <a:solidFill>
+                      <a:srgbClr val="FFFFFF"/>
+                    </a:solidFill>
+                  </a:tcPr>
+                </a:tc>
+              </a:tr>
+              <a:tr h="320040">
+                <a:tc>
+                  <a:txBody>
+                    <a:bodyPr wrap="square"/>
+                    <a:lstStyle/>
+                    <a:p>
+                      <a:pPr algn="ctr"/>
+                      <a:r>
+                        <a:rPr sz="900" b="1">
+                          <a:solidFill>
+                            <a:srgbClr val="000000"/>
+                          </a:solidFill>
+                          <a:latin typeface="맑은 고딕"/>
+                        </a:rPr>
+                        <a:t>설비 자동 도포</a:t>
+                      </a:r>
+                    </a:p>
+                  </a:txBody>
+                  <a:tcPr anchor="ctr" marL="27432" marR="27432" marT="18288" marB="18288">
+                    <a:lnL w="12700" cap="flat">
+                      <a:solidFill>
+                        <a:srgbClr val="000000"/>
+                      </a:solidFill>
+                    </a:lnL>
+                    <a:lnR w="12700" cap="flat">
+                      <a:solidFill>
+                        <a:srgbClr val="000000"/>
+                      </a:solidFill>
+                    </a:lnR>
+                    <a:lnT w="12700" cap="flat">
+                      <a:solidFill>
+                        <a:srgbClr val="000000"/>
+                      </a:solidFill>
+                    </a:lnT>
+                    <a:lnB w="12700" cap="flat">
+                      <a:solidFill>
+                        <a:srgbClr val="000000"/>
+                      </a:solidFill>
+                    </a:lnB>
+                    <a:solidFill>
+                      <a:srgbClr val="FBE5D6"/>
+                    </a:solidFill>
+                  </a:tcPr>
+                </a:tc>
+                <a:tc>
+                  <a:txBody>
+                    <a:bodyPr wrap="square"/>
+                    <a:lstStyle/>
+                    <a:p>
+                      <a:pPr algn="ctr"/>
+                      <a:r>
+                        <a:rPr sz="900" b="0">
+                          <a:solidFill>
+                            <a:srgbClr val="000000"/>
+                          </a:solidFill>
+                          <a:latin typeface="맑은 고딕"/>
+                        </a:rPr>
+                        <a:t>#1</a:t>
+                      </a:r>
+                    </a:p>
+                  </a:txBody>
+                  <a:tcPr anchor="ctr" marL="27432" marR="27432" marT="18288" marB="18288">
+                    <a:lnL w="12700" cap="flat">
+                      <a:solidFill>
+                        <a:srgbClr val="000000"/>
+                      </a:solidFill>
+                    </a:lnL>
+                    <a:lnR w="12700" cap="flat">
+                      <a:solidFill>
+                        <a:srgbClr val="000000"/>
+                      </a:solidFill>
+                    </a:lnR>
+                    <a:lnT w="12700" cap="flat">
+                      <a:solidFill>
+                        <a:srgbClr val="000000"/>
+                      </a:solidFill>
+                    </a:lnT>
+                    <a:lnB w="12700" cap="flat">
+                      <a:solidFill>
+                        <a:srgbClr val="000000"/>
+                      </a:solidFill>
+                    </a:lnB>
+                    <a:solidFill>
+                      <a:srgbClr val="FFFFFF"/>
+                    </a:solidFill>
+                  </a:tcPr>
+                </a:tc>
+                <a:tc>
+                  <a:txBody>
+                    <a:bodyPr wrap="square"/>
+                    <a:lstStyle/>
+                    <a:p>
+                      <a:pPr algn="ctr"/>
+                      <a:r>
+                        <a:rPr sz="900" b="0">
+                          <a:solidFill>
+                            <a:srgbClr val="000000"/>
+                          </a:solidFill>
+                          <a:latin typeface="맑은 고딕"/>
+                        </a:rPr>
+                        <a:t>422</a:t>
+                      </a:r>
+                    </a:p>
+                  </a:txBody>
+                  <a:tcPr anchor="ctr" marL="27432" marR="27432" marT="18288" marB="18288">
+                    <a:lnL w="12700" cap="flat">
+                      <a:solidFill>
+                        <a:srgbClr val="000000"/>
+                      </a:solidFill>
+                    </a:lnL>
+                    <a:lnR w="12700" cap="flat">
+                      <a:solidFill>
+                        <a:srgbClr val="000000"/>
+                      </a:solidFill>
+                    </a:lnR>
+                    <a:lnT w="12700" cap="flat">
+                      <a:solidFill>
+                        <a:srgbClr val="000000"/>
+                      </a:solidFill>
+                    </a:lnT>
+                    <a:lnB w="12700" cap="flat">
+                      <a:solidFill>
+                        <a:srgbClr val="000000"/>
+                      </a:solidFill>
+                    </a:lnB>
+                    <a:solidFill>
+                      <a:srgbClr val="FFFFFF"/>
+                    </a:solidFill>
+                  </a:tcPr>
+                </a:tc>
+                <a:tc>
+                  <a:txBody>
+                    <a:bodyPr wrap="square"/>
+                    <a:lstStyle/>
+                    <a:p>
+                      <a:pPr algn="ctr"/>
+                      <a:r>
+                        <a:rPr sz="900" b="0">
+                          <a:solidFill>
+                            <a:srgbClr val="000000"/>
+                          </a:solidFill>
+                          <a:latin typeface="맑은 고딕"/>
+                        </a:rPr>
+                        <a:t>527</a:t>
+                      </a:r>
+                    </a:p>
+                  </a:txBody>
+                  <a:tcPr anchor="ctr" marL="27432" marR="27432" marT="18288" marB="18288">
+                    <a:lnL w="12700" cap="flat">
+                      <a:solidFill>
+                        <a:srgbClr val="000000"/>
+                      </a:solidFill>
+                    </a:lnL>
+                    <a:lnR w="12700" cap="flat">
+                      <a:solidFill>
+                        <a:srgbClr val="000000"/>
+                      </a:solidFill>
+                    </a:lnR>
+                    <a:lnT w="12700" cap="flat">
+                      <a:solidFill>
+                        <a:srgbClr val="000000"/>
+                      </a:solidFill>
+                    </a:lnT>
+                    <a:lnB w="12700" cap="flat">
+                      <a:solidFill>
+                        <a:srgbClr val="000000"/>
+                      </a:solidFill>
+                    </a:lnB>
+                    <a:solidFill>
+                      <a:srgbClr val="FFFFFF"/>
+                    </a:solidFill>
+                  </a:tcPr>
+                </a:tc>
+                <a:tc>
+                  <a:txBody>
+                    <a:bodyPr wrap="square"/>
+                    <a:lstStyle/>
+                    <a:p>
+                      <a:pPr algn="ctr"/>
+                      <a:r>
+                        <a:rPr sz="900" b="0">
+                          <a:solidFill>
+                            <a:srgbClr val="000000"/>
+                          </a:solidFill>
+                          <a:latin typeface="맑은 고딕"/>
+                        </a:rPr>
+                        <a:t>119</a:t>
+                      </a:r>
+                    </a:p>
+                  </a:txBody>
+                  <a:tcPr anchor="ctr" marL="27432" marR="27432" marT="18288" marB="18288">
+                    <a:lnL w="12700" cap="flat">
+                      <a:solidFill>
+                        <a:srgbClr val="000000"/>
+                      </a:solidFill>
+                    </a:lnL>
+                    <a:lnR w="12700" cap="flat">
+                      <a:solidFill>
+                        <a:srgbClr val="000000"/>
+                      </a:solidFill>
+                    </a:lnR>
+                    <a:lnT w="12700" cap="flat">
+                      <a:solidFill>
+                        <a:srgbClr val="000000"/>
+                      </a:solidFill>
+                    </a:lnT>
+                    <a:lnB w="12700" cap="flat">
+                      <a:solidFill>
+                        <a:srgbClr val="000000"/>
+                      </a:solidFill>
+                    </a:lnB>
+                    <a:solidFill>
+                      <a:srgbClr val="FFFFFF"/>
+                    </a:solidFill>
+                  </a:tcPr>
+                </a:tc>
+                <a:tc>
+                  <a:txBody>
+                    <a:bodyPr wrap="square"/>
+                    <a:lstStyle/>
+                    <a:p>
+                      <a:pPr algn="ctr"/>
+                      <a:r>
+                        <a:rPr sz="900" b="1">
+                          <a:solidFill>
+                            <a:srgbClr val="000000"/>
+                          </a:solidFill>
+                          <a:latin typeface="맑은 고딕"/>
+                        </a:rPr>
+                        <a:t>408</a:t>
+                      </a:r>
+                    </a:p>
+                  </a:txBody>
+                  <a:tcPr anchor="ctr" marL="27432" marR="27432" marT="18288" marB="18288">
+                    <a:lnL w="12700" cap="flat">
+                      <a:solidFill>
+                        <a:srgbClr val="000000"/>
+                      </a:solidFill>
+                    </a:lnL>
+                    <a:lnR w="12700" cap="flat">
+                      <a:solidFill>
+                        <a:srgbClr val="000000"/>
+                      </a:solidFill>
+                    </a:lnR>
+                    <a:lnT w="12700" cap="flat">
+                      <a:solidFill>
+                        <a:srgbClr val="000000"/>
+                      </a:solidFill>
+                    </a:lnT>
+                    <a:lnB w="12700" cap="flat">
+                      <a:solidFill>
+                        <a:srgbClr val="000000"/>
+                      </a:solidFill>
+                    </a:lnB>
+                    <a:solidFill>
+                      <a:srgbClr val="FFFFFF"/>
+                    </a:solidFill>
+                  </a:tcPr>
+                </a:tc>
+              </a:tr>
+              <a:tr h="320040">
+                <a:tc>
+                  <a:txBody>
+                    <a:bodyPr wrap="square"/>
+                    <a:lstStyle/>
+                    <a:p>
+                      <a:pPr algn="ctr"/>
+                      <a:r>
+                        <a:rPr sz="900" b="1">
+                          <a:solidFill>
+                            <a:srgbClr val="000000"/>
+                          </a:solidFill>
+                          <a:latin typeface="맑은 고딕"/>
+                        </a:rPr>
+                        <a:t/>
+                      </a:r>
+                    </a:p>
+                  </a:txBody>
+                  <a:tcPr anchor="ctr" marL="27432" marR="27432" marT="18288" marB="18288">
+                    <a:lnL w="12700" cap="flat">
+                      <a:solidFill>
+                        <a:srgbClr val="000000"/>
+                      </a:solidFill>
+                    </a:lnL>
+                    <a:lnR w="12700" cap="flat">
+                      <a:solidFill>
+                        <a:srgbClr val="000000"/>
+                      </a:solidFill>
+                    </a:lnR>
+                    <a:lnT w="12700" cap="flat">
+                      <a:solidFill>
+                        <a:srgbClr val="000000"/>
+                      </a:solidFill>
+                    </a:lnT>
+                    <a:lnB w="12700" cap="flat">
+                      <a:solidFill>
+                        <a:srgbClr val="000000"/>
+                      </a:solidFill>
+                    </a:lnB>
+                    <a:solidFill>
+                      <a:srgbClr val="FBE5D6"/>
+                    </a:solidFill>
+                  </a:tcPr>
+                </a:tc>
+                <a:tc>
+                  <a:txBody>
+                    <a:bodyPr wrap="square"/>
+                    <a:lstStyle/>
+                    <a:p>
+                      <a:pPr algn="ctr"/>
+                      <a:r>
+                        <a:rPr sz="900" b="0">
+                          <a:solidFill>
+                            <a:srgbClr val="000000"/>
+                          </a:solidFill>
+                          <a:latin typeface="맑은 고딕"/>
+                        </a:rPr>
+                        <a:t>#2</a:t>
+                      </a:r>
+                    </a:p>
+                  </a:txBody>
+                  <a:tcPr anchor="ctr" marL="27432" marR="27432" marT="18288" marB="18288">
+                    <a:lnL w="12700" cap="flat">
+                      <a:solidFill>
+                        <a:srgbClr val="000000"/>
+                      </a:solidFill>
+                    </a:lnL>
+                    <a:lnR w="12700" cap="flat">
+                      <a:solidFill>
+                        <a:srgbClr val="000000"/>
+                      </a:solidFill>
+                    </a:lnR>
+                    <a:lnT w="12700" cap="flat">
+                      <a:solidFill>
+                        <a:srgbClr val="000000"/>
+                      </a:solidFill>
+                    </a:lnT>
+                    <a:lnB w="12700" cap="flat">
+                      <a:solidFill>
+                        <a:srgbClr val="000000"/>
+                      </a:solidFill>
+                    </a:lnB>
+                    <a:solidFill>
+                      <a:srgbClr val="FFFFFF"/>
+                    </a:solidFill>
+                  </a:tcPr>
+                </a:tc>
+                <a:tc>
+                  <a:txBody>
+                    <a:bodyPr wrap="square"/>
+                    <a:lstStyle/>
+                    <a:p>
+                      <a:pPr algn="ctr"/>
+                      <a:r>
+                        <a:rPr sz="900" b="0">
+                          <a:solidFill>
+                            <a:srgbClr val="000000"/>
+                          </a:solidFill>
+                          <a:latin typeface="맑은 고딕"/>
+                        </a:rPr>
+                        <a:t>680</a:t>
+                      </a:r>
+                    </a:p>
+                  </a:txBody>
+                  <a:tcPr anchor="ctr" marL="27432" marR="27432" marT="18288" marB="18288">
+                    <a:lnL w="12700" cap="flat">
+                      <a:solidFill>
+                        <a:srgbClr val="000000"/>
+                      </a:solidFill>
+                    </a:lnL>
+                    <a:lnR w="12700" cap="flat">
+                      <a:solidFill>
+                        <a:srgbClr val="000000"/>
+                      </a:solidFill>
+                    </a:lnR>
+                    <a:lnT w="12700" cap="flat">
+                      <a:solidFill>
+                        <a:srgbClr val="000000"/>
+                      </a:solidFill>
+                    </a:lnT>
+                    <a:lnB w="12700" cap="flat">
+                      <a:solidFill>
+                        <a:srgbClr val="000000"/>
+                      </a:solidFill>
+                    </a:lnB>
+                    <a:solidFill>
+                      <a:srgbClr val="FFFFFF"/>
+                    </a:solidFill>
+                  </a:tcPr>
+                </a:tc>
+                <a:tc>
+                  <a:txBody>
+                    <a:bodyPr wrap="square"/>
+                    <a:lstStyle/>
+                    <a:p>
+                      <a:pPr algn="ctr"/>
+                      <a:r>
+                        <a:rPr sz="900" b="0">
+                          <a:solidFill>
+                            <a:srgbClr val="000000"/>
+                          </a:solidFill>
+                          <a:latin typeface="맑은 고딕"/>
+                        </a:rPr>
+                        <a:t>676</a:t>
+                      </a:r>
+                    </a:p>
+                  </a:txBody>
+                  <a:tcPr anchor="ctr" marL="27432" marR="27432" marT="18288" marB="18288">
+                    <a:lnL w="12700" cap="flat">
+                      <a:solidFill>
+                        <a:srgbClr val="000000"/>
+                      </a:solidFill>
+                    </a:lnL>
+                    <a:lnR w="12700" cap="flat">
+                      <a:solidFill>
+                        <a:srgbClr val="000000"/>
+                      </a:solidFill>
+                    </a:lnR>
+                    <a:lnT w="12700" cap="flat">
+                      <a:solidFill>
+                        <a:srgbClr val="000000"/>
+                      </a:solidFill>
+                    </a:lnT>
+                    <a:lnB w="12700" cap="flat">
+                      <a:solidFill>
+                        <a:srgbClr val="000000"/>
+                      </a:solidFill>
+                    </a:lnB>
+                    <a:solidFill>
+                      <a:srgbClr val="FFFFFF"/>
+                    </a:solidFill>
+                  </a:tcPr>
+                </a:tc>
+                <a:tc>
+                  <a:txBody>
+                    <a:bodyPr wrap="square"/>
+                    <a:lstStyle/>
+                    <a:p>
+                      <a:pPr algn="ctr"/>
+                      <a:r>
+                        <a:rPr sz="900" b="0">
+                          <a:solidFill>
+                            <a:srgbClr val="000000"/>
+                          </a:solidFill>
+                          <a:latin typeface="맑은 고딕"/>
+                        </a:rPr>
+                        <a:t>129</a:t>
+                      </a:r>
+                    </a:p>
+                  </a:txBody>
+                  <a:tcPr anchor="ctr" marL="27432" marR="27432" marT="18288" marB="18288">
+                    <a:lnL w="12700" cap="flat">
+                      <a:solidFill>
+                        <a:srgbClr val="000000"/>
+                      </a:solidFill>
+                    </a:lnL>
+                    <a:lnR w="12700" cap="flat">
+                      <a:solidFill>
+                        <a:srgbClr val="000000"/>
+                      </a:solidFill>
+                    </a:lnR>
+                    <a:lnT w="12700" cap="flat">
+                      <a:solidFill>
+                        <a:srgbClr val="000000"/>
+                      </a:solidFill>
+                    </a:lnT>
+                    <a:lnB w="12700" cap="flat">
+                      <a:solidFill>
+                        <a:srgbClr val="000000"/>
+                      </a:solidFill>
+                    </a:lnB>
+                    <a:solidFill>
+                      <a:srgbClr val="FFFFFF"/>
+                    </a:solidFill>
+                  </a:tcPr>
+                </a:tc>
+                <a:tc>
+                  <a:txBody>
+                    <a:bodyPr wrap="square"/>
+                    <a:lstStyle/>
+                    <a:p>
+                      <a:pPr algn="ctr"/>
+                      <a:r>
+                        <a:rPr sz="900" b="1">
+                          <a:solidFill>
+                            <a:srgbClr val="000000"/>
+                          </a:solidFill>
+                          <a:latin typeface="맑은 고딕"/>
+                        </a:rPr>
+                        <a:t>551</a:t>
+                      </a:r>
+                    </a:p>
+                  </a:txBody>
+                  <a:tcPr anchor="ctr" marL="27432" marR="27432" marT="18288" marB="18288">
+                    <a:lnL w="12700" cap="flat">
+                      <a:solidFill>
+                        <a:srgbClr val="000000"/>
+                      </a:solidFill>
+                    </a:lnL>
+                    <a:lnR w="12700" cap="flat">
+                      <a:solidFill>
+                        <a:srgbClr val="000000"/>
+                      </a:solidFill>
+                    </a:lnR>
+                    <a:lnT w="12700" cap="flat">
+                      <a:solidFill>
+                        <a:srgbClr val="000000"/>
+                      </a:solidFill>
+                    </a:lnT>
+                    <a:lnB w="12700" cap="flat">
+                      <a:solidFill>
+                        <a:srgbClr val="000000"/>
+                      </a:solidFill>
+                    </a:lnB>
+                    <a:solidFill>
+                      <a:srgbClr val="FFFFFF"/>
+                    </a:solidFill>
+                  </a:tcPr>
+                </a:tc>
+              </a:tr>
+            </a:tbl>
+          </a:graphicData>
+        </a:graphic>
+      </p:graphicFrame>
+      <p:sp>
+        <p:nvSpPr>
+          <p:cNvPr id="9" name="Rectangle 8"/>
+          <p:cNvSpPr/>
+          <p:nvPr/>
+        </p:nvSpPr>
+        <p:spPr>
+          <a:xfrm>
+            <a:off x="384048" y="4160520"/>
+            <a:ext cx="9107424" cy="292608"/>
+          </a:xfrm>
+          <a:prstGeom prst="rect">
+            <a:avLst/>
+          </a:prstGeom>
+          <a:solidFill>
+            <a:srgbClr val="17365D"/>
+          </a:solidFill>
+          <a:ln>
+            <a:noFill/>
+          </a:ln>
+          <a:effectLst/>
+        </p:spPr>
+        <p:txBody>
+          <a:bodyPr rtlCol="0" anchor="ctr" wrap="square" lIns="73152" tIns="0" bIns="0"/>
+          <a:lstStyle/>
+          <a:p>
+            <a:pPr algn="l"/>
+            <a:r>
+              <a:rPr sz="1100" b="1">
+                <a:solidFill>
+                  <a:srgbClr val="FFFFFF"/>
+                </a:solidFill>
+                <a:latin typeface="맑은 고딕"/>
+              </a:rPr>
+              <a:t>▣ 평균 편차 비교</a:t>
+            </a:r>
+          </a:p>
+        </p:txBody>
+      </p:sp>
+      <p:sp>
+        <p:nvSpPr>
+          <p:cNvPr id="10" name="TextBox 9"/>
+          <p:cNvSpPr txBox="1"/>
+          <p:nvPr/>
+        </p:nvSpPr>
+        <p:spPr>
+          <a:xfrm>
+            <a:off x="640080" y="4480560"/>
+            <a:ext cx="1554480" cy="457200"/>
+          </a:xfrm>
+          <a:prstGeom prst="rect">
+            <a:avLst/>
+          </a:prstGeom>
+          <a:noFill/>
+        </p:spPr>
+        <p:txBody>
+          <a:bodyPr wrap="square">
+            <a:spAutoFit/>
+          </a:bodyPr>
+          <a:lstStyle/>
+          <a:p>
+            <a:r>
+              <a:rPr sz="1000">
+                <a:solidFill>
+                  <a:srgbClr val="000000"/>
+                </a:solidFill>
+                <a:latin typeface="맑은 고딕"/>
+              </a:rPr>
+              <a:t>Manual</a:t>
+            </a:r>
+          </a:p>
+          <a:p>
+            <a:r>
+              <a:rPr sz="1000">
+                <a:solidFill>
+                  <a:srgbClr val="000000"/>
+                </a:solidFill>
+                <a:latin typeface="맑은 고딕"/>
+              </a:rPr>
+              <a:t>도포</a:t>
+            </a:r>
+          </a:p>
+        </p:txBody>
+      </p:sp>
+      <p:sp>
+        <p:nvSpPr>
+          <p:cNvPr id="11" name="Rectangle 10"/>
+          <p:cNvSpPr/>
+          <p:nvPr/>
+        </p:nvSpPr>
+        <p:spPr>
+          <a:xfrm>
+            <a:off x="2377440" y="4526280"/>
+            <a:ext cx="727610" cy="365760"/>
+          </a:xfrm>
+          <a:prstGeom prst="rect">
+            <a:avLst/>
+          </a:prstGeom>
+          <a:solidFill>
+            <a:srgbClr val="0070C0"/>
+          </a:solidFill>
+          <a:ln>
+            <a:noFill/>
+          </a:ln>
+          <a:effectLst/>
+        </p:spPr>
+        <p:txBody>
+          <a:bodyPr rtlCol="0" anchor="ctr"/>
+          <a:lstStyle/>
+          <a:p>
+            <a:pPr algn="ctr"/>
+          </a:p>
+        </p:txBody>
+      </p:sp>
+      <p:sp>
+        <p:nvSpPr>
+          <p:cNvPr id="12" name="TextBox 11"/>
+          <p:cNvSpPr txBox="1"/>
+          <p:nvPr/>
+        </p:nvSpPr>
+        <p:spPr>
+          <a:xfrm>
+            <a:off x="3196490" y="4526280"/>
+            <a:ext cx="1188720" cy="365760"/>
+          </a:xfrm>
+          <a:prstGeom prst="rect">
+            <a:avLst/>
+          </a:prstGeom>
+          <a:noFill/>
+        </p:spPr>
+        <p:txBody>
+          <a:bodyPr wrap="square">
+            <a:spAutoFit/>
+          </a:bodyPr>
+          <a:lstStyle/>
+          <a:p>
+            <a:r>
+              <a:rPr sz="1000">
+                <a:solidFill>
+                  <a:srgbClr val="0070C0"/>
+                </a:solidFill>
+                <a:latin typeface="맑은 고딕"/>
+              </a:rPr>
+              <a:t>58.7um</a:t>
+            </a:r>
+          </a:p>
+        </p:txBody>
+      </p:sp>
+      <p:sp>
+        <p:nvSpPr>
+          <p:cNvPr id="13" name="TextBox 12"/>
+          <p:cNvSpPr txBox="1"/>
+          <p:nvPr/>
+        </p:nvSpPr>
+        <p:spPr>
+          <a:xfrm>
+            <a:off x="640080" y="5120640"/>
+            <a:ext cx="1554480" cy="457200"/>
+          </a:xfrm>
+          <a:prstGeom prst="rect">
+            <a:avLst/>
+          </a:prstGeom>
+          <a:noFill/>
+        </p:spPr>
+        <p:txBody>
+          <a:bodyPr wrap="square">
+            <a:spAutoFit/>
+          </a:bodyPr>
+          <a:lstStyle/>
+          <a:p>
+            <a:r>
+              <a:rPr sz="1000">
+                <a:solidFill>
+                  <a:srgbClr val="000000"/>
+                </a:solidFill>
+                <a:latin typeface="맑은 고딕"/>
+              </a:rPr>
+              <a:t>설비</a:t>
+            </a:r>
+          </a:p>
+          <a:p>
+            <a:r>
+              <a:rPr sz="1000">
+                <a:solidFill>
+                  <a:srgbClr val="000000"/>
+                </a:solidFill>
+                <a:latin typeface="맑은 고딕"/>
+              </a:rPr>
+              <a:t>자동도포</a:t>
+            </a:r>
+          </a:p>
+        </p:txBody>
+      </p:sp>
+      <p:sp>
+        <p:nvSpPr>
+          <p:cNvPr id="14" name="Rectangle 13"/>
+          <p:cNvSpPr/>
+          <p:nvPr/>
+        </p:nvSpPr>
+        <p:spPr>
+          <a:xfrm>
+            <a:off x="2377440" y="5166360"/>
+            <a:ext cx="5943600" cy="365760"/>
+          </a:xfrm>
+          <a:prstGeom prst="rect">
+            <a:avLst/>
+          </a:prstGeom>
+          <a:solidFill>
+            <a:srgbClr val="C0504D"/>
+          </a:solidFill>
+          <a:ln>
+            <a:noFill/>
+          </a:ln>
+          <a:effectLst/>
+        </p:spPr>
+        <p:txBody>
+          <a:bodyPr rtlCol="0" anchor="ctr"/>
+          <a:lstStyle/>
+          <a:p>
+            <a:pPr algn="ctr"/>
+          </a:p>
+        </p:txBody>
+      </p:sp>
+      <p:sp>
+        <p:nvSpPr>
+          <p:cNvPr id="15" name="TextBox 14"/>
+          <p:cNvSpPr txBox="1"/>
+          <p:nvPr/>
+        </p:nvSpPr>
+        <p:spPr>
+          <a:xfrm>
+            <a:off x="8412480" y="5166360"/>
+            <a:ext cx="1188720" cy="365760"/>
+          </a:xfrm>
+          <a:prstGeom prst="rect">
+            <a:avLst/>
+          </a:prstGeom>
+          <a:noFill/>
+        </p:spPr>
+        <p:txBody>
+          <a:bodyPr wrap="square">
+            <a:spAutoFit/>
+          </a:bodyPr>
+          <a:lstStyle/>
+          <a:p>
+            <a:r>
+              <a:rPr sz="1000">
+                <a:solidFill>
+                  <a:srgbClr val="C0504D"/>
+                </a:solidFill>
+                <a:latin typeface="맑은 고딕"/>
+              </a:rPr>
+              <a:t>479.5um</a:t>
+            </a:r>
+          </a:p>
+        </p:txBody>
+      </p:sp>
+      <p:sp>
+        <p:nvSpPr>
+          <p:cNvPr id="16" name="Rectangle 15"/>
+          <p:cNvSpPr/>
+          <p:nvPr/>
+        </p:nvSpPr>
+        <p:spPr>
+          <a:xfrm>
+            <a:off x="384048" y="5623560"/>
+            <a:ext cx="9107424" cy="292608"/>
+          </a:xfrm>
+          <a:prstGeom prst="rect">
+            <a:avLst/>
+          </a:prstGeom>
+          <a:solidFill>
+            <a:srgbClr val="17365D"/>
+          </a:solidFill>
+          <a:ln>
+            <a:noFill/>
+          </a:ln>
+          <a:effectLst/>
+        </p:spPr>
+        <p:txBody>
+          <a:bodyPr rtlCol="0" anchor="ctr" wrap="square" lIns="73152" tIns="0" bIns="0"/>
+          <a:lstStyle/>
+          <a:p>
+            <a:pPr algn="l"/>
+            <a:r>
+              <a:rPr sz="1100" b="1">
+                <a:solidFill>
+                  <a:srgbClr val="FFFFFF"/>
+                </a:solidFill>
+                <a:latin typeface="맑은 고딕"/>
+              </a:rPr>
+              <a:t>▣ 결론</a:t>
+            </a:r>
+          </a:p>
+        </p:txBody>
+      </p:sp>
+      <p:sp>
+        <p:nvSpPr>
+          <p:cNvPr id="17" name="TextBox 16"/>
+          <p:cNvSpPr txBox="1"/>
+          <p:nvPr/>
+        </p:nvSpPr>
+        <p:spPr>
+          <a:xfrm>
+            <a:off x="457200" y="5943600"/>
+            <a:ext cx="8961120" cy="548640"/>
+          </a:xfrm>
+          <a:prstGeom prst="rect">
+            <a:avLst/>
+          </a:prstGeom>
+          <a:noFill/>
+        </p:spPr>
+        <p:txBody>
+          <a:bodyPr wrap="square">
+            <a:spAutoFit/>
+          </a:bodyPr>
+          <a:lstStyle/>
+          <a:p>
+            <a:r>
+              <a:rPr sz="950">
+                <a:solidFill>
+                  <a:srgbClr val="000000"/>
+                </a:solidFill>
+                <a:latin typeface="맑은 고딕"/>
+              </a:rPr>
+              <a:t>■ Manual 도포 평균 편차 58.7um vs 설비 자동 도포 평균 편차 479.5um — 설비 자동 도포가 약 8.2배 더 큰 편차 확인</a:t>
+            </a:r>
+          </a:p>
+          <a:p>
+            <a:r>
+              <a:rPr sz="950">
+                <a:solidFill>
+                  <a:srgbClr val="000000"/>
+                </a:solidFill>
+                <a:latin typeface="맑은 고딕"/>
+              </a:rPr>
+              <a:t>■ Manual 도포가 좌/우 형상 균일도 측면에서 더 안정적임을 확인, NTC 부위는 Manual 도포 적용 권장</a:t>
+            </a:r>
+          </a:p>
+        </p:txBody>
+      </p:sp>
+    </p:spTree>
+  </p:cSld>
+  <p:clrMapOvr>
+    <a:masterClrMapping/>
+  </p:clrMapOvr>
+</p:sld>
+</file>
+
+<file path=ppt/slides/slide13.xml><?xml version="1.0" encoding="utf-8"?>
+<p:sld xmlns:a="http://schemas.openxmlformats.org/drawingml/2006/main" xmlns:p="http://schemas.openxmlformats.org/presentationml/2006/main" xmlns:r="http://schemas.openxmlformats.org/officeDocument/2006/relationships">
+  <p:cSld>
+    <p:bg>
+      <p:bgPr>
+        <a:solidFill>
+          <a:srgbClr val="FFFFFF"/>
+        </a:solidFill>
+        <a:effectLst/>
+      </p:bgPr>
+    </p:bg>
+    <p:spTree>
+      <p:nvGrpSpPr>
+        <p:cNvPr id="1" name=""/>
+        <p:cNvGrpSpPr/>
+        <p:nvPr/>
+      </p:nvGrpSpPr>
+      <p:grpSpPr/>
+      <p:sp>
+        <p:nvSpPr>
+          <p:cNvPr id="2" name="TextBox 1"/>
+          <p:cNvSpPr txBox="1"/>
+          <p:nvPr/>
+        </p:nvSpPr>
+        <p:spPr>
+          <a:xfrm>
+            <a:off x="2697480" y="164592"/>
+            <a:ext cx="6766560" cy="502920"/>
+          </a:xfrm>
+          <a:prstGeom prst="rect">
+            <a:avLst/>
+          </a:prstGeom>
+          <a:noFill/>
+        </p:spPr>
+        <p:txBody>
+          <a:bodyPr wrap="square" anchor="ctr">
+            <a:spAutoFit/>
+          </a:bodyPr>
+          <a:lstStyle/>
+          <a:p>
+            <a:pPr algn="l"/>
+            <a:r>
+              <a:rPr sz="1300" b="1">
+                <a:solidFill>
+                  <a:srgbClr val="000000"/>
+                </a:solidFill>
+                <a:latin typeface="맑은 고딕"/>
+              </a:rPr>
+              <a:t>●  </a:t>
+            </a:r>
+            <a:r>
+              <a:rPr sz="1700" b="1">
+                <a:solidFill>
+                  <a:srgbClr val="000000"/>
+                </a:solidFill>
+                <a:latin typeface="맑은 고딕"/>
+              </a:rPr>
               <a:t>종합 결과 및 결론</a:t>
             </a:r>
           </a:p>

--- a/docs/SX3K-코팅섹션-분석결과.pptx
+++ b/docs/SX3K-코팅섹션-분석결과.pptx
@@ -3356,7 +3356,7 @@
         </p:nvGraphicFramePr>
         <p:xfrm>
           <a:off x="384048" y="1234440"/>
-          <a:ext cx="5212080" cy="1920240"/>
+          <a:ext cx="5212080" cy="1600200"/>
         </p:xfrm>
         <a:graphic>
           <a:graphicData uri="http://schemas.openxmlformats.org/drawingml/2006/table">
@@ -3645,7 +3645,7 @@
                           </a:solidFill>
                           <a:latin typeface="맑은 고딕"/>
                         </a:rPr>
-                        <a:t>689</a:t>
+                        <a:t>1303</a:t>
                       </a:r>
                     </a:p>
                   </a:txBody>
@@ -3688,7 +3688,7 @@
                           </a:solidFill>
                           <a:latin typeface="맑은 고딕"/>
                         </a:rPr>
-                        <a:t>748</a:t>
+                        <a:t>1191</a:t>
                       </a:r>
                     </a:p>
                   </a:txBody>
@@ -3731,7 +3731,7 @@
                           </a:solidFill>
                           <a:latin typeface="맑은 고딕"/>
                         </a:rPr>
-                        <a:t>986</a:t>
+                        <a:t>1145</a:t>
                       </a:r>
                     </a:p>
                   </a:txBody>
@@ -3774,7 +3774,7 @@
                           </a:solidFill>
                           <a:latin typeface="맑은 고딕"/>
                         </a:rPr>
-                        <a:t>954</a:t>
+                        <a:t>1119</a:t>
                       </a:r>
                     </a:p>
                   </a:txBody>
@@ -3862,7 +3862,7 @@
                           </a:solidFill>
                           <a:latin typeface="맑은 고딕"/>
                         </a:rPr>
-                        <a:t>1303</a:t>
+                        <a:t>1198</a:t>
                       </a:r>
                     </a:p>
                   </a:txBody>
@@ -3905,6 +3905,49 @@
                           </a:solidFill>
                           <a:latin typeface="맑은 고딕"/>
                         </a:rPr>
+                        <a:t>1198</a:t>
+                      </a:r>
+                    </a:p>
+                  </a:txBody>
+                  <a:tcPr anchor="ctr" marL="27432" marR="27432" marT="18288" marB="18288">
+                    <a:lnL w="12700" cap="flat">
+                      <a:solidFill>
+                        <a:srgbClr val="000000"/>
+                      </a:solidFill>
+                    </a:lnL>
+                    <a:lnR w="12700" cap="flat">
+                      <a:solidFill>
+                        <a:srgbClr val="000000"/>
+                      </a:solidFill>
+                    </a:lnR>
+                    <a:lnT w="12700" cap="flat">
+                      <a:solidFill>
+                        <a:srgbClr val="000000"/>
+                      </a:solidFill>
+                    </a:lnT>
+                    <a:lnB w="12700" cap="flat">
+                      <a:solidFill>
+                        <a:srgbClr val="000000"/>
+                      </a:solidFill>
+                    </a:lnB>
+                    <a:solidFill>
+                      <a:srgbClr val="FFFFFF"/>
+                    </a:solidFill>
+                  </a:tcPr>
+                </a:tc>
+                <a:tc>
+                  <a:txBody>
+                    <a:bodyPr wrap="square"/>
+                    <a:lstStyle/>
+                    <a:p>
+                      <a:pPr algn="ctr"/>
+                      <a:r>
+                        <a:rPr sz="800" b="0">
+                          <a:solidFill>
+                            <a:srgbClr val="000000"/>
+                          </a:solidFill>
+                          <a:latin typeface="맑은 고딕"/>
+                        </a:rPr>
                         <a:t>1191</a:t>
                       </a:r>
                     </a:p>
@@ -3948,50 +3991,7 @@
                           </a:solidFill>
                           <a:latin typeface="맑은 고딕"/>
                         </a:rPr>
-                        <a:t>1145</a:t>
-                      </a:r>
-                    </a:p>
-                  </a:txBody>
-                  <a:tcPr anchor="ctr" marL="27432" marR="27432" marT="18288" marB="18288">
-                    <a:lnL w="12700" cap="flat">
-                      <a:solidFill>
-                        <a:srgbClr val="000000"/>
-                      </a:solidFill>
-                    </a:lnL>
-                    <a:lnR w="12700" cap="flat">
-                      <a:solidFill>
-                        <a:srgbClr val="000000"/>
-                      </a:solidFill>
-                    </a:lnR>
-                    <a:lnT w="12700" cap="flat">
-                      <a:solidFill>
-                        <a:srgbClr val="000000"/>
-                      </a:solidFill>
-                    </a:lnT>
-                    <a:lnB w="12700" cap="flat">
-                      <a:solidFill>
-                        <a:srgbClr val="000000"/>
-                      </a:solidFill>
-                    </a:lnB>
-                    <a:solidFill>
-                      <a:srgbClr val="FFFFFF"/>
-                    </a:solidFill>
-                  </a:tcPr>
-                </a:tc>
-                <a:tc>
-                  <a:txBody>
-                    <a:bodyPr wrap="square"/>
-                    <a:lstStyle/>
-                    <a:p>
-                      <a:pPr algn="ctr"/>
-                      <a:r>
-                        <a:rPr sz="800" b="0">
-                          <a:solidFill>
-                            <a:srgbClr val="000000"/>
-                          </a:solidFill>
-                          <a:latin typeface="맑은 고딕"/>
-                        </a:rPr>
-                        <a:t>1119</a:t>
+                        <a:t>1204</a:t>
                       </a:r>
                     </a:p>
                   </a:txBody>
@@ -4079,7 +4079,7 @@
                           </a:solidFill>
                           <a:latin typeface="맑은 고딕"/>
                         </a:rPr>
-                        <a:t>1198</a:t>
+                        <a:t>1063</a:t>
                       </a:r>
                     </a:p>
                   </a:txBody>
@@ -4122,7 +4122,7 @@
                           </a:solidFill>
                           <a:latin typeface="맑은 고딕"/>
                         </a:rPr>
-                        <a:t>1198</a:t>
+                        <a:t>1171</a:t>
                       </a:r>
                     </a:p>
                   </a:txBody>
@@ -4165,7 +4165,7 @@
                           </a:solidFill>
                           <a:latin typeface="맑은 고딕"/>
                         </a:rPr>
-                        <a:t>1191</a:t>
+                        <a:t>1237</a:t>
                       </a:r>
                     </a:p>
                   </a:txBody>
@@ -4208,7 +4208,7 @@
                           </a:solidFill>
                           <a:latin typeface="맑은 고딕"/>
                         </a:rPr>
-                        <a:t>1204</a:t>
+                        <a:t>1249</a:t>
                       </a:r>
                     </a:p>
                   </a:txBody>
@@ -4254,223 +4254,6 @@
                           <a:latin typeface="맑은 고딕"/>
                         </a:rPr>
                         <a:t>#4</a:t>
-                      </a:r>
-                    </a:p>
-                  </a:txBody>
-                  <a:tcPr anchor="ctr" marL="27432" marR="27432" marT="18288" marB="18288">
-                    <a:lnL w="12700" cap="flat">
-                      <a:solidFill>
-                        <a:srgbClr val="000000"/>
-                      </a:solidFill>
-                    </a:lnL>
-                    <a:lnR w="12700" cap="flat">
-                      <a:solidFill>
-                        <a:srgbClr val="000000"/>
-                      </a:solidFill>
-                    </a:lnR>
-                    <a:lnT w="12700" cap="flat">
-                      <a:solidFill>
-                        <a:srgbClr val="000000"/>
-                      </a:solidFill>
-                    </a:lnT>
-                    <a:lnB w="12700" cap="flat">
-                      <a:solidFill>
-                        <a:srgbClr val="000000"/>
-                      </a:solidFill>
-                    </a:lnB>
-                    <a:solidFill>
-                      <a:srgbClr val="FFFFFF"/>
-                    </a:solidFill>
-                  </a:tcPr>
-                </a:tc>
-                <a:tc>
-                  <a:txBody>
-                    <a:bodyPr wrap="square"/>
-                    <a:lstStyle/>
-                    <a:p>
-                      <a:pPr algn="ctr"/>
-                      <a:r>
-                        <a:rPr sz="800" b="0">
-                          <a:solidFill>
-                            <a:srgbClr val="000000"/>
-                          </a:solidFill>
-                          <a:latin typeface="맑은 고딕"/>
-                        </a:rPr>
-                        <a:t>1063</a:t>
-                      </a:r>
-                    </a:p>
-                  </a:txBody>
-                  <a:tcPr anchor="ctr" marL="27432" marR="27432" marT="18288" marB="18288">
-                    <a:lnL w="12700" cap="flat">
-                      <a:solidFill>
-                        <a:srgbClr val="000000"/>
-                      </a:solidFill>
-                    </a:lnL>
-                    <a:lnR w="12700" cap="flat">
-                      <a:solidFill>
-                        <a:srgbClr val="000000"/>
-                      </a:solidFill>
-                    </a:lnR>
-                    <a:lnT w="12700" cap="flat">
-                      <a:solidFill>
-                        <a:srgbClr val="000000"/>
-                      </a:solidFill>
-                    </a:lnT>
-                    <a:lnB w="12700" cap="flat">
-                      <a:solidFill>
-                        <a:srgbClr val="000000"/>
-                      </a:solidFill>
-                    </a:lnB>
-                    <a:solidFill>
-                      <a:srgbClr val="FFFFFF"/>
-                    </a:solidFill>
-                  </a:tcPr>
-                </a:tc>
-                <a:tc>
-                  <a:txBody>
-                    <a:bodyPr wrap="square"/>
-                    <a:lstStyle/>
-                    <a:p>
-                      <a:pPr algn="ctr"/>
-                      <a:r>
-                        <a:rPr sz="800" b="0">
-                          <a:solidFill>
-                            <a:srgbClr val="000000"/>
-                          </a:solidFill>
-                          <a:latin typeface="맑은 고딕"/>
-                        </a:rPr>
-                        <a:t>1171</a:t>
-                      </a:r>
-                    </a:p>
-                  </a:txBody>
-                  <a:tcPr anchor="ctr" marL="27432" marR="27432" marT="18288" marB="18288">
-                    <a:lnL w="12700" cap="flat">
-                      <a:solidFill>
-                        <a:srgbClr val="000000"/>
-                      </a:solidFill>
-                    </a:lnL>
-                    <a:lnR w="12700" cap="flat">
-                      <a:solidFill>
-                        <a:srgbClr val="000000"/>
-                      </a:solidFill>
-                    </a:lnR>
-                    <a:lnT w="12700" cap="flat">
-                      <a:solidFill>
-                        <a:srgbClr val="000000"/>
-                      </a:solidFill>
-                    </a:lnT>
-                    <a:lnB w="12700" cap="flat">
-                      <a:solidFill>
-                        <a:srgbClr val="000000"/>
-                      </a:solidFill>
-                    </a:lnB>
-                    <a:solidFill>
-                      <a:srgbClr val="FFFFFF"/>
-                    </a:solidFill>
-                  </a:tcPr>
-                </a:tc>
-                <a:tc>
-                  <a:txBody>
-                    <a:bodyPr wrap="square"/>
-                    <a:lstStyle/>
-                    <a:p>
-                      <a:pPr algn="ctr"/>
-                      <a:r>
-                        <a:rPr sz="800" b="0">
-                          <a:solidFill>
-                            <a:srgbClr val="000000"/>
-                          </a:solidFill>
-                          <a:latin typeface="맑은 고딕"/>
-                        </a:rPr>
-                        <a:t>1237</a:t>
-                      </a:r>
-                    </a:p>
-                  </a:txBody>
-                  <a:tcPr anchor="ctr" marL="27432" marR="27432" marT="18288" marB="18288">
-                    <a:lnL w="12700" cap="flat">
-                      <a:solidFill>
-                        <a:srgbClr val="000000"/>
-                      </a:solidFill>
-                    </a:lnL>
-                    <a:lnR w="12700" cap="flat">
-                      <a:solidFill>
-                        <a:srgbClr val="000000"/>
-                      </a:solidFill>
-                    </a:lnR>
-                    <a:lnT w="12700" cap="flat">
-                      <a:solidFill>
-                        <a:srgbClr val="000000"/>
-                      </a:solidFill>
-                    </a:lnT>
-                    <a:lnB w="12700" cap="flat">
-                      <a:solidFill>
-                        <a:srgbClr val="000000"/>
-                      </a:solidFill>
-                    </a:lnB>
-                    <a:solidFill>
-                      <a:srgbClr val="FFFFFF"/>
-                    </a:solidFill>
-                  </a:tcPr>
-                </a:tc>
-                <a:tc>
-                  <a:txBody>
-                    <a:bodyPr wrap="square"/>
-                    <a:lstStyle/>
-                    <a:p>
-                      <a:pPr algn="ctr"/>
-                      <a:r>
-                        <a:rPr sz="800" b="0">
-                          <a:solidFill>
-                            <a:srgbClr val="000000"/>
-                          </a:solidFill>
-                          <a:latin typeface="맑은 고딕"/>
-                        </a:rPr>
-                        <a:t>1249</a:t>
-                      </a:r>
-                    </a:p>
-                  </a:txBody>
-                  <a:tcPr anchor="ctr" marL="27432" marR="27432" marT="18288" marB="18288">
-                    <a:lnL w="12700" cap="flat">
-                      <a:solidFill>
-                        <a:srgbClr val="000000"/>
-                      </a:solidFill>
-                    </a:lnL>
-                    <a:lnR w="12700" cap="flat">
-                      <a:solidFill>
-                        <a:srgbClr val="000000"/>
-                      </a:solidFill>
-                    </a:lnR>
-                    <a:lnT w="12700" cap="flat">
-                      <a:solidFill>
-                        <a:srgbClr val="000000"/>
-                      </a:solidFill>
-                    </a:lnT>
-                    <a:lnB w="12700" cap="flat">
-                      <a:solidFill>
-                        <a:srgbClr val="000000"/>
-                      </a:solidFill>
-                    </a:lnB>
-                    <a:solidFill>
-                      <a:srgbClr val="FFFFFF"/>
-                    </a:solidFill>
-                  </a:tcPr>
-                </a:tc>
-              </a:tr>
-              <a:tr h="320040">
-                <a:tc>
-                  <a:txBody>
-                    <a:bodyPr wrap="square"/>
-                    <a:lstStyle/>
-                    <a:p>
-                      <a:pPr algn="ctr"/>
-                      <a:r>
-                        <a:rPr sz="800" b="1">
-                          <a:solidFill>
-                            <a:srgbClr val="000000"/>
-                          </a:solidFill>
-                          <a:latin typeface="맑은 고딕"/>
-                        </a:rPr>
-                        <a:t>#5</a:t>
                       </a:r>
                     </a:p>
                   </a:txBody>
@@ -4685,8 +4468,8 @@
         </p:nvSpPr>
         <p:spPr>
           <a:xfrm>
-            <a:off x="384048" y="3246120"/>
-            <a:ext cx="5212080" cy="274320"/>
+            <a:off x="384048" y="2926080"/>
+            <a:ext cx="5212080" cy="457200"/>
           </a:xfrm>
           <a:prstGeom prst="rect">
             <a:avLst/>
@@ -4700,13 +4483,24 @@
           <a:lstStyle/>
           <a:p>
             <a:r>
-              <a:rPr sz="900">
+              <a:rPr sz="850">
                 <a:solidFill>
-                  <a:srgbClr val="000000"/>
+                  <a:srgbClr val="909090"/>
                 </a:solidFill>
                 <a:latin typeface="맑은 고딕"/>
               </a:rPr>
-              <a:t>■ 전체 20개 포인트: Min 536 / Max 1321 / AVG 1051.2um</a:t>
+              <a:t>■ 전체 16개 포인트: Min 536 / Max 1321 / AVG 1102.9um</a:t>
+            </a:r>
+          </a:p>
+          <a:p>
+            <a:r>
+              <a:rPr sz="850">
+                <a:solidFill>
+                  <a:srgbClr val="909090"/>
+                </a:solidFill>
+                <a:latin typeface="맑은 고딕"/>
+              </a:rPr>
+              <a:t>■ 기존 샘플 #1(689/748/986/954)은 편차 과다로 분석 대상에서 제외</a:t>
             </a:r>
           </a:p>
         </p:txBody>
@@ -7194,7 +6988,7 @@
         <p:spPr>
           <a:xfrm>
             <a:off x="384048" y="914400"/>
-            <a:ext cx="9107424" cy="292608"/>
+            <a:ext cx="5212080" cy="292608"/>
           </a:xfrm>
           <a:prstGeom prst="rect">
             <a:avLst/>
@@ -7232,8 +7026,8 @@
         </p:nvSpPr>
         <p:spPr>
           <a:xfrm>
-            <a:off x="457200" y="1234440"/>
-            <a:ext cx="8961120" cy="502920"/>
+            <a:off x="384048" y="1234440"/>
+            <a:ext cx="5212080" cy="457200"/>
           </a:xfrm>
           <a:prstGeom prst="rect">
             <a:avLst/>
@@ -7247,24 +7041,24 @@
           <a:lstStyle/>
           <a:p>
             <a:r>
-              <a:rPr sz="1000">
+              <a:rPr sz="850">
                 <a:solidFill>
                   <a:srgbClr val="000000"/>
                 </a:solidFill>
                 <a:latin typeface="맑은 고딕"/>
               </a:rPr>
-              <a:t>NTC 부위는 도포 방식에 따라 좌/우 형상 편차가 발생할 수 있어, Manual 도포와 설비</a:t>
+              <a:t>NTC는 도포 방식에 따라 좌/우 형상 편차가 발생할 수 있어, Manual 도포와</a:t>
             </a:r>
           </a:p>
           <a:p>
             <a:r>
-              <a:rPr sz="1000">
+              <a:rPr sz="850">
                 <a:solidFill>
                   <a:srgbClr val="000000"/>
                 </a:solidFill>
                 <a:latin typeface="맑은 고딕"/>
               </a:rPr>
-              <a:t>자동 도포의 단면 형상 균일도를 비교 검토함</a:t>
+              <a:t>설비 자동 도포의 단면 형상 균일도를 비교 검토함</a:t>
             </a:r>
           </a:p>
         </p:txBody>
@@ -7277,8 +7071,8 @@
         </p:nvSpPr>
         <p:spPr>
           <a:xfrm>
-            <a:off x="384048" y="1874519"/>
-            <a:ext cx="9107424" cy="292608"/>
+            <a:off x="384048" y="1783080"/>
+            <a:ext cx="5212080" cy="292608"/>
           </a:xfrm>
           <a:prstGeom prst="rect">
             <a:avLst/>
@@ -7317,8 +7111,8 @@
           <p:nvPr/>
         </p:nvGraphicFramePr>
         <p:xfrm>
-          <a:off x="457200" y="2194560"/>
-          <a:ext cx="9107424" cy="1920240"/>
+          <a:off x="384048" y="2103120"/>
+          <a:ext cx="5212080" cy="1536192"/>
         </p:xfrm>
         <a:graphic>
           <a:graphicData uri="http://schemas.openxmlformats.org/drawingml/2006/table">
@@ -7327,22 +7121,22 @@
                 <a:tableStyleId>{5C22544A-7EE6-4342-B048-85BDC9FD1C3A}</a:tableStyleId>
               </a:tblPr>
               <a:tblGrid>
-                <a:gridCol w="1280160"/>
                 <a:gridCol w="914400"/>
-                <a:gridCol w="1554480"/>
-                <a:gridCol w="1554480"/>
-                <a:gridCol w="1554480"/>
-                <a:gridCol w="2249424"/>
+                <a:gridCol w="457200"/>
+                <a:gridCol w="960120"/>
+                <a:gridCol w="960120"/>
+                <a:gridCol w="960120"/>
+                <a:gridCol w="960120"/>
               </a:tblGrid>
-              <a:tr h="320040">
-                <a:tc>
-                  <a:txBody>
-                    <a:bodyPr wrap="square"/>
-                    <a:lstStyle/>
-                    <a:p>
-                      <a:pPr algn="ctr"/>
-                      <a:r>
-                        <a:rPr sz="900" b="1">
+              <a:tr h="256032">
+                <a:tc>
+                  <a:txBody>
+                    <a:bodyPr wrap="square"/>
+                    <a:lstStyle/>
+                    <a:p>
+                      <a:pPr algn="ctr"/>
+                      <a:r>
+                        <a:rPr sz="800" b="1">
                           <a:solidFill>
                             <a:srgbClr val="FFFFFF"/>
                           </a:solidFill>
@@ -7385,13 +7179,13 @@
                     <a:p>
                       <a:pPr algn="ctr"/>
                       <a:r>
-                        <a:rPr sz="900" b="1">
+                        <a:rPr sz="800" b="1">
                           <a:solidFill>
                             <a:srgbClr val="FFFFFF"/>
                           </a:solidFill>
                           <a:latin typeface="맑은 고딕"/>
                         </a:rPr>
-                        <a:t>샘플</a:t>
+                        <a:t>#</a:t>
                       </a:r>
                     </a:p>
                   </a:txBody>
@@ -7428,13 +7222,13 @@
                     <a:p>
                       <a:pPr algn="ctr"/>
                       <a:r>
-                        <a:rPr sz="900" b="1">
+                        <a:rPr sz="800" b="1">
                           <a:solidFill>
                             <a:srgbClr val="FFFFFF"/>
                           </a:solidFill>
                           <a:latin typeface="맑은 고딕"/>
                         </a:rPr>
-                        <a:t>측정1(좌)</a:t>
+                        <a:t>측정1</a:t>
                       </a:r>
                     </a:p>
                   </a:txBody>
@@ -7471,13 +7265,13 @@
                     <a:p>
                       <a:pPr algn="ctr"/>
                       <a:r>
-                        <a:rPr sz="900" b="1">
+                        <a:rPr sz="800" b="1">
                           <a:solidFill>
                             <a:srgbClr val="FFFFFF"/>
                           </a:solidFill>
                           <a:latin typeface="맑은 고딕"/>
                         </a:rPr>
-                        <a:t>측정2(상단)</a:t>
+                        <a:t>측정2</a:t>
                       </a:r>
                     </a:p>
                   </a:txBody>
@@ -7514,13 +7308,13 @@
                     <a:p>
                       <a:pPr algn="ctr"/>
                       <a:r>
-                        <a:rPr sz="900" b="1">
+                        <a:rPr sz="800" b="1">
                           <a:solidFill>
                             <a:srgbClr val="FFFFFF"/>
                           </a:solidFill>
                           <a:latin typeface="맑은 고딕"/>
                         </a:rPr>
-                        <a:t>측정3(우)</a:t>
+                        <a:t>측정3</a:t>
                       </a:r>
                     </a:p>
                   </a:txBody>
@@ -7557,13 +7351,13 @@
                     <a:p>
                       <a:pPr algn="ctr"/>
                       <a:r>
-                        <a:rPr sz="900" b="1">
+                        <a:rPr sz="800" b="1">
                           <a:solidFill>
                             <a:srgbClr val="FFFFFF"/>
                           </a:solidFill>
                           <a:latin typeface="맑은 고딕"/>
                         </a:rPr>
-                        <a:t>편차(Max-Min)</a:t>
+                        <a:t>편차</a:t>
                       </a:r>
                     </a:p>
                   </a:txBody>
@@ -7594,21 +7388,21 @@
                   </a:tcPr>
                 </a:tc>
               </a:tr>
-              <a:tr h="320040">
-                <a:tc>
-                  <a:txBody>
-                    <a:bodyPr wrap="square"/>
-                    <a:lstStyle/>
-                    <a:p>
-                      <a:pPr algn="ctr"/>
-                      <a:r>
-                        <a:rPr sz="900" b="1">
-                          <a:solidFill>
-                            <a:srgbClr val="000000"/>
-                          </a:solidFill>
-                          <a:latin typeface="맑은 고딕"/>
-                        </a:rPr>
-                        <a:t>Manual 도포</a:t>
+              <a:tr h="256032">
+                <a:tc>
+                  <a:txBody>
+                    <a:bodyPr wrap="square"/>
+                    <a:lstStyle/>
+                    <a:p>
+                      <a:pPr algn="ctr"/>
+                      <a:r>
+                        <a:rPr sz="750" b="1">
+                          <a:solidFill>
+                            <a:srgbClr val="000000"/>
+                          </a:solidFill>
+                          <a:latin typeface="맑은 고딕"/>
+                        </a:rPr>
+                        <a:t>Manual</a:t>
                       </a:r>
                     </a:p>
                   </a:txBody>
@@ -7645,50 +7439,50 @@
                     <a:p>
                       <a:pPr algn="ctr"/>
                       <a:r>
-                        <a:rPr sz="900" b="0">
-                          <a:solidFill>
-                            <a:srgbClr val="000000"/>
-                          </a:solidFill>
-                          <a:latin typeface="맑은 고딕"/>
-                        </a:rPr>
-                        <a:t>#1</a:t>
-                      </a:r>
-                    </a:p>
-                  </a:txBody>
-                  <a:tcPr anchor="ctr" marL="27432" marR="27432" marT="18288" marB="18288">
-                    <a:lnL w="12700" cap="flat">
-                      <a:solidFill>
-                        <a:srgbClr val="000000"/>
-                      </a:solidFill>
-                    </a:lnL>
-                    <a:lnR w="12700" cap="flat">
-                      <a:solidFill>
-                        <a:srgbClr val="000000"/>
-                      </a:solidFill>
-                    </a:lnR>
-                    <a:lnT w="12700" cap="flat">
-                      <a:solidFill>
-                        <a:srgbClr val="000000"/>
-                      </a:solidFill>
-                    </a:lnT>
-                    <a:lnB w="12700" cap="flat">
-                      <a:solidFill>
-                        <a:srgbClr val="000000"/>
-                      </a:solidFill>
-                    </a:lnB>
-                    <a:solidFill>
-                      <a:srgbClr val="FFFFFF"/>
-                    </a:solidFill>
-                  </a:tcPr>
-                </a:tc>
-                <a:tc>
-                  <a:txBody>
-                    <a:bodyPr wrap="square"/>
-                    <a:lstStyle/>
-                    <a:p>
-                      <a:pPr algn="ctr"/>
-                      <a:r>
-                        <a:rPr sz="900" b="0">
+                        <a:rPr sz="750" b="0">
+                          <a:solidFill>
+                            <a:srgbClr val="000000"/>
+                          </a:solidFill>
+                          <a:latin typeface="맑은 고딕"/>
+                        </a:rPr>
+                        <a:t>1</a:t>
+                      </a:r>
+                    </a:p>
+                  </a:txBody>
+                  <a:tcPr anchor="ctr" marL="27432" marR="27432" marT="18288" marB="18288">
+                    <a:lnL w="12700" cap="flat">
+                      <a:solidFill>
+                        <a:srgbClr val="000000"/>
+                      </a:solidFill>
+                    </a:lnL>
+                    <a:lnR w="12700" cap="flat">
+                      <a:solidFill>
+                        <a:srgbClr val="000000"/>
+                      </a:solidFill>
+                    </a:lnR>
+                    <a:lnT w="12700" cap="flat">
+                      <a:solidFill>
+                        <a:srgbClr val="000000"/>
+                      </a:solidFill>
+                    </a:lnT>
+                    <a:lnB w="12700" cap="flat">
+                      <a:solidFill>
+                        <a:srgbClr val="000000"/>
+                      </a:solidFill>
+                    </a:lnB>
+                    <a:solidFill>
+                      <a:srgbClr val="FFFFFF"/>
+                    </a:solidFill>
+                  </a:tcPr>
+                </a:tc>
+                <a:tc>
+                  <a:txBody>
+                    <a:bodyPr wrap="square"/>
+                    <a:lstStyle/>
+                    <a:p>
+                      <a:pPr algn="ctr"/>
+                      <a:r>
+                        <a:rPr sz="750" b="0">
                           <a:solidFill>
                             <a:srgbClr val="000000"/>
                           </a:solidFill>
@@ -7731,7 +7525,7 @@
                     <a:p>
                       <a:pPr algn="ctr"/>
                       <a:r>
-                        <a:rPr sz="900" b="0">
+                        <a:rPr sz="750" b="0">
                           <a:solidFill>
                             <a:srgbClr val="000000"/>
                           </a:solidFill>
@@ -7774,7 +7568,7 @@
                     <a:p>
                       <a:pPr algn="ctr"/>
                       <a:r>
-                        <a:rPr sz="900" b="0">
+                        <a:rPr sz="750" b="0">
                           <a:solidFill>
                             <a:srgbClr val="000000"/>
                           </a:solidFill>
@@ -7817,7 +7611,7 @@
                     <a:p>
                       <a:pPr algn="ctr"/>
                       <a:r>
-                        <a:rPr sz="900" b="1">
+                        <a:rPr sz="750" b="1">
                           <a:solidFill>
                             <a:srgbClr val="000000"/>
                           </a:solidFill>
@@ -7854,15 +7648,15 @@
                   </a:tcPr>
                 </a:tc>
               </a:tr>
-              <a:tr h="320040">
-                <a:tc>
-                  <a:txBody>
-                    <a:bodyPr wrap="square"/>
-                    <a:lstStyle/>
-                    <a:p>
-                      <a:pPr algn="ctr"/>
-                      <a:r>
-                        <a:rPr sz="900" b="1">
+              <a:tr h="256032">
+                <a:tc>
+                  <a:txBody>
+                    <a:bodyPr wrap="square"/>
+                    <a:lstStyle/>
+                    <a:p>
+                      <a:pPr algn="ctr"/>
+                      <a:r>
+                        <a:rPr sz="750" b="1">
                           <a:solidFill>
                             <a:srgbClr val="000000"/>
                           </a:solidFill>
@@ -7905,50 +7699,50 @@
                     <a:p>
                       <a:pPr algn="ctr"/>
                       <a:r>
-                        <a:rPr sz="900" b="0">
-                          <a:solidFill>
-                            <a:srgbClr val="000000"/>
-                          </a:solidFill>
-                          <a:latin typeface="맑은 고딕"/>
-                        </a:rPr>
-                        <a:t>#2</a:t>
-                      </a:r>
-                    </a:p>
-                  </a:txBody>
-                  <a:tcPr anchor="ctr" marL="27432" marR="27432" marT="18288" marB="18288">
-                    <a:lnL w="12700" cap="flat">
-                      <a:solidFill>
-                        <a:srgbClr val="000000"/>
-                      </a:solidFill>
-                    </a:lnL>
-                    <a:lnR w="12700" cap="flat">
-                      <a:solidFill>
-                        <a:srgbClr val="000000"/>
-                      </a:solidFill>
-                    </a:lnR>
-                    <a:lnT w="12700" cap="flat">
-                      <a:solidFill>
-                        <a:srgbClr val="000000"/>
-                      </a:solidFill>
-                    </a:lnT>
-                    <a:lnB w="12700" cap="flat">
-                      <a:solidFill>
-                        <a:srgbClr val="000000"/>
-                      </a:solidFill>
-                    </a:lnB>
-                    <a:solidFill>
-                      <a:srgbClr val="FFFFFF"/>
-                    </a:solidFill>
-                  </a:tcPr>
-                </a:tc>
-                <a:tc>
-                  <a:txBody>
-                    <a:bodyPr wrap="square"/>
-                    <a:lstStyle/>
-                    <a:p>
-                      <a:pPr algn="ctr"/>
-                      <a:r>
-                        <a:rPr sz="900" b="0">
+                        <a:rPr sz="750" b="0">
+                          <a:solidFill>
+                            <a:srgbClr val="000000"/>
+                          </a:solidFill>
+                          <a:latin typeface="맑은 고딕"/>
+                        </a:rPr>
+                        <a:t>2</a:t>
+                      </a:r>
+                    </a:p>
+                  </a:txBody>
+                  <a:tcPr anchor="ctr" marL="27432" marR="27432" marT="18288" marB="18288">
+                    <a:lnL w="12700" cap="flat">
+                      <a:solidFill>
+                        <a:srgbClr val="000000"/>
+                      </a:solidFill>
+                    </a:lnL>
+                    <a:lnR w="12700" cap="flat">
+                      <a:solidFill>
+                        <a:srgbClr val="000000"/>
+                      </a:solidFill>
+                    </a:lnR>
+                    <a:lnT w="12700" cap="flat">
+                      <a:solidFill>
+                        <a:srgbClr val="000000"/>
+                      </a:solidFill>
+                    </a:lnT>
+                    <a:lnB w="12700" cap="flat">
+                      <a:solidFill>
+                        <a:srgbClr val="000000"/>
+                      </a:solidFill>
+                    </a:lnB>
+                    <a:solidFill>
+                      <a:srgbClr val="FFFFFF"/>
+                    </a:solidFill>
+                  </a:tcPr>
+                </a:tc>
+                <a:tc>
+                  <a:txBody>
+                    <a:bodyPr wrap="square"/>
+                    <a:lstStyle/>
+                    <a:p>
+                      <a:pPr algn="ctr"/>
+                      <a:r>
+                        <a:rPr sz="750" b="0">
                           <a:solidFill>
                             <a:srgbClr val="000000"/>
                           </a:solidFill>
@@ -7991,7 +7785,7 @@
                     <a:p>
                       <a:pPr algn="ctr"/>
                       <a:r>
-                        <a:rPr sz="900" b="0">
+                        <a:rPr sz="750" b="0">
                           <a:solidFill>
                             <a:srgbClr val="000000"/>
                           </a:solidFill>
@@ -8034,7 +7828,7 @@
                     <a:p>
                       <a:pPr algn="ctr"/>
                       <a:r>
-                        <a:rPr sz="900" b="0">
+                        <a:rPr sz="750" b="0">
                           <a:solidFill>
                             <a:srgbClr val="000000"/>
                           </a:solidFill>
@@ -8077,7 +7871,7 @@
                     <a:p>
                       <a:pPr algn="ctr"/>
                       <a:r>
-                        <a:rPr sz="900" b="1">
+                        <a:rPr sz="750" b="1">
                           <a:solidFill>
                             <a:srgbClr val="000000"/>
                           </a:solidFill>
@@ -8114,15 +7908,15 @@
                   </a:tcPr>
                 </a:tc>
               </a:tr>
-              <a:tr h="320040">
-                <a:tc>
-                  <a:txBody>
-                    <a:bodyPr wrap="square"/>
-                    <a:lstStyle/>
-                    <a:p>
-                      <a:pPr algn="ctr"/>
-                      <a:r>
-                        <a:rPr sz="900" b="1">
+              <a:tr h="256032">
+                <a:tc>
+                  <a:txBody>
+                    <a:bodyPr wrap="square"/>
+                    <a:lstStyle/>
+                    <a:p>
+                      <a:pPr algn="ctr"/>
+                      <a:r>
+                        <a:rPr sz="750" b="1">
                           <a:solidFill>
                             <a:srgbClr val="000000"/>
                           </a:solidFill>
@@ -8165,50 +7959,50 @@
                     <a:p>
                       <a:pPr algn="ctr"/>
                       <a:r>
-                        <a:rPr sz="900" b="0">
-                          <a:solidFill>
-                            <a:srgbClr val="000000"/>
-                          </a:solidFill>
-                          <a:latin typeface="맑은 고딕"/>
-                        </a:rPr>
-                        <a:t>#3</a:t>
-                      </a:r>
-                    </a:p>
-                  </a:txBody>
-                  <a:tcPr anchor="ctr" marL="27432" marR="27432" marT="18288" marB="18288">
-                    <a:lnL w="12700" cap="flat">
-                      <a:solidFill>
-                        <a:srgbClr val="000000"/>
-                      </a:solidFill>
-                    </a:lnL>
-                    <a:lnR w="12700" cap="flat">
-                      <a:solidFill>
-                        <a:srgbClr val="000000"/>
-                      </a:solidFill>
-                    </a:lnR>
-                    <a:lnT w="12700" cap="flat">
-                      <a:solidFill>
-                        <a:srgbClr val="000000"/>
-                      </a:solidFill>
-                    </a:lnT>
-                    <a:lnB w="12700" cap="flat">
-                      <a:solidFill>
-                        <a:srgbClr val="000000"/>
-                      </a:solidFill>
-                    </a:lnB>
-                    <a:solidFill>
-                      <a:srgbClr val="FFFFFF"/>
-                    </a:solidFill>
-                  </a:tcPr>
-                </a:tc>
-                <a:tc>
-                  <a:txBody>
-                    <a:bodyPr wrap="square"/>
-                    <a:lstStyle/>
-                    <a:p>
-                      <a:pPr algn="ctr"/>
-                      <a:r>
-                        <a:rPr sz="900" b="0">
+                        <a:rPr sz="750" b="0">
+                          <a:solidFill>
+                            <a:srgbClr val="000000"/>
+                          </a:solidFill>
+                          <a:latin typeface="맑은 고딕"/>
+                        </a:rPr>
+                        <a:t>3</a:t>
+                      </a:r>
+                    </a:p>
+                  </a:txBody>
+                  <a:tcPr anchor="ctr" marL="27432" marR="27432" marT="18288" marB="18288">
+                    <a:lnL w="12700" cap="flat">
+                      <a:solidFill>
+                        <a:srgbClr val="000000"/>
+                      </a:solidFill>
+                    </a:lnL>
+                    <a:lnR w="12700" cap="flat">
+                      <a:solidFill>
+                        <a:srgbClr val="000000"/>
+                      </a:solidFill>
+                    </a:lnR>
+                    <a:lnT w="12700" cap="flat">
+                      <a:solidFill>
+                        <a:srgbClr val="000000"/>
+                      </a:solidFill>
+                    </a:lnT>
+                    <a:lnB w="12700" cap="flat">
+                      <a:solidFill>
+                        <a:srgbClr val="000000"/>
+                      </a:solidFill>
+                    </a:lnB>
+                    <a:solidFill>
+                      <a:srgbClr val="FFFFFF"/>
+                    </a:solidFill>
+                  </a:tcPr>
+                </a:tc>
+                <a:tc>
+                  <a:txBody>
+                    <a:bodyPr wrap="square"/>
+                    <a:lstStyle/>
+                    <a:p>
+                      <a:pPr algn="ctr"/>
+                      <a:r>
+                        <a:rPr sz="750" b="0">
                           <a:solidFill>
                             <a:srgbClr val="000000"/>
                           </a:solidFill>
@@ -8251,7 +8045,7 @@
                     <a:p>
                       <a:pPr algn="ctr"/>
                       <a:r>
-                        <a:rPr sz="900" b="0">
+                        <a:rPr sz="750" b="0">
                           <a:solidFill>
                             <a:srgbClr val="000000"/>
                           </a:solidFill>
@@ -8294,7 +8088,7 @@
                     <a:p>
                       <a:pPr algn="ctr"/>
                       <a:r>
-                        <a:rPr sz="900" b="0">
+                        <a:rPr sz="750" b="0">
                           <a:solidFill>
                             <a:srgbClr val="000000"/>
                           </a:solidFill>
@@ -8337,7 +8131,7 @@
                     <a:p>
                       <a:pPr algn="ctr"/>
                       <a:r>
-                        <a:rPr sz="900" b="1">
+                        <a:rPr sz="750" b="1">
                           <a:solidFill>
                             <a:srgbClr val="000000"/>
                           </a:solidFill>
@@ -8374,21 +8168,21 @@
                   </a:tcPr>
                 </a:tc>
               </a:tr>
-              <a:tr h="320040">
-                <a:tc>
-                  <a:txBody>
-                    <a:bodyPr wrap="square"/>
-                    <a:lstStyle/>
-                    <a:p>
-                      <a:pPr algn="ctr"/>
-                      <a:r>
-                        <a:rPr sz="900" b="1">
-                          <a:solidFill>
-                            <a:srgbClr val="000000"/>
-                          </a:solidFill>
-                          <a:latin typeface="맑은 고딕"/>
-                        </a:rPr>
-                        <a:t>설비 자동 도포</a:t>
+              <a:tr h="256032">
+                <a:tc>
+                  <a:txBody>
+                    <a:bodyPr wrap="square"/>
+                    <a:lstStyle/>
+                    <a:p>
+                      <a:pPr algn="ctr"/>
+                      <a:r>
+                        <a:rPr sz="750" b="1">
+                          <a:solidFill>
+                            <a:srgbClr val="000000"/>
+                          </a:solidFill>
+                          <a:latin typeface="맑은 고딕"/>
+                        </a:rPr>
+                        <a:t>설비자동</a:t>
                       </a:r>
                     </a:p>
                   </a:txBody>
@@ -8425,50 +8219,50 @@
                     <a:p>
                       <a:pPr algn="ctr"/>
                       <a:r>
-                        <a:rPr sz="900" b="0">
-                          <a:solidFill>
-                            <a:srgbClr val="000000"/>
-                          </a:solidFill>
-                          <a:latin typeface="맑은 고딕"/>
-                        </a:rPr>
-                        <a:t>#1</a:t>
-                      </a:r>
-                    </a:p>
-                  </a:txBody>
-                  <a:tcPr anchor="ctr" marL="27432" marR="27432" marT="18288" marB="18288">
-                    <a:lnL w="12700" cap="flat">
-                      <a:solidFill>
-                        <a:srgbClr val="000000"/>
-                      </a:solidFill>
-                    </a:lnL>
-                    <a:lnR w="12700" cap="flat">
-                      <a:solidFill>
-                        <a:srgbClr val="000000"/>
-                      </a:solidFill>
-                    </a:lnR>
-                    <a:lnT w="12700" cap="flat">
-                      <a:solidFill>
-                        <a:srgbClr val="000000"/>
-                      </a:solidFill>
-                    </a:lnT>
-                    <a:lnB w="12700" cap="flat">
-                      <a:solidFill>
-                        <a:srgbClr val="000000"/>
-                      </a:solidFill>
-                    </a:lnB>
-                    <a:solidFill>
-                      <a:srgbClr val="FFFFFF"/>
-                    </a:solidFill>
-                  </a:tcPr>
-                </a:tc>
-                <a:tc>
-                  <a:txBody>
-                    <a:bodyPr wrap="square"/>
-                    <a:lstStyle/>
-                    <a:p>
-                      <a:pPr algn="ctr"/>
-                      <a:r>
-                        <a:rPr sz="900" b="0">
+                        <a:rPr sz="750" b="0">
+                          <a:solidFill>
+                            <a:srgbClr val="000000"/>
+                          </a:solidFill>
+                          <a:latin typeface="맑은 고딕"/>
+                        </a:rPr>
+                        <a:t>1</a:t>
+                      </a:r>
+                    </a:p>
+                  </a:txBody>
+                  <a:tcPr anchor="ctr" marL="27432" marR="27432" marT="18288" marB="18288">
+                    <a:lnL w="12700" cap="flat">
+                      <a:solidFill>
+                        <a:srgbClr val="000000"/>
+                      </a:solidFill>
+                    </a:lnL>
+                    <a:lnR w="12700" cap="flat">
+                      <a:solidFill>
+                        <a:srgbClr val="000000"/>
+                      </a:solidFill>
+                    </a:lnR>
+                    <a:lnT w="12700" cap="flat">
+                      <a:solidFill>
+                        <a:srgbClr val="000000"/>
+                      </a:solidFill>
+                    </a:lnT>
+                    <a:lnB w="12700" cap="flat">
+                      <a:solidFill>
+                        <a:srgbClr val="000000"/>
+                      </a:solidFill>
+                    </a:lnB>
+                    <a:solidFill>
+                      <a:srgbClr val="FFFFFF"/>
+                    </a:solidFill>
+                  </a:tcPr>
+                </a:tc>
+                <a:tc>
+                  <a:txBody>
+                    <a:bodyPr wrap="square"/>
+                    <a:lstStyle/>
+                    <a:p>
+                      <a:pPr algn="ctr"/>
+                      <a:r>
+                        <a:rPr sz="750" b="0">
                           <a:solidFill>
                             <a:srgbClr val="000000"/>
                           </a:solidFill>
@@ -8511,7 +8305,7 @@
                     <a:p>
                       <a:pPr algn="ctr"/>
                       <a:r>
-                        <a:rPr sz="900" b="0">
+                        <a:rPr sz="750" b="0">
                           <a:solidFill>
                             <a:srgbClr val="000000"/>
                           </a:solidFill>
@@ -8554,7 +8348,7 @@
                     <a:p>
                       <a:pPr algn="ctr"/>
                       <a:r>
-                        <a:rPr sz="900" b="0">
+                        <a:rPr sz="750" b="0">
                           <a:solidFill>
                             <a:srgbClr val="000000"/>
                           </a:solidFill>
@@ -8597,7 +8391,7 @@
                     <a:p>
                       <a:pPr algn="ctr"/>
                       <a:r>
-                        <a:rPr sz="900" b="1">
+                        <a:rPr sz="750" b="1">
                           <a:solidFill>
                             <a:srgbClr val="000000"/>
                           </a:solidFill>
@@ -8634,15 +8428,15 @@
                   </a:tcPr>
                 </a:tc>
               </a:tr>
-              <a:tr h="320040">
-                <a:tc>
-                  <a:txBody>
-                    <a:bodyPr wrap="square"/>
-                    <a:lstStyle/>
-                    <a:p>
-                      <a:pPr algn="ctr"/>
-                      <a:r>
-                        <a:rPr sz="900" b="1">
+              <a:tr h="256032">
+                <a:tc>
+                  <a:txBody>
+                    <a:bodyPr wrap="square"/>
+                    <a:lstStyle/>
+                    <a:p>
+                      <a:pPr algn="ctr"/>
+                      <a:r>
+                        <a:rPr sz="750" b="1">
                           <a:solidFill>
                             <a:srgbClr val="000000"/>
                           </a:solidFill>
@@ -8685,50 +8479,50 @@
                     <a:p>
                       <a:pPr algn="ctr"/>
                       <a:r>
-                        <a:rPr sz="900" b="0">
-                          <a:solidFill>
-                            <a:srgbClr val="000000"/>
-                          </a:solidFill>
-                          <a:latin typeface="맑은 고딕"/>
-                        </a:rPr>
-                        <a:t>#2</a:t>
-                      </a:r>
-                    </a:p>
-                  </a:txBody>
-                  <a:tcPr anchor="ctr" marL="27432" marR="27432" marT="18288" marB="18288">
-                    <a:lnL w="12700" cap="flat">
-                      <a:solidFill>
-                        <a:srgbClr val="000000"/>
-                      </a:solidFill>
-                    </a:lnL>
-                    <a:lnR w="12700" cap="flat">
-                      <a:solidFill>
-                        <a:srgbClr val="000000"/>
-                      </a:solidFill>
-                    </a:lnR>
-                    <a:lnT w="12700" cap="flat">
-                      <a:solidFill>
-                        <a:srgbClr val="000000"/>
-                      </a:solidFill>
-                    </a:lnT>
-                    <a:lnB w="12700" cap="flat">
-                      <a:solidFill>
-                        <a:srgbClr val="000000"/>
-                      </a:solidFill>
-                    </a:lnB>
-                    <a:solidFill>
-                      <a:srgbClr val="FFFFFF"/>
-                    </a:solidFill>
-                  </a:tcPr>
-                </a:tc>
-                <a:tc>
-                  <a:txBody>
-                    <a:bodyPr wrap="square"/>
-                    <a:lstStyle/>
-                    <a:p>
-                      <a:pPr algn="ctr"/>
-                      <a:r>
-                        <a:rPr sz="900" b="0">
+                        <a:rPr sz="750" b="0">
+                          <a:solidFill>
+                            <a:srgbClr val="000000"/>
+                          </a:solidFill>
+                          <a:latin typeface="맑은 고딕"/>
+                        </a:rPr>
+                        <a:t>2</a:t>
+                      </a:r>
+                    </a:p>
+                  </a:txBody>
+                  <a:tcPr anchor="ctr" marL="27432" marR="27432" marT="18288" marB="18288">
+                    <a:lnL w="12700" cap="flat">
+                      <a:solidFill>
+                        <a:srgbClr val="000000"/>
+                      </a:solidFill>
+                    </a:lnL>
+                    <a:lnR w="12700" cap="flat">
+                      <a:solidFill>
+                        <a:srgbClr val="000000"/>
+                      </a:solidFill>
+                    </a:lnR>
+                    <a:lnT w="12700" cap="flat">
+                      <a:solidFill>
+                        <a:srgbClr val="000000"/>
+                      </a:solidFill>
+                    </a:lnT>
+                    <a:lnB w="12700" cap="flat">
+                      <a:solidFill>
+                        <a:srgbClr val="000000"/>
+                      </a:solidFill>
+                    </a:lnB>
+                    <a:solidFill>
+                      <a:srgbClr val="FFFFFF"/>
+                    </a:solidFill>
+                  </a:tcPr>
+                </a:tc>
+                <a:tc>
+                  <a:txBody>
+                    <a:bodyPr wrap="square"/>
+                    <a:lstStyle/>
+                    <a:p>
+                      <a:pPr algn="ctr"/>
+                      <a:r>
+                        <a:rPr sz="750" b="0">
                           <a:solidFill>
                             <a:srgbClr val="000000"/>
                           </a:solidFill>
@@ -8771,7 +8565,7 @@
                     <a:p>
                       <a:pPr algn="ctr"/>
                       <a:r>
-                        <a:rPr sz="900" b="0">
+                        <a:rPr sz="750" b="0">
                           <a:solidFill>
                             <a:srgbClr val="000000"/>
                           </a:solidFill>
@@ -8814,7 +8608,7 @@
                     <a:p>
                       <a:pPr algn="ctr"/>
                       <a:r>
-                        <a:rPr sz="900" b="0">
+                        <a:rPr sz="750" b="0">
                           <a:solidFill>
                             <a:srgbClr val="000000"/>
                           </a:solidFill>
@@ -8857,7 +8651,7 @@
                     <a:p>
                       <a:pPr algn="ctr"/>
                       <a:r>
-                        <a:rPr sz="900" b="1">
+                        <a:rPr sz="750" b="1">
                           <a:solidFill>
                             <a:srgbClr val="000000"/>
                           </a:solidFill>
@@ -8906,8 +8700,8 @@
         </p:nvSpPr>
         <p:spPr>
           <a:xfrm>
-            <a:off x="384048" y="4160520"/>
-            <a:ext cx="9107424" cy="292608"/>
+            <a:off x="384048" y="3886200"/>
+            <a:ext cx="5212080" cy="292608"/>
           </a:xfrm>
           <a:prstGeom prst="rect">
             <a:avLst/>
@@ -8932,7 +8726,7 @@
                 </a:solidFill>
                 <a:latin typeface="맑은 고딕"/>
               </a:rPr>
-              <a:t>▣ 평균 편차 비교</a:t>
+              <a:t>▣ 평균 편차(Max-Min) 비교</a:t>
             </a:r>
           </a:p>
         </p:txBody>
@@ -8945,8 +8739,8 @@
         </p:nvSpPr>
         <p:spPr>
           <a:xfrm>
-            <a:off x="640080" y="4480560"/>
-            <a:ext cx="1554480" cy="457200"/>
+            <a:off x="384048" y="4233672"/>
+            <a:ext cx="960120" cy="274320"/>
           </a:xfrm>
           <a:prstGeom prst="rect">
             <a:avLst/>
@@ -8960,24 +8754,13 @@
           <a:lstStyle/>
           <a:p>
             <a:r>
-              <a:rPr sz="1000">
+              <a:rPr sz="850">
                 <a:solidFill>
                   <a:srgbClr val="000000"/>
                 </a:solidFill>
                 <a:latin typeface="맑은 고딕"/>
               </a:rPr>
               <a:t>Manual</a:t>
-            </a:r>
-          </a:p>
-          <a:p>
-            <a:r>
-              <a:rPr sz="1000">
-                <a:solidFill>
-                  <a:srgbClr val="000000"/>
-                </a:solidFill>
-                <a:latin typeface="맑은 고딕"/>
-              </a:rPr>
-              <a:t>도포</a:t>
             </a:r>
           </a:p>
         </p:txBody>
@@ -8990,8 +8773,8 @@
         </p:nvSpPr>
         <p:spPr>
           <a:xfrm>
-            <a:off x="2377440" y="4526280"/>
-            <a:ext cx="727610" cy="365760"/>
+            <a:off x="1435607" y="4206240"/>
+            <a:ext cx="257462" cy="274320"/>
           </a:xfrm>
           <a:prstGeom prst="rect">
             <a:avLst/>
@@ -9020,8 +8803,8 @@
         </p:nvSpPr>
         <p:spPr>
           <a:xfrm>
-            <a:off x="3196490" y="4526280"/>
-            <a:ext cx="1188720" cy="365760"/>
+            <a:off x="1766222" y="4233672"/>
+            <a:ext cx="1097280" cy="274320"/>
           </a:xfrm>
           <a:prstGeom prst="rect">
             <a:avLst/>
@@ -9035,7 +8818,7 @@
           <a:lstStyle/>
           <a:p>
             <a:r>
-              <a:rPr sz="1000">
+              <a:rPr sz="850">
                 <a:solidFill>
                   <a:srgbClr val="0070C0"/>
                 </a:solidFill>
@@ -9054,8 +8837,8 @@
         </p:nvSpPr>
         <p:spPr>
           <a:xfrm>
-            <a:off x="640080" y="5120640"/>
-            <a:ext cx="1554480" cy="457200"/>
+            <a:off x="384048" y="4617720"/>
+            <a:ext cx="960120" cy="365760"/>
           </a:xfrm>
           <a:prstGeom prst="rect">
             <a:avLst/>
@@ -9069,7 +8852,7 @@
           <a:lstStyle/>
           <a:p>
             <a:r>
-              <a:rPr sz="1000">
+              <a:rPr sz="800">
                 <a:solidFill>
                   <a:srgbClr val="000000"/>
                 </a:solidFill>
@@ -9080,7 +8863,7 @@
           </a:p>
           <a:p>
             <a:r>
-              <a:rPr sz="1000">
+              <a:rPr sz="800">
                 <a:solidFill>
                   <a:srgbClr val="000000"/>
                 </a:solidFill>
@@ -9099,8 +8882,8 @@
         </p:nvSpPr>
         <p:spPr>
           <a:xfrm>
-            <a:off x="2377440" y="5166360"/>
-            <a:ext cx="5943600" cy="365760"/>
+            <a:off x="1435607" y="4663440"/>
+            <a:ext cx="2103120" cy="274320"/>
           </a:xfrm>
           <a:prstGeom prst="rect">
             <a:avLst/>
@@ -9129,8 +8912,8 @@
         </p:nvSpPr>
         <p:spPr>
           <a:xfrm>
-            <a:off x="8412480" y="5166360"/>
-            <a:ext cx="1188720" cy="365760"/>
+            <a:off x="3611879" y="4690872"/>
+            <a:ext cx="1097280" cy="274320"/>
           </a:xfrm>
           <a:prstGeom prst="rect">
             <a:avLst/>
@@ -9144,7 +8927,7 @@
           <a:lstStyle/>
           <a:p>
             <a:r>
-              <a:rPr sz="1000">
+              <a:rPr sz="850">
                 <a:solidFill>
                   <a:srgbClr val="C0504D"/>
                 </a:solidFill>
@@ -9163,8 +8946,8 @@
         </p:nvSpPr>
         <p:spPr>
           <a:xfrm>
-            <a:off x="384048" y="5623560"/>
-            <a:ext cx="9107424" cy="292608"/>
+            <a:off x="384048" y="5166360"/>
+            <a:ext cx="5212080" cy="292608"/>
           </a:xfrm>
           <a:prstGeom prst="rect">
             <a:avLst/>
@@ -9202,8 +8985,8 @@
         </p:nvSpPr>
         <p:spPr>
           <a:xfrm>
-            <a:off x="457200" y="5943600"/>
-            <a:ext cx="8961120" cy="548640"/>
+            <a:off x="384048" y="5486400"/>
+            <a:ext cx="5212080" cy="731520"/>
           </a:xfrm>
           <a:prstGeom prst="rect">
             <a:avLst/>
@@ -9217,24 +9000,149 @@
           <a:lstStyle/>
           <a:p>
             <a:r>
-              <a:rPr sz="950">
+              <a:rPr sz="850">
                 <a:solidFill>
                   <a:srgbClr val="000000"/>
                 </a:solidFill>
                 <a:latin typeface="맑은 고딕"/>
               </a:rPr>
-              <a:t>■ Manual 도포 평균 편차 58.7um vs 설비 자동 도포 평균 편차 479.5um — 설비 자동 도포가 약 8.2배 더 큰 편차 확인</a:t>
+              <a:t>■ Manual 58.7um vs 설비 자동 479.5um — 설비가 약 8.2배 더 큰 편차</a:t>
             </a:r>
           </a:p>
           <a:p>
             <a:r>
-              <a:rPr sz="950">
+              <a:rPr sz="850">
                 <a:solidFill>
                   <a:srgbClr val="000000"/>
                 </a:solidFill>
                 <a:latin typeface="맑은 고딕"/>
               </a:rPr>
-              <a:t>■ Manual 도포가 좌/우 형상 균일도 측면에서 더 안정적임을 확인, NTC 부위는 Manual 도포 적용 권장</a:t>
+              <a:t>■ Manual 도포가 좌/우 균일도 측면에서 더 안정적, NTC 부위 Manual 도포 적용 권장</a:t>
+            </a:r>
+          </a:p>
+        </p:txBody>
+      </p:sp>
+      <p:sp>
+        <p:nvSpPr>
+          <p:cNvPr id="18" name="Rectangle 17"/>
+          <p:cNvSpPr/>
+          <p:nvPr/>
+        </p:nvSpPr>
+        <p:spPr>
+          <a:xfrm>
+            <a:off x="5733288" y="914400"/>
+            <a:ext cx="3776472" cy="292608"/>
+          </a:xfrm>
+          <a:prstGeom prst="rect">
+            <a:avLst/>
+          </a:prstGeom>
+          <a:solidFill>
+            <a:srgbClr val="17365D"/>
+          </a:solidFill>
+          <a:ln>
+            <a:noFill/>
+          </a:ln>
+          <a:effectLst/>
+        </p:spPr>
+        <p:txBody>
+          <a:bodyPr rtlCol="0" anchor="ctr" wrap="square" lIns="73152" tIns="0" bIns="0"/>
+          <a:lstStyle/>
+          <a:p>
+            <a:pPr algn="l"/>
+            <a:r>
+              <a:rPr sz="1100" b="1">
+                <a:solidFill>
+                  <a:srgbClr val="FFFFFF"/>
+                </a:solidFill>
+                <a:latin typeface="맑은 고딕"/>
+              </a:rPr>
+              <a:t>▣ 대표 시료 사진</a:t>
+            </a:r>
+          </a:p>
+        </p:txBody>
+      </p:sp>
+      <p:sp>
+        <p:nvSpPr>
+          <p:cNvPr id="19" name="Rectangle 18"/>
+          <p:cNvSpPr/>
+          <p:nvPr/>
+        </p:nvSpPr>
+        <p:spPr>
+          <a:xfrm>
+            <a:off x="5733288" y="1344168"/>
+            <a:ext cx="3776472" cy="2276856"/>
+          </a:xfrm>
+          <a:prstGeom prst="rect">
+            <a:avLst/>
+          </a:prstGeom>
+          <a:solidFill>
+            <a:srgbClr val="F2F2F2"/>
+          </a:solidFill>
+          <a:ln w="12700">
+            <a:solidFill>
+              <a:srgbClr val="B0B0B0"/>
+            </a:solidFill>
+            <a:prstDash val="sysDot"/>
+          </a:ln>
+          <a:effectLst/>
+        </p:spPr>
+        <p:txBody>
+          <a:bodyPr rtlCol="0" anchor="ctr" wrap="square"/>
+          <a:lstStyle/>
+          <a:p>
+            <a:pPr algn="ctr"/>
+            <a:r>
+              <a:rPr sz="1000" b="0">
+                <a:solidFill>
+                  <a:srgbClr val="808080"/>
+                </a:solidFill>
+                <a:latin typeface="맑은 고딕"/>
+              </a:rPr>
+              <a:t>Manual 도포 예시 사진
+(자리 예약)</a:t>
+            </a:r>
+          </a:p>
+        </p:txBody>
+      </p:sp>
+      <p:sp>
+        <p:nvSpPr>
+          <p:cNvPr id="20" name="Rectangle 19"/>
+          <p:cNvSpPr/>
+          <p:nvPr/>
+        </p:nvSpPr>
+        <p:spPr>
+          <a:xfrm>
+            <a:off x="5733288" y="3758184"/>
+            <a:ext cx="3776472" cy="2276856"/>
+          </a:xfrm>
+          <a:prstGeom prst="rect">
+            <a:avLst/>
+          </a:prstGeom>
+          <a:solidFill>
+            <a:srgbClr val="F2F2F2"/>
+          </a:solidFill>
+          <a:ln w="12700">
+            <a:solidFill>
+              <a:srgbClr val="B0B0B0"/>
+            </a:solidFill>
+            <a:prstDash val="sysDot"/>
+          </a:ln>
+          <a:effectLst/>
+        </p:spPr>
+        <p:txBody>
+          <a:bodyPr rtlCol="0" anchor="ctr" wrap="square"/>
+          <a:lstStyle/>
+          <a:p>
+            <a:pPr algn="ctr"/>
+            <a:r>
+              <a:rPr sz="1000" b="0">
+                <a:solidFill>
+                  <a:srgbClr val="808080"/>
+                </a:solidFill>
+                <a:latin typeface="맑은 고딕"/>
+              </a:rPr>
+              <a:t>설비 자동 도포 예시 사진
+(자리 예약)</a:t>
             </a:r>
           </a:p>
         </p:txBody>
@@ -10097,7 +10005,7 @@
                           </a:solidFill>
                           <a:latin typeface="맑은 고딕"/>
                         </a:rPr>
-                        <a:t>1051.2</a:t>
+                        <a:t>1102.9</a:t>
                       </a:r>
                     </a:p>
                   </a:txBody>
@@ -11224,7 +11132,7 @@
                           </a:solidFill>
                           <a:latin typeface="맑은 고딕"/>
                         </a:rPr>
-                        <a:t>Sensing Tab 6p / Fuse 6p / Connector 5p / NTC 3p (부위별 1p씩, TOP·RH 제품 분석)</a:t>
+                        <a:t>Sensing Tab 6p / Fuse 6p / Connector 4p / NTC 3p (부위별 1p씩, TOP·RH 제품 분석)</a:t>
                       </a:r>
                     </a:p>
                   </a:txBody>
